--- a/exports/pptx/lessons/middle-module-15-project-implementation/day-04-research-2.pptx
+++ b/exports/pptx/lessons/middle-module-15-project-implementation/day-04-research-2.pptx
@@ -4008,8 +4008,8 @@
         </p:nvSpPr>
         <p:spPr>
           <a:xfrm>
-            <a:off x="634901" y="5359896"/>
-            <a:ext cx="8102798" cy="281880"/>
+            <a:off x="406301" y="2338536"/>
+            <a:ext cx="8498026" cy="213271"/>
           </a:xfrm>
           <a:prstGeom prst="rect">
             <a:avLst/>
@@ -4021,46 +4021,28 @@
           <a:bodyPr wrap="square" lIns="0" tIns="0" rIns="0" bIns="0" rtlCol="0" anchor="t"/>
           <a:lstStyle/>
           <a:p>
-            <a:pPr algn="l" marL="342900" indent="-342900">
-              <a:lnSpc>
-                <a:spcPts val="1620"/>
-              </a:lnSpc>
-              <a:spcAft>
-                <a:spcPts val="300"/>
-              </a:spcAft>
-              <a:buSzPct val="100000"/>
-              <a:buChar char="•"/>
-            </a:pPr>
-            <a:r>
-              <a:rPr lang="en-US" sz="1200" b="1" dirty="0">
-                <a:solidFill>
-                  <a:srgbClr val="1C2833"/>
-                </a:solidFill>
-                <a:latin typeface="Arial" pitchFamily="34" charset="0"/>
-                <a:ea typeface="Arial" pitchFamily="34" charset="-122"/>
-                <a:cs typeface="Arial" pitchFamily="34" charset="-120"/>
-              </a:rPr>
-              <a:t>Sketch rules</a:t>
-            </a:r>
-            <a:pPr algn="l" indent="0" marL="0">
-              <a:lnSpc>
-                <a:spcPts val="1620"/>
-              </a:lnSpc>
-              <a:spcAft>
-                <a:spcPts val="300"/>
-              </a:spcAft>
-              <a:buNone/>
-            </a:pPr>
-            <a:r>
-              <a:rPr lang="en-US" sz="1200" dirty="0">
-                <a:solidFill>
-                  <a:srgbClr val="1C2833"/>
-                </a:solidFill>
-                <a:latin typeface="Arial" pitchFamily="34" charset="0"/>
-                <a:ea typeface="Arial" pitchFamily="34" charset="-122"/>
-                <a:cs typeface="Arial" pitchFamily="34" charset="-120"/>
-              </a:rPr>
-              <a:t> (2 min):</a:t>
+            <a:pPr algn="l" indent="0" marL="0">
+              <a:lnSpc>
+                <a:spcPts val="1680"/>
+              </a:lnSpc>
+              <a:spcBef>
+                <a:spcPts val="300"/>
+              </a:spcBef>
+              <a:spcAft>
+                <a:spcPts val="300"/>
+              </a:spcAft>
+              <a:buNone/>
+            </a:pPr>
+            <a:r>
+              <a:rPr lang="en-US" sz="1200" i="1" dirty="0">
+                <a:solidFill>
+                  <a:srgbClr val="1C2833"/>
+                </a:solidFill>
+                <a:latin typeface="Arial" pitchFamily="34" charset="0"/>
+                <a:ea typeface="Arial" pitchFamily="34" charset="-122"/>
+                <a:cs typeface="Arial" pitchFamily="34" charset="-120"/>
+              </a:rPr>
+              <a:t>Each row: Project · Sketch looks like.</a:t>
             </a:r>
             <a:endParaRPr lang="en-US" sz="1200" dirty="0"/>
           </a:p>
@@ -4074,8 +4056,8 @@
         </p:nvSpPr>
         <p:spPr>
           <a:xfrm>
-            <a:off x="406301" y="5730627"/>
-            <a:ext cx="8498026" cy="426541"/>
+            <a:off x="634901" y="2640657"/>
+            <a:ext cx="8102798" cy="2475905"/>
           </a:xfrm>
           <a:prstGeom prst="rect">
             <a:avLst/>
@@ -4087,13 +4069,31 @@
           <a:bodyPr wrap="square" lIns="0" tIns="0" rIns="0" bIns="0" rtlCol="0" anchor="t"/>
           <a:lstStyle/>
           <a:p>
-            <a:pPr algn="l" indent="0" marL="0">
-              <a:lnSpc>
-                <a:spcPts val="1680"/>
-              </a:lnSpc>
-              <a:spcBef>
-                <a:spcPts val="300"/>
-              </a:spcBef>
+            <a:pPr algn="l" marL="342900" indent="-342900">
+              <a:lnSpc>
+                <a:spcPts val="1620"/>
+              </a:lnSpc>
+              <a:spcAft>
+                <a:spcPts val="300"/>
+              </a:spcAft>
+              <a:buSzPct val="100000"/>
+              <a:buChar char="•"/>
+            </a:pPr>
+            <a:r>
+              <a:rPr lang="en-US" sz="1200" b="1" dirty="0">
+                <a:solidFill>
+                  <a:srgbClr val="1C2833"/>
+                </a:solidFill>
+                <a:latin typeface="Arial" pitchFamily="34" charset="0"/>
+                <a:ea typeface="Arial" pitchFamily="34" charset="-122"/>
+                <a:cs typeface="Arial" pitchFamily="34" charset="-120"/>
+              </a:rPr>
+              <a:t>Fermented-foods study</a:t>
+            </a:r>
+            <a:pPr algn="l" indent="0" marL="0">
+              <a:lnSpc>
+                <a:spcPts val="1620"/>
+              </a:lnSpc>
               <a:spcAft>
                 <a:spcPts val="300"/>
               </a:spcAft>
@@ -4108,38 +4108,36 @@
                 <a:ea typeface="Arial" pitchFamily="34" charset="-122"/>
                 <a:cs typeface="Arial" pitchFamily="34" charset="-120"/>
               </a:rPr>
-              <a:t>– Pencil only. You'll change it. – Label everything — even if you "know" what it is. – Annotate dimensions ("this card will be 4" × 6"", "the poster is A2"). – Leave white space for things you haven't figured out yet — write </a:t>
-            </a:r>
-            <a:pPr algn="l" indent="0" marL="0">
-              <a:lnSpc>
-                <a:spcPts val="1680"/>
-              </a:lnSpc>
-              <a:spcBef>
-                <a:spcPts val="300"/>
-              </a:spcBef>
-              <a:spcAft>
-                <a:spcPts val="300"/>
-              </a:spcAft>
-              <a:buNone/>
-            </a:pPr>
-            <a:r>
-              <a:rPr lang="en-US" sz="1200" i="1" dirty="0">
-                <a:solidFill>
-                  <a:srgbClr val="1C2833"/>
-                </a:solidFill>
-                <a:latin typeface="Arial" pitchFamily="34" charset="0"/>
-                <a:ea typeface="Arial" pitchFamily="34" charset="-122"/>
-                <a:cs typeface="Arial" pitchFamily="34" charset="-120"/>
-              </a:rPr>
-              <a:t>"TBD"</a:t>
-            </a:r>
-            <a:pPr algn="l" indent="0" marL="0">
-              <a:lnSpc>
-                <a:spcPts val="1680"/>
-              </a:lnSpc>
-              <a:spcBef>
-                <a:spcPts val="300"/>
-              </a:spcBef>
+              <a:t> — Layout of the poster: experimental setup, photo positions, observation table</a:t>
+            </a:r>
+            <a:endParaRPr lang="en-US" sz="1200" dirty="0"/>
+          </a:p>
+          <a:p>
+            <a:pPr algn="l" marL="342900" indent="-342900">
+              <a:lnSpc>
+                <a:spcPts val="1620"/>
+              </a:lnSpc>
+              <a:spcAft>
+                <a:spcPts val="300"/>
+              </a:spcAft>
+              <a:buSzPct val="100000"/>
+              <a:buChar char="•"/>
+            </a:pPr>
+            <a:r>
+              <a:rPr lang="en-US" sz="1200" b="1" dirty="0">
+                <a:solidFill>
+                  <a:srgbClr val="1C2833"/>
+                </a:solidFill>
+                <a:latin typeface="Arial" pitchFamily="34" charset="0"/>
+                <a:ea typeface="Arial" pitchFamily="34" charset="-122"/>
+                <a:cs typeface="Arial" pitchFamily="34" charset="-120"/>
+              </a:rPr>
+              <a:t>Mandala / geometry</a:t>
+            </a:r>
+            <a:pPr algn="l" indent="0" marL="0">
+              <a:lnSpc>
+                <a:spcPts val="1620"/>
+              </a:lnSpc>
               <a:spcAft>
                 <a:spcPts val="300"/>
               </a:spcAft>
@@ -4154,7 +4152,359 @@
                 <a:ea typeface="Arial" pitchFamily="34" charset="-122"/>
                 <a:cs typeface="Arial" pitchFamily="34" charset="-120"/>
               </a:rPr>
-              <a:t> and move on.</a:t>
+              <a:t> — Pencil construction lines + petal layout + colour key</a:t>
+            </a:r>
+            <a:endParaRPr lang="en-US" sz="1200" dirty="0"/>
+          </a:p>
+          <a:p>
+            <a:pPr algn="l" marL="342900" indent="-342900">
+              <a:lnSpc>
+                <a:spcPts val="1620"/>
+              </a:lnSpc>
+              <a:spcAft>
+                <a:spcPts val="300"/>
+              </a:spcAft>
+              <a:buSzPct val="100000"/>
+              <a:buChar char="•"/>
+            </a:pPr>
+            <a:r>
+              <a:rPr lang="en-US" sz="1200" b="1" dirty="0">
+                <a:solidFill>
+                  <a:srgbClr val="1C2833"/>
+                </a:solidFill>
+                <a:latin typeface="Arial" pitchFamily="34" charset="0"/>
+                <a:ea typeface="Arial" pitchFamily="34" charset="-122"/>
+                <a:cs typeface="Arial" pitchFamily="34" charset="-120"/>
+              </a:rPr>
+              <a:t>Calendar</a:t>
+            </a:r>
+            <a:pPr algn="l" indent="0" marL="0">
+              <a:lnSpc>
+                <a:spcPts val="1620"/>
+              </a:lnSpc>
+              <a:spcAft>
+                <a:spcPts val="300"/>
+              </a:spcAft>
+              <a:buNone/>
+            </a:pPr>
+            <a:r>
+              <a:rPr lang="en-US" sz="1200" dirty="0">
+                <a:solidFill>
+                  <a:srgbClr val="1C2833"/>
+                </a:solidFill>
+                <a:latin typeface="Arial" pitchFamily="34" charset="0"/>
+                <a:ea typeface="Arial" pitchFamily="34" charset="-122"/>
+                <a:cs typeface="Arial" pitchFamily="34" charset="-120"/>
+              </a:rPr>
+              <a:t> — One-week template showing all the columns (date, tithi, paksa, festival)</a:t>
+            </a:r>
+            <a:endParaRPr lang="en-US" sz="1200" dirty="0"/>
+          </a:p>
+          <a:p>
+            <a:pPr algn="l" marL="342900" indent="-342900">
+              <a:lnSpc>
+                <a:spcPts val="1620"/>
+              </a:lnSpc>
+              <a:spcAft>
+                <a:spcPts val="300"/>
+              </a:spcAft>
+              <a:buSzPct val="100000"/>
+              <a:buChar char="•"/>
+            </a:pPr>
+            <a:r>
+              <a:rPr lang="en-US" sz="1200" b="1" dirty="0">
+                <a:solidFill>
+                  <a:srgbClr val="1C2833"/>
+                </a:solidFill>
+                <a:latin typeface="Arial" pitchFamily="34" charset="0"/>
+                <a:ea typeface="Arial" pitchFamily="34" charset="-122"/>
+                <a:cs typeface="Arial" pitchFamily="34" charset="-120"/>
+              </a:rPr>
+              <a:t>Herb deck</a:t>
+            </a:r>
+            <a:pPr algn="l" indent="0" marL="0">
+              <a:lnSpc>
+                <a:spcPts val="1620"/>
+              </a:lnSpc>
+              <a:spcAft>
+                <a:spcPts val="300"/>
+              </a:spcAft>
+              <a:buNone/>
+            </a:pPr>
+            <a:r>
+              <a:rPr lang="en-US" sz="1200" dirty="0">
+                <a:solidFill>
+                  <a:srgbClr val="1C2833"/>
+                </a:solidFill>
+                <a:latin typeface="Arial" pitchFamily="34" charset="0"/>
+                <a:ea typeface="Arial" pitchFamily="34" charset="-122"/>
+                <a:cs typeface="Arial" pitchFamily="34" charset="-120"/>
+              </a:rPr>
+              <a:t> — One card mock-up at actual size, with positions for photo, sketch, name, use</a:t>
+            </a:r>
+            <a:endParaRPr lang="en-US" sz="1200" dirty="0"/>
+          </a:p>
+          <a:p>
+            <a:pPr algn="l" marL="342900" indent="-342900">
+              <a:lnSpc>
+                <a:spcPts val="1620"/>
+              </a:lnSpc>
+              <a:spcAft>
+                <a:spcPts val="300"/>
+              </a:spcAft>
+              <a:buSzPct val="100000"/>
+              <a:buChar char="•"/>
+            </a:pPr>
+            <a:r>
+              <a:rPr lang="en-US" sz="1200" b="1" dirty="0">
+                <a:solidFill>
+                  <a:srgbClr val="1C2833"/>
+                </a:solidFill>
+                <a:latin typeface="Arial" pitchFamily="34" charset="0"/>
+                <a:ea typeface="Arial" pitchFamily="34" charset="-122"/>
+                <a:cs typeface="Arial" pitchFamily="34" charset="-120"/>
+              </a:rPr>
+              <a:t>Magic-square art</a:t>
+            </a:r>
+            <a:pPr algn="l" indent="0" marL="0">
+              <a:lnSpc>
+                <a:spcPts val="1620"/>
+              </a:lnSpc>
+              <a:spcAft>
+                <a:spcPts val="300"/>
+              </a:spcAft>
+              <a:buNone/>
+            </a:pPr>
+            <a:r>
+              <a:rPr lang="en-US" sz="1200" dirty="0">
+                <a:solidFill>
+                  <a:srgbClr val="1C2833"/>
+                </a:solidFill>
+                <a:latin typeface="Arial" pitchFamily="34" charset="0"/>
+                <a:ea typeface="Arial" pitchFamily="34" charset="-122"/>
+                <a:cs typeface="Arial" pitchFamily="34" charset="-120"/>
+              </a:rPr>
+              <a:t> — The verified grid + the colour/pattern overlay plan</a:t>
+            </a:r>
+            <a:endParaRPr lang="en-US" sz="1200" dirty="0"/>
+          </a:p>
+          <a:p>
+            <a:pPr algn="l" marL="342900" indent="-342900">
+              <a:lnSpc>
+                <a:spcPts val="1620"/>
+              </a:lnSpc>
+              <a:spcAft>
+                <a:spcPts val="300"/>
+              </a:spcAft>
+              <a:buSzPct val="100000"/>
+              <a:buChar char="•"/>
+            </a:pPr>
+            <a:r>
+              <a:rPr lang="en-US" sz="1200" b="1" dirty="0">
+                <a:solidFill>
+                  <a:srgbClr val="1C2833"/>
+                </a:solidFill>
+                <a:latin typeface="Arial" pitchFamily="34" charset="0"/>
+                <a:ea typeface="Arial" pitchFamily="34" charset="-122"/>
+                <a:cs typeface="Arial" pitchFamily="34" charset="-120"/>
+              </a:rPr>
+              <a:t>Yoga sequence</a:t>
+            </a:r>
+            <a:pPr algn="l" indent="0" marL="0">
+              <a:lnSpc>
+                <a:spcPts val="1620"/>
+              </a:lnSpc>
+              <a:spcAft>
+                <a:spcPts val="300"/>
+              </a:spcAft>
+              <a:buNone/>
+            </a:pPr>
+            <a:r>
+              <a:rPr lang="en-US" sz="1200" dirty="0">
+                <a:solidFill>
+                  <a:srgbClr val="1C2833"/>
+                </a:solidFill>
+                <a:latin typeface="Arial" pitchFamily="34" charset="0"/>
+                <a:ea typeface="Arial" pitchFamily="34" charset="-122"/>
+                <a:cs typeface="Arial" pitchFamily="34" charset="-120"/>
+              </a:rPr>
+              <a:t> — A storyboard: 8 boxes, one stick-figure pose per box, time + transition arrows</a:t>
+            </a:r>
+            <a:endParaRPr lang="en-US" sz="1200" dirty="0"/>
+          </a:p>
+          <a:p>
+            <a:pPr algn="l" marL="342900" indent="-342900">
+              <a:lnSpc>
+                <a:spcPts val="1620"/>
+              </a:lnSpc>
+              <a:spcAft>
+                <a:spcPts val="300"/>
+              </a:spcAft>
+              <a:buSzPct val="100000"/>
+              <a:buChar char="•"/>
+            </a:pPr>
+            <a:r>
+              <a:rPr lang="en-US" sz="1200" b="1" dirty="0">
+                <a:solidFill>
+                  <a:srgbClr val="1C2833"/>
+                </a:solidFill>
+                <a:latin typeface="Arial" pitchFamily="34" charset="0"/>
+                <a:ea typeface="Arial" pitchFamily="34" charset="-122"/>
+                <a:cs typeface="Arial" pitchFamily="34" charset="-120"/>
+              </a:rPr>
+              <a:t>Sustainability audit</a:t>
+            </a:r>
+            <a:pPr algn="l" indent="0" marL="0">
+              <a:lnSpc>
+                <a:spcPts val="1620"/>
+              </a:lnSpc>
+              <a:spcAft>
+                <a:spcPts val="300"/>
+              </a:spcAft>
+              <a:buNone/>
+            </a:pPr>
+            <a:r>
+              <a:rPr lang="en-US" sz="1200" dirty="0">
+                <a:solidFill>
+                  <a:srgbClr val="1C2833"/>
+                </a:solidFill>
+                <a:latin typeface="Arial" pitchFamily="34" charset="0"/>
+                <a:ea typeface="Arial" pitchFamily="34" charset="-122"/>
+                <a:cs typeface="Arial" pitchFamily="34" charset="-120"/>
+              </a:rPr>
+              <a:t> — The data collection sheet + the proposed-changes table</a:t>
+            </a:r>
+            <a:endParaRPr lang="en-US" sz="1200" dirty="0"/>
+          </a:p>
+          <a:p>
+            <a:pPr algn="l" marL="342900" indent="-342900">
+              <a:lnSpc>
+                <a:spcPts val="1620"/>
+              </a:lnSpc>
+              <a:spcAft>
+                <a:spcPts val="300"/>
+              </a:spcAft>
+              <a:buSzPct val="100000"/>
+              <a:buChar char="•"/>
+            </a:pPr>
+            <a:r>
+              <a:rPr lang="en-US" sz="1200" b="1" dirty="0">
+                <a:solidFill>
+                  <a:srgbClr val="1C2833"/>
+                </a:solidFill>
+                <a:latin typeface="Arial" pitchFamily="34" charset="0"/>
+                <a:ea typeface="Arial" pitchFamily="34" charset="-122"/>
+                <a:cs typeface="Arial" pitchFamily="34" charset="-120"/>
+              </a:rPr>
+              <a:t>Doṣa self-study</a:t>
+            </a:r>
+            <a:pPr algn="l" indent="0" marL="0">
+              <a:lnSpc>
+                <a:spcPts val="1620"/>
+              </a:lnSpc>
+              <a:spcAft>
+                <a:spcPts val="300"/>
+              </a:spcAft>
+              <a:buNone/>
+            </a:pPr>
+            <a:r>
+              <a:rPr lang="en-US" sz="1200" dirty="0">
+                <a:solidFill>
+                  <a:srgbClr val="1C2833"/>
+                </a:solidFill>
+                <a:latin typeface="Arial" pitchFamily="34" charset="0"/>
+                <a:ea typeface="Arial" pitchFamily="34" charset="-122"/>
+                <a:cs typeface="Arial" pitchFamily="34" charset="-120"/>
+              </a:rPr>
+              <a:t> — The 7-day journal table with the columns named</a:t>
+            </a:r>
+            <a:endParaRPr lang="en-US" sz="1200" dirty="0"/>
+          </a:p>
+          <a:p>
+            <a:pPr algn="l" marL="342900" indent="-342900">
+              <a:lnSpc>
+                <a:spcPts val="1620"/>
+              </a:lnSpc>
+              <a:spcAft>
+                <a:spcPts val="300"/>
+              </a:spcAft>
+              <a:buSzPct val="100000"/>
+              <a:buChar char="•"/>
+            </a:pPr>
+            <a:r>
+              <a:rPr lang="en-US" sz="1200" b="1" dirty="0">
+                <a:solidFill>
+                  <a:srgbClr val="1C2833"/>
+                </a:solidFill>
+                <a:latin typeface="Arial" pitchFamily="34" charset="0"/>
+                <a:ea typeface="Arial" pitchFamily="34" charset="-122"/>
+                <a:cs typeface="Arial" pitchFamily="34" charset="-120"/>
+              </a:rPr>
+              <a:t>Multiplication comparison</a:t>
+            </a:r>
+            <a:pPr algn="l" indent="0" marL="0">
+              <a:lnSpc>
+                <a:spcPts val="1620"/>
+              </a:lnSpc>
+              <a:spcAft>
+                <a:spcPts val="300"/>
+              </a:spcAft>
+              <a:buNone/>
+            </a:pPr>
+            <a:r>
+              <a:rPr lang="en-US" sz="1200" dirty="0">
+                <a:solidFill>
+                  <a:srgbClr val="1C2833"/>
+                </a:solidFill>
+                <a:latin typeface="Arial" pitchFamily="34" charset="0"/>
+                <a:ea typeface="Arial" pitchFamily="34" charset="-122"/>
+                <a:cs typeface="Arial" pitchFamily="34" charset="-120"/>
+              </a:rPr>
+              <a:t> — The problem-set page + the timing-sheet design</a:t>
+            </a:r>
+            <a:endParaRPr lang="en-US" sz="1200" dirty="0"/>
+          </a:p>
+          <a:p>
+            <a:pPr algn="l" marL="342900" indent="-342900">
+              <a:lnSpc>
+                <a:spcPts val="1620"/>
+              </a:lnSpc>
+              <a:spcAft>
+                <a:spcPts val="300"/>
+              </a:spcAft>
+              <a:buSzPct val="100000"/>
+              <a:buChar char="•"/>
+            </a:pPr>
+            <a:r>
+              <a:rPr lang="en-US" sz="1200" b="1" dirty="0">
+                <a:solidFill>
+                  <a:srgbClr val="1C2833"/>
+                </a:solidFill>
+                <a:latin typeface="Arial" pitchFamily="34" charset="0"/>
+                <a:ea typeface="Arial" pitchFamily="34" charset="-122"/>
+                <a:cs typeface="Arial" pitchFamily="34" charset="-120"/>
+              </a:rPr>
+              <a:t>Open design</a:t>
+            </a:r>
+            <a:pPr algn="l" indent="0" marL="0">
+              <a:lnSpc>
+                <a:spcPts val="1620"/>
+              </a:lnSpc>
+              <a:spcAft>
+                <a:spcPts val="300"/>
+              </a:spcAft>
+              <a:buNone/>
+            </a:pPr>
+            <a:r>
+              <a:rPr lang="en-US" sz="1200" dirty="0">
+                <a:solidFill>
+                  <a:srgbClr val="1C2833"/>
+                </a:solidFill>
+                <a:latin typeface="Arial" pitchFamily="34" charset="0"/>
+                <a:ea typeface="Arial" pitchFamily="34" charset="-122"/>
+                <a:cs typeface="Arial" pitchFamily="34" charset="-120"/>
+              </a:rPr>
+              <a:t> — Whatever fits</a:t>
             </a:r>
             <a:endParaRPr lang="en-US" sz="1200" dirty="0"/>
           </a:p>
@@ -4168,7 +4518,167 @@
         </p:nvSpPr>
         <p:spPr>
           <a:xfrm>
-            <a:off x="406301" y="6309568"/>
+            <a:off x="634901" y="5218063"/>
+            <a:ext cx="8102798" cy="281880"/>
+          </a:xfrm>
+          <a:prstGeom prst="rect">
+            <a:avLst/>
+          </a:prstGeom>
+          <a:noFill/>
+          <a:ln/>
+        </p:spPr>
+        <p:txBody>
+          <a:bodyPr wrap="square" lIns="0" tIns="0" rIns="0" bIns="0" rtlCol="0" anchor="t"/>
+          <a:lstStyle/>
+          <a:p>
+            <a:pPr algn="l" marL="342900" indent="-342900">
+              <a:lnSpc>
+                <a:spcPts val="1620"/>
+              </a:lnSpc>
+              <a:spcAft>
+                <a:spcPts val="300"/>
+              </a:spcAft>
+              <a:buSzPct val="100000"/>
+              <a:buChar char="•"/>
+            </a:pPr>
+            <a:r>
+              <a:rPr lang="en-US" sz="1200" b="1" dirty="0">
+                <a:solidFill>
+                  <a:srgbClr val="1C2833"/>
+                </a:solidFill>
+                <a:latin typeface="Arial" pitchFamily="34" charset="0"/>
+                <a:ea typeface="Arial" pitchFamily="34" charset="-122"/>
+                <a:cs typeface="Arial" pitchFamily="34" charset="-120"/>
+              </a:rPr>
+              <a:t>Sketch rules</a:t>
+            </a:r>
+            <a:pPr algn="l" indent="0" marL="0">
+              <a:lnSpc>
+                <a:spcPts val="1620"/>
+              </a:lnSpc>
+              <a:spcAft>
+                <a:spcPts val="300"/>
+              </a:spcAft>
+              <a:buNone/>
+            </a:pPr>
+            <a:r>
+              <a:rPr lang="en-US" sz="1200" dirty="0">
+                <a:solidFill>
+                  <a:srgbClr val="1C2833"/>
+                </a:solidFill>
+                <a:latin typeface="Arial" pitchFamily="34" charset="0"/>
+                <a:ea typeface="Arial" pitchFamily="34" charset="-122"/>
+                <a:cs typeface="Arial" pitchFamily="34" charset="-120"/>
+              </a:rPr>
+              <a:t> (2 min):</a:t>
+            </a:r>
+            <a:endParaRPr lang="en-US" sz="1200" dirty="0"/>
+          </a:p>
+        </p:txBody>
+      </p:sp>
+      <p:sp>
+        <p:nvSpPr>
+          <p:cNvPr id="10" name="Text 8"/>
+          <p:cNvSpPr/>
+          <p:nvPr/>
+        </p:nvSpPr>
+        <p:spPr>
+          <a:xfrm>
+            <a:off x="406301" y="5588794"/>
+            <a:ext cx="8498026" cy="426541"/>
+          </a:xfrm>
+          <a:prstGeom prst="rect">
+            <a:avLst/>
+          </a:prstGeom>
+          <a:noFill/>
+          <a:ln/>
+        </p:spPr>
+        <p:txBody>
+          <a:bodyPr wrap="square" lIns="0" tIns="0" rIns="0" bIns="0" rtlCol="0" anchor="t"/>
+          <a:lstStyle/>
+          <a:p>
+            <a:pPr algn="l" indent="0" marL="0">
+              <a:lnSpc>
+                <a:spcPts val="1680"/>
+              </a:lnSpc>
+              <a:spcBef>
+                <a:spcPts val="300"/>
+              </a:spcBef>
+              <a:spcAft>
+                <a:spcPts val="300"/>
+              </a:spcAft>
+              <a:buNone/>
+            </a:pPr>
+            <a:r>
+              <a:rPr lang="en-US" sz="1200" dirty="0">
+                <a:solidFill>
+                  <a:srgbClr val="1C2833"/>
+                </a:solidFill>
+                <a:latin typeface="Arial" pitchFamily="34" charset="0"/>
+                <a:ea typeface="Arial" pitchFamily="34" charset="-122"/>
+                <a:cs typeface="Arial" pitchFamily="34" charset="-120"/>
+              </a:rPr>
+              <a:t>– Pencil only. You'll change it. – Label everything — even if you "know" what it is. – Annotate dimensions ("this card will be 4" × 6"", "the poster is A2"). – Leave white space for things you haven't figured out yet — write </a:t>
+            </a:r>
+            <a:pPr algn="l" indent="0" marL="0">
+              <a:lnSpc>
+                <a:spcPts val="1680"/>
+              </a:lnSpc>
+              <a:spcBef>
+                <a:spcPts val="300"/>
+              </a:spcBef>
+              <a:spcAft>
+                <a:spcPts val="300"/>
+              </a:spcAft>
+              <a:buNone/>
+            </a:pPr>
+            <a:r>
+              <a:rPr lang="en-US" sz="1200" i="1" dirty="0">
+                <a:solidFill>
+                  <a:srgbClr val="1C2833"/>
+                </a:solidFill>
+                <a:latin typeface="Arial" pitchFamily="34" charset="0"/>
+                <a:ea typeface="Arial" pitchFamily="34" charset="-122"/>
+                <a:cs typeface="Arial" pitchFamily="34" charset="-120"/>
+              </a:rPr>
+              <a:t>"TBD"</a:t>
+            </a:r>
+            <a:pPr algn="l" indent="0" marL="0">
+              <a:lnSpc>
+                <a:spcPts val="1680"/>
+              </a:lnSpc>
+              <a:spcBef>
+                <a:spcPts val="300"/>
+              </a:spcBef>
+              <a:spcAft>
+                <a:spcPts val="300"/>
+              </a:spcAft>
+              <a:buNone/>
+            </a:pPr>
+            <a:r>
+              <a:rPr lang="en-US" sz="1200" dirty="0">
+                <a:solidFill>
+                  <a:srgbClr val="1C2833"/>
+                </a:solidFill>
+                <a:latin typeface="Arial" pitchFamily="34" charset="0"/>
+                <a:ea typeface="Arial" pitchFamily="34" charset="-122"/>
+                <a:cs typeface="Arial" pitchFamily="34" charset="-120"/>
+              </a:rPr>
+              <a:t> and move on.</a:t>
+            </a:r>
+            <a:endParaRPr lang="en-US" sz="1200" dirty="0"/>
+          </a:p>
+        </p:txBody>
+      </p:sp>
+      <p:sp>
+        <p:nvSpPr>
+          <p:cNvPr id="11" name="Text 9"/>
+          <p:cNvSpPr/>
+          <p:nvPr/>
+        </p:nvSpPr>
+        <p:spPr>
+          <a:xfrm>
+            <a:off x="406301" y="6167735"/>
             <a:ext cx="8498026" cy="213271"/>
           </a:xfrm>
           <a:prstGeom prst="rect">

--- a/exports/pptx/lessons/middle-module-15-project-implementation/day-04-research-2.pptx
+++ b/exports/pptx/lessons/middle-module-15-project-implementation/day-04-research-2.pptx
@@ -17,9 +17,14 @@
     <p:sldId id="265" r:id="rId11"/>
     <p:sldId id="266" r:id="rId12"/>
     <p:sldId id="267" r:id="rId13"/>
+    <p:sldId id="268" r:id="rId14"/>
+    <p:sldId id="269" r:id="rId15"/>
+    <p:sldId id="270" r:id="rId16"/>
+    <p:sldId id="271" r:id="rId17"/>
+    <p:sldId id="272" r:id="rId18"/>
   </p:sldIdLst>
   <p:notesMasterIdLst>
-    <p:notesMasterId r:id="rId14"/>
+    <p:notesMasterId r:id="rId19"/>
   </p:notesMasterIdLst>
   <p:sldSz cx="9144000" cy="5143500"/>
   <p:notesSz cx="5143500" cy="9144000"/>
@@ -801,6 +806,446 @@
             <a:fld id="{F7021451-1387-4CA6-816F-3879F97B5CBC}" type="slidenum">
               <a:rPr lang="en-US"/>
               <a:t>12</a:t>
+            </a:fld>
+            <a:endParaRPr lang="en-US"/>
+          </a:p>
+        </p:txBody>
+      </p:sp>
+    </p:spTree>
+    <p:extLst>
+      <p:ext uri="{BB962C8B-B14F-4D97-AF65-F5344CB8AC3E}">
+        <p14:creationId xmlns:p14="http://schemas.microsoft.com/office/powerpoint/2010/main" val="1024086991"/>
+      </p:ext>
+    </p:extLst>
+  </p:cSld>
+  <p:clrMapOvr>
+    <a:masterClrMapping/>
+  </p:clrMapOvr>
+</p:notes>
+</file>
+
+<file path=ppt/notesSlides/notesSlide13.xml><?xml version="1.0" encoding="utf-8"?>
+<p:notes xmlns:a="http://schemas.openxmlformats.org/drawingml/2006/main" xmlns:r="http://schemas.openxmlformats.org/officeDocument/2006/relationships" xmlns:p="http://schemas.openxmlformats.org/presentationml/2006/main">
+  <p:cSld>
+    <p:spTree>
+      <p:nvGrpSpPr>
+        <p:cNvPr id="1" name=""/>
+        <p:cNvGrpSpPr/>
+        <p:nvPr/>
+      </p:nvGrpSpPr>
+      <p:grpSpPr>
+        <a:xfrm>
+          <a:off x="0" y="0"/>
+          <a:ext cx="0" cy="0"/>
+          <a:chOff x="0" y="0"/>
+          <a:chExt cx="0" cy="0"/>
+        </a:xfrm>
+      </p:grpSpPr>
+      <p:sp>
+        <p:nvSpPr>
+          <p:cNvPr id="2" name="Slide Image Placeholder 1"/>
+          <p:cNvSpPr>
+            <a:spLocks noGrp="1" noRot="1" noChangeAspect="1"/>
+          </p:cNvSpPr>
+          <p:nvPr>
+            <p:ph type="sldImg"/>
+          </p:nvPr>
+        </p:nvSpPr>
+        <p:spPr/>
+      </p:sp>
+      <p:sp>
+        <p:nvSpPr>
+          <p:cNvPr id="3" name="Notes Placeholder 2"/>
+          <p:cNvSpPr>
+            <a:spLocks noGrp="1"/>
+          </p:cNvSpPr>
+          <p:nvPr>
+            <p:ph type="body" idx="1"/>
+          </p:nvPr>
+        </p:nvSpPr>
+        <p:spPr/>
+        <p:txBody>
+          <a:bodyPr/>
+          <a:lstStyle/>
+          <a:p>
+            <a:r>
+              <a:rPr lang="en-US" dirty="0"/>
+              <a:t/>
+            </a:r>
+            <a:endParaRPr lang="en-US" dirty="0"/>
+          </a:p>
+        </p:txBody>
+      </p:sp>
+      <p:sp>
+        <p:nvSpPr>
+          <p:cNvPr id="4" name="Slide Number Placeholder 3"/>
+          <p:cNvSpPr>
+            <a:spLocks noGrp="1"/>
+          </p:cNvSpPr>
+          <p:nvPr>
+            <p:ph type="sldNum" sz="quarter" idx="10"/>
+          </p:nvPr>
+        </p:nvSpPr>
+        <p:spPr/>
+        <p:txBody>
+          <a:bodyPr/>
+          <a:lstStyle/>
+          <a:p>
+            <a:fld id="{F7021451-1387-4CA6-816F-3879F97B5CBC}" type="slidenum">
+              <a:rPr lang="en-US"/>
+              <a:t>13</a:t>
+            </a:fld>
+            <a:endParaRPr lang="en-US"/>
+          </a:p>
+        </p:txBody>
+      </p:sp>
+    </p:spTree>
+    <p:extLst>
+      <p:ext uri="{BB962C8B-B14F-4D97-AF65-F5344CB8AC3E}">
+        <p14:creationId xmlns:p14="http://schemas.microsoft.com/office/powerpoint/2010/main" val="1024086991"/>
+      </p:ext>
+    </p:extLst>
+  </p:cSld>
+  <p:clrMapOvr>
+    <a:masterClrMapping/>
+  </p:clrMapOvr>
+</p:notes>
+</file>
+
+<file path=ppt/notesSlides/notesSlide14.xml><?xml version="1.0" encoding="utf-8"?>
+<p:notes xmlns:a="http://schemas.openxmlformats.org/drawingml/2006/main" xmlns:r="http://schemas.openxmlformats.org/officeDocument/2006/relationships" xmlns:p="http://schemas.openxmlformats.org/presentationml/2006/main">
+  <p:cSld>
+    <p:spTree>
+      <p:nvGrpSpPr>
+        <p:cNvPr id="1" name=""/>
+        <p:cNvGrpSpPr/>
+        <p:nvPr/>
+      </p:nvGrpSpPr>
+      <p:grpSpPr>
+        <a:xfrm>
+          <a:off x="0" y="0"/>
+          <a:ext cx="0" cy="0"/>
+          <a:chOff x="0" y="0"/>
+          <a:chExt cx="0" cy="0"/>
+        </a:xfrm>
+      </p:grpSpPr>
+      <p:sp>
+        <p:nvSpPr>
+          <p:cNvPr id="2" name="Slide Image Placeholder 1"/>
+          <p:cNvSpPr>
+            <a:spLocks noGrp="1" noRot="1" noChangeAspect="1"/>
+          </p:cNvSpPr>
+          <p:nvPr>
+            <p:ph type="sldImg"/>
+          </p:nvPr>
+        </p:nvSpPr>
+        <p:spPr/>
+      </p:sp>
+      <p:sp>
+        <p:nvSpPr>
+          <p:cNvPr id="3" name="Notes Placeholder 2"/>
+          <p:cNvSpPr>
+            <a:spLocks noGrp="1"/>
+          </p:cNvSpPr>
+          <p:nvPr>
+            <p:ph type="body" idx="1"/>
+          </p:nvPr>
+        </p:nvSpPr>
+        <p:spPr/>
+        <p:txBody>
+          <a:bodyPr/>
+          <a:lstStyle/>
+          <a:p>
+            <a:r>
+              <a:rPr lang="en-US" dirty="0"/>
+              <a:t/>
+            </a:r>
+            <a:endParaRPr lang="en-US" dirty="0"/>
+          </a:p>
+        </p:txBody>
+      </p:sp>
+      <p:sp>
+        <p:nvSpPr>
+          <p:cNvPr id="4" name="Slide Number Placeholder 3"/>
+          <p:cNvSpPr>
+            <a:spLocks noGrp="1"/>
+          </p:cNvSpPr>
+          <p:nvPr>
+            <p:ph type="sldNum" sz="quarter" idx="10"/>
+          </p:nvPr>
+        </p:nvSpPr>
+        <p:spPr/>
+        <p:txBody>
+          <a:bodyPr/>
+          <a:lstStyle/>
+          <a:p>
+            <a:fld id="{F7021451-1387-4CA6-816F-3879F97B5CBC}" type="slidenum">
+              <a:rPr lang="en-US"/>
+              <a:t>14</a:t>
+            </a:fld>
+            <a:endParaRPr lang="en-US"/>
+          </a:p>
+        </p:txBody>
+      </p:sp>
+    </p:spTree>
+    <p:extLst>
+      <p:ext uri="{BB962C8B-B14F-4D97-AF65-F5344CB8AC3E}">
+        <p14:creationId xmlns:p14="http://schemas.microsoft.com/office/powerpoint/2010/main" val="1024086991"/>
+      </p:ext>
+    </p:extLst>
+  </p:cSld>
+  <p:clrMapOvr>
+    <a:masterClrMapping/>
+  </p:clrMapOvr>
+</p:notes>
+</file>
+
+<file path=ppt/notesSlides/notesSlide15.xml><?xml version="1.0" encoding="utf-8"?>
+<p:notes xmlns:a="http://schemas.openxmlformats.org/drawingml/2006/main" xmlns:r="http://schemas.openxmlformats.org/officeDocument/2006/relationships" xmlns:p="http://schemas.openxmlformats.org/presentationml/2006/main">
+  <p:cSld>
+    <p:spTree>
+      <p:nvGrpSpPr>
+        <p:cNvPr id="1" name=""/>
+        <p:cNvGrpSpPr/>
+        <p:nvPr/>
+      </p:nvGrpSpPr>
+      <p:grpSpPr>
+        <a:xfrm>
+          <a:off x="0" y="0"/>
+          <a:ext cx="0" cy="0"/>
+          <a:chOff x="0" y="0"/>
+          <a:chExt cx="0" cy="0"/>
+        </a:xfrm>
+      </p:grpSpPr>
+      <p:sp>
+        <p:nvSpPr>
+          <p:cNvPr id="2" name="Slide Image Placeholder 1"/>
+          <p:cNvSpPr>
+            <a:spLocks noGrp="1" noRot="1" noChangeAspect="1"/>
+          </p:cNvSpPr>
+          <p:nvPr>
+            <p:ph type="sldImg"/>
+          </p:nvPr>
+        </p:nvSpPr>
+        <p:spPr/>
+      </p:sp>
+      <p:sp>
+        <p:nvSpPr>
+          <p:cNvPr id="3" name="Notes Placeholder 2"/>
+          <p:cNvSpPr>
+            <a:spLocks noGrp="1"/>
+          </p:cNvSpPr>
+          <p:nvPr>
+            <p:ph type="body" idx="1"/>
+          </p:nvPr>
+        </p:nvSpPr>
+        <p:spPr/>
+        <p:txBody>
+          <a:bodyPr/>
+          <a:lstStyle/>
+          <a:p>
+            <a:r>
+              <a:rPr lang="en-US" dirty="0"/>
+              <a:t/>
+            </a:r>
+            <a:endParaRPr lang="en-US" dirty="0"/>
+          </a:p>
+        </p:txBody>
+      </p:sp>
+      <p:sp>
+        <p:nvSpPr>
+          <p:cNvPr id="4" name="Slide Number Placeholder 3"/>
+          <p:cNvSpPr>
+            <a:spLocks noGrp="1"/>
+          </p:cNvSpPr>
+          <p:nvPr>
+            <p:ph type="sldNum" sz="quarter" idx="10"/>
+          </p:nvPr>
+        </p:nvSpPr>
+        <p:spPr/>
+        <p:txBody>
+          <a:bodyPr/>
+          <a:lstStyle/>
+          <a:p>
+            <a:fld id="{F7021451-1387-4CA6-816F-3879F97B5CBC}" type="slidenum">
+              <a:rPr lang="en-US"/>
+              <a:t>15</a:t>
+            </a:fld>
+            <a:endParaRPr lang="en-US"/>
+          </a:p>
+        </p:txBody>
+      </p:sp>
+    </p:spTree>
+    <p:extLst>
+      <p:ext uri="{BB962C8B-B14F-4D97-AF65-F5344CB8AC3E}">
+        <p14:creationId xmlns:p14="http://schemas.microsoft.com/office/powerpoint/2010/main" val="1024086991"/>
+      </p:ext>
+    </p:extLst>
+  </p:cSld>
+  <p:clrMapOvr>
+    <a:masterClrMapping/>
+  </p:clrMapOvr>
+</p:notes>
+</file>
+
+<file path=ppt/notesSlides/notesSlide16.xml><?xml version="1.0" encoding="utf-8"?>
+<p:notes xmlns:a="http://schemas.openxmlformats.org/drawingml/2006/main" xmlns:r="http://schemas.openxmlformats.org/officeDocument/2006/relationships" xmlns:p="http://schemas.openxmlformats.org/presentationml/2006/main">
+  <p:cSld>
+    <p:spTree>
+      <p:nvGrpSpPr>
+        <p:cNvPr id="1" name=""/>
+        <p:cNvGrpSpPr/>
+        <p:nvPr/>
+      </p:nvGrpSpPr>
+      <p:grpSpPr>
+        <a:xfrm>
+          <a:off x="0" y="0"/>
+          <a:ext cx="0" cy="0"/>
+          <a:chOff x="0" y="0"/>
+          <a:chExt cx="0" cy="0"/>
+        </a:xfrm>
+      </p:grpSpPr>
+      <p:sp>
+        <p:nvSpPr>
+          <p:cNvPr id="2" name="Slide Image Placeholder 1"/>
+          <p:cNvSpPr>
+            <a:spLocks noGrp="1" noRot="1" noChangeAspect="1"/>
+          </p:cNvSpPr>
+          <p:nvPr>
+            <p:ph type="sldImg"/>
+          </p:nvPr>
+        </p:nvSpPr>
+        <p:spPr/>
+      </p:sp>
+      <p:sp>
+        <p:nvSpPr>
+          <p:cNvPr id="3" name="Notes Placeholder 2"/>
+          <p:cNvSpPr>
+            <a:spLocks noGrp="1"/>
+          </p:cNvSpPr>
+          <p:nvPr>
+            <p:ph type="body" idx="1"/>
+          </p:nvPr>
+        </p:nvSpPr>
+        <p:spPr/>
+        <p:txBody>
+          <a:bodyPr/>
+          <a:lstStyle/>
+          <a:p>
+            <a:r>
+              <a:rPr lang="en-US" dirty="0"/>
+              <a:t/>
+            </a:r>
+            <a:endParaRPr lang="en-US" dirty="0"/>
+          </a:p>
+        </p:txBody>
+      </p:sp>
+      <p:sp>
+        <p:nvSpPr>
+          <p:cNvPr id="4" name="Slide Number Placeholder 3"/>
+          <p:cNvSpPr>
+            <a:spLocks noGrp="1"/>
+          </p:cNvSpPr>
+          <p:nvPr>
+            <p:ph type="sldNum" sz="quarter" idx="10"/>
+          </p:nvPr>
+        </p:nvSpPr>
+        <p:spPr/>
+        <p:txBody>
+          <a:bodyPr/>
+          <a:lstStyle/>
+          <a:p>
+            <a:fld id="{F7021451-1387-4CA6-816F-3879F97B5CBC}" type="slidenum">
+              <a:rPr lang="en-US"/>
+              <a:t>16</a:t>
+            </a:fld>
+            <a:endParaRPr lang="en-US"/>
+          </a:p>
+        </p:txBody>
+      </p:sp>
+    </p:spTree>
+    <p:extLst>
+      <p:ext uri="{BB962C8B-B14F-4D97-AF65-F5344CB8AC3E}">
+        <p14:creationId xmlns:p14="http://schemas.microsoft.com/office/powerpoint/2010/main" val="1024086991"/>
+      </p:ext>
+    </p:extLst>
+  </p:cSld>
+  <p:clrMapOvr>
+    <a:masterClrMapping/>
+  </p:clrMapOvr>
+</p:notes>
+</file>
+
+<file path=ppt/notesSlides/notesSlide17.xml><?xml version="1.0" encoding="utf-8"?>
+<p:notes xmlns:a="http://schemas.openxmlformats.org/drawingml/2006/main" xmlns:r="http://schemas.openxmlformats.org/officeDocument/2006/relationships" xmlns:p="http://schemas.openxmlformats.org/presentationml/2006/main">
+  <p:cSld>
+    <p:spTree>
+      <p:nvGrpSpPr>
+        <p:cNvPr id="1" name=""/>
+        <p:cNvGrpSpPr/>
+        <p:nvPr/>
+      </p:nvGrpSpPr>
+      <p:grpSpPr>
+        <a:xfrm>
+          <a:off x="0" y="0"/>
+          <a:ext cx="0" cy="0"/>
+          <a:chOff x="0" y="0"/>
+          <a:chExt cx="0" cy="0"/>
+        </a:xfrm>
+      </p:grpSpPr>
+      <p:sp>
+        <p:nvSpPr>
+          <p:cNvPr id="2" name="Slide Image Placeholder 1"/>
+          <p:cNvSpPr>
+            <a:spLocks noGrp="1" noRot="1" noChangeAspect="1"/>
+          </p:cNvSpPr>
+          <p:nvPr>
+            <p:ph type="sldImg"/>
+          </p:nvPr>
+        </p:nvSpPr>
+        <p:spPr/>
+      </p:sp>
+      <p:sp>
+        <p:nvSpPr>
+          <p:cNvPr id="3" name="Notes Placeholder 2"/>
+          <p:cNvSpPr>
+            <a:spLocks noGrp="1"/>
+          </p:cNvSpPr>
+          <p:nvPr>
+            <p:ph type="body" idx="1"/>
+          </p:nvPr>
+        </p:nvSpPr>
+        <p:spPr/>
+        <p:txBody>
+          <a:bodyPr/>
+          <a:lstStyle/>
+          <a:p>
+            <a:r>
+              <a:rPr lang="en-US" dirty="0"/>
+              <a:t/>
+            </a:r>
+            <a:endParaRPr lang="en-US" dirty="0"/>
+          </a:p>
+        </p:txBody>
+      </p:sp>
+      <p:sp>
+        <p:nvSpPr>
+          <p:cNvPr id="4" name="Slide Number Placeholder 3"/>
+          <p:cNvSpPr>
+            <a:spLocks noGrp="1"/>
+          </p:cNvSpPr>
+          <p:nvPr>
+            <p:ph type="sldNum" sz="quarter" idx="10"/>
+          </p:nvPr>
+        </p:nvSpPr>
+        <p:spPr/>
+        <p:txBody>
+          <a:bodyPr/>
+          <a:lstStyle/>
+          <a:p>
+            <a:fld id="{F7021451-1387-4CA6-816F-3879F97B5CBC}" type="slidenum">
+              <a:rPr lang="en-US"/>
+              <a:t>17</a:t>
             </a:fld>
             <a:endParaRPr lang="en-US"/>
           </a:p>
@@ -2100,102 +2545,6 @@
         </p:nvSpPr>
         <p:spPr>
           <a:xfrm>
-            <a:off x="406301" y="1223963"/>
-            <a:ext cx="8498026" cy="274290"/>
-          </a:xfrm>
-          <a:prstGeom prst="rect">
-            <a:avLst/>
-          </a:prstGeom>
-          <a:noFill/>
-          <a:ln/>
-        </p:spPr>
-        <p:txBody>
-          <a:bodyPr wrap="square" lIns="0" tIns="0" rIns="0" bIns="0" rtlCol="0" anchor="t"/>
-          <a:lstStyle/>
-          <a:p>
-            <a:pPr algn="l" indent="0" marL="0">
-              <a:lnSpc>
-                <a:spcPts val="2160"/>
-              </a:lnSpc>
-              <a:spcBef>
-                <a:spcPts val="600"/>
-              </a:spcBef>
-              <a:spcAft>
-                <a:spcPts val="800"/>
-              </a:spcAft>
-              <a:buNone/>
-            </a:pPr>
-            <a:r>
-              <a:rPr lang="en-US" sz="1800" b="1" dirty="0">
-                <a:solidFill>
-                  <a:srgbClr val="FE4447"/>
-                </a:solidFill>
-                <a:latin typeface="Georgia" pitchFamily="34" charset="0"/>
-                <a:ea typeface="Georgia" pitchFamily="34" charset="-122"/>
-                <a:cs typeface="Georgia" pitchFamily="34" charset="-120"/>
-              </a:rPr>
-              <a:t>Learning objective</a:t>
-            </a:r>
-            <a:endParaRPr lang="en-US" sz="1800" dirty="0"/>
-          </a:p>
-        </p:txBody>
-      </p:sp>
-      <p:sp>
-        <p:nvSpPr>
-          <p:cNvPr id="6" name="Text 4"/>
-          <p:cNvSpPr/>
-          <p:nvPr/>
-        </p:nvSpPr>
-        <p:spPr>
-          <a:xfrm>
-            <a:off x="406301" y="1637854"/>
-            <a:ext cx="8498026" cy="426541"/>
-          </a:xfrm>
-          <a:prstGeom prst="rect">
-            <a:avLst/>
-          </a:prstGeom>
-          <a:noFill/>
-          <a:ln/>
-        </p:spPr>
-        <p:txBody>
-          <a:bodyPr wrap="square" lIns="0" tIns="0" rIns="0" bIns="0" rtlCol="0" anchor="t"/>
-          <a:lstStyle/>
-          <a:p>
-            <a:pPr algn="l" indent="0" marL="0">
-              <a:lnSpc>
-                <a:spcPts val="1680"/>
-              </a:lnSpc>
-              <a:spcBef>
-                <a:spcPts val="300"/>
-              </a:spcBef>
-              <a:spcAft>
-                <a:spcPts val="300"/>
-              </a:spcAft>
-              <a:buNone/>
-            </a:pPr>
-            <a:r>
-              <a:rPr lang="en-US" sz="1200" dirty="0">
-                <a:solidFill>
-                  <a:srgbClr val="1C2833"/>
-                </a:solidFill>
-                <a:latin typeface="Arial" pitchFamily="34" charset="0"/>
-                <a:ea typeface="Arial" pitchFamily="34" charset="-122"/>
-                <a:cs typeface="Arial" pitchFamily="34" charset="-120"/>
-              </a:rPr>
-              <a:t>By the end of this lesson, students will have at least three citation slips on file (two minimum from Day 3 + at least one new today) and will have produced a first design sketch of the final artefact.</a:t>
-            </a:r>
-            <a:endParaRPr lang="en-US" sz="1200" dirty="0"/>
-          </a:p>
-        </p:txBody>
-      </p:sp>
-      <p:sp>
-        <p:nvSpPr>
-          <p:cNvPr id="7" name="Text 5"/>
-          <p:cNvSpPr/>
-          <p:nvPr/>
-        </p:nvSpPr>
-        <p:spPr>
-          <a:xfrm>
             <a:off x="406301" y="4434929"/>
             <a:ext cx="8498026" cy="213271"/>
           </a:xfrm>
@@ -2340,7 +2689,7 @@
                 <a:ea typeface="Georgia" pitchFamily="34" charset="-122"/>
                 <a:cs typeface="Georgia" pitchFamily="34" charset="-120"/>
               </a:rPr>
-              <a:t>Differentiation</a:t>
+              <a:t>Core (10 min) (cont.)</a:t>
             </a:r>
             <a:endParaRPr lang="en-US" sz="1800" dirty="0"/>
           </a:p>
@@ -2355,7 +2704,7 @@
         <p:spPr>
           <a:xfrm>
             <a:off x="634901" y="883593"/>
-            <a:ext cx="8102798" cy="937022"/>
+            <a:ext cx="8102798" cy="281880"/>
           </a:xfrm>
           <a:prstGeom prst="rect">
             <a:avLst/>
@@ -2386,7 +2735,7 @@
                 <a:ea typeface="Arial" pitchFamily="34" charset="-122"/>
                 <a:cs typeface="Arial" pitchFamily="34" charset="-120"/>
               </a:rPr>
-              <a:t>One tier up:</a:t>
+              <a:t>Sketch rules</a:t>
             </a:r>
             <a:pPr algn="l" indent="0" marL="0">
               <a:lnSpc>
@@ -2406,10 +2755,32 @@
                 <a:ea typeface="Arial" pitchFamily="34" charset="-122"/>
                 <a:cs typeface="Arial" pitchFamily="34" charset="-120"/>
               </a:rPr>
-              <a:t> Make two sketches showing two different layout options. Tomorrow's critique will help you choose. Mark each clearly as "Option A" and "Option B."</a:t>
+              <a:t> (2 min):</a:t>
             </a:r>
             <a:endParaRPr lang="en-US" sz="1200" dirty="0"/>
           </a:p>
+        </p:txBody>
+      </p:sp>
+      <p:sp>
+        <p:nvSpPr>
+          <p:cNvPr id="5" name="Text 3"/>
+          <p:cNvSpPr/>
+          <p:nvPr/>
+        </p:nvSpPr>
+        <p:spPr>
+          <a:xfrm>
+            <a:off x="634901" y="1266974"/>
+            <a:ext cx="8102798" cy="1013222"/>
+          </a:xfrm>
+          <a:prstGeom prst="rect">
+            <a:avLst/>
+          </a:prstGeom>
+          <a:noFill/>
+          <a:ln/>
+        </p:spPr>
+        <p:txBody>
+          <a:bodyPr wrap="square" lIns="0" tIns="0" rIns="0" bIns="0" rtlCol="0" anchor="t"/>
+          <a:lstStyle/>
           <a:p>
             <a:pPr algn="l" marL="342900" indent="-342900">
               <a:lnSpc>
@@ -2422,24 +2793,28 @@
               <a:buChar char="•"/>
             </a:pPr>
             <a:r>
-              <a:rPr lang="en-US" sz="1200" b="1" dirty="0">
-                <a:solidFill>
-                  <a:srgbClr val="1C2833"/>
-                </a:solidFill>
-                <a:latin typeface="Arial" pitchFamily="34" charset="0"/>
-                <a:ea typeface="Arial" pitchFamily="34" charset="-122"/>
-                <a:cs typeface="Arial" pitchFamily="34" charset="-120"/>
-              </a:rPr>
-              <a:t>One tier down:</a:t>
-            </a:r>
-            <a:pPr algn="l" indent="0" marL="0">
+              <a:rPr lang="en-US" sz="1200" dirty="0">
+                <a:solidFill>
+                  <a:srgbClr val="1C2833"/>
+                </a:solidFill>
+                <a:latin typeface="Arial" pitchFamily="34" charset="0"/>
+                <a:ea typeface="Arial" pitchFamily="34" charset="-122"/>
+                <a:cs typeface="Arial" pitchFamily="34" charset="-120"/>
+              </a:rPr>
+              <a:t>Pencil only. You'll change it.</a:t>
+            </a:r>
+            <a:endParaRPr lang="en-US" sz="1200" dirty="0"/>
+          </a:p>
+          <a:p>
+            <a:pPr algn="l" marL="342900" indent="-342900">
               <a:lnSpc>
                 <a:spcPts val="1620"/>
               </a:lnSpc>
               <a:spcAft>
                 <a:spcPts val="300"/>
               </a:spcAft>
-              <a:buNone/>
+              <a:buSzPct val="100000"/>
+              <a:buChar char="•"/>
             </a:pPr>
             <a:r>
               <a:rPr lang="en-US" sz="1200" dirty="0">
@@ -2450,15 +2825,63 @@
                 <a:ea typeface="Arial" pitchFamily="34" charset="-122"/>
                 <a:cs typeface="Arial" pitchFamily="34" charset="-120"/>
               </a:rPr>
-              <a:t> If the sketch feels overwhelming, sketch </a:t>
-            </a:r>
-            <a:pPr algn="l" indent="0" marL="0">
+              <a:t>Label everything — even if you "know" what it is.</a:t>
+            </a:r>
+            <a:endParaRPr lang="en-US" sz="1200" dirty="0"/>
+          </a:p>
+          <a:p>
+            <a:pPr algn="l" marL="342900" indent="-342900">
               <a:lnSpc>
                 <a:spcPts val="1620"/>
               </a:lnSpc>
               <a:spcAft>
                 <a:spcPts val="300"/>
               </a:spcAft>
+              <a:buSzPct val="100000"/>
+              <a:buChar char="•"/>
+            </a:pPr>
+            <a:r>
+              <a:rPr lang="en-US" sz="1200" dirty="0">
+                <a:solidFill>
+                  <a:srgbClr val="1C2833"/>
+                </a:solidFill>
+                <a:latin typeface="Arial" pitchFamily="34" charset="0"/>
+                <a:ea typeface="Arial" pitchFamily="34" charset="-122"/>
+                <a:cs typeface="Arial" pitchFamily="34" charset="-120"/>
+              </a:rPr>
+              <a:t>Annotate dimensions ("this card will be 4" × 6"", "the poster is A2").</a:t>
+            </a:r>
+            <a:endParaRPr lang="en-US" sz="1200" dirty="0"/>
+          </a:p>
+          <a:p>
+            <a:pPr algn="l" marL="342900" indent="-342900">
+              <a:lnSpc>
+                <a:spcPts val="1620"/>
+              </a:lnSpc>
+              <a:spcAft>
+                <a:spcPts val="300"/>
+              </a:spcAft>
+              <a:buSzPct val="100000"/>
+              <a:buChar char="•"/>
+            </a:pPr>
+            <a:r>
+              <a:rPr lang="en-US" sz="1200" dirty="0">
+                <a:solidFill>
+                  <a:srgbClr val="1C2833"/>
+                </a:solidFill>
+                <a:latin typeface="Arial" pitchFamily="34" charset="0"/>
+                <a:ea typeface="Arial" pitchFamily="34" charset="-122"/>
+                <a:cs typeface="Arial" pitchFamily="34" charset="-120"/>
+              </a:rPr>
+              <a:t>Leave white space for things you haven't figured out yet — write </a:t>
+            </a:r>
+            <a:pPr algn="l" indent="0" marL="0">
+              <a:lnSpc>
+                <a:spcPts val="1620"/>
+              </a:lnSpc>
+              <a:spcAft>
+                <a:spcPts val="300"/>
+              </a:spcAft>
               <a:buNone/>
             </a:pPr>
             <a:r>
@@ -2470,7 +2893,7 @@
                 <a:ea typeface="Arial" pitchFamily="34" charset="-122"/>
                 <a:cs typeface="Arial" pitchFamily="34" charset="-120"/>
               </a:rPr>
-              <a:t>just one part</a:t>
+              <a:t>"TBD"</a:t>
             </a:r>
             <a:pPr algn="l" indent="0" marL="0">
               <a:lnSpc>
@@ -2490,7 +2913,7 @@
                 <a:ea typeface="Arial" pitchFamily="34" charset="-122"/>
                 <a:cs typeface="Arial" pitchFamily="34" charset="-120"/>
               </a:rPr>
-              <a:t> — e.g. just one card of your herb deck, just one week of your calendar. The rest can follow the same template.</a:t>
+              <a:t> and move on.</a:t>
             </a:r>
             <a:endParaRPr lang="en-US" sz="1200" dirty="0"/>
           </a:p>
@@ -2498,7 +2921,7 @@
       </p:sp>
       <p:sp>
         <p:nvSpPr>
-          <p:cNvPr id="5" name="Text 3"/>
+          <p:cNvPr id="6" name="Text 4"/>
           <p:cNvSpPr/>
           <p:nvPr/>
         </p:nvSpPr>
@@ -2648,7 +3071,7 @@
                 <a:ea typeface="Georgia" pitchFamily="34" charset="-122"/>
                 <a:cs typeface="Georgia" pitchFamily="34" charset="-120"/>
               </a:rPr>
-              <a:t>Teacher notes</a:t>
+              <a:t>Activity (25 min) — Research + sketch</a:t>
             </a:r>
             <a:endParaRPr lang="en-US" sz="1800" dirty="0"/>
           </a:p>
@@ -2662,8 +3085,8 @@
         </p:nvSpPr>
         <p:spPr>
           <a:xfrm>
-            <a:off x="406301" y="870942"/>
-            <a:ext cx="8498026" cy="1279624"/>
+            <a:off x="634901" y="883593"/>
+            <a:ext cx="8102798" cy="975122"/>
           </a:xfrm>
           <a:prstGeom prst="rect">
             <a:avLst/>
@@ -2675,13 +3098,31 @@
           <a:bodyPr wrap="square" lIns="0" tIns="0" rIns="0" bIns="0" rtlCol="0" anchor="t"/>
           <a:lstStyle/>
           <a:p>
-            <a:pPr algn="l" indent="0" marL="0">
-              <a:lnSpc>
-                <a:spcPts val="1680"/>
-              </a:lnSpc>
-              <a:spcBef>
-                <a:spcPts val="300"/>
-              </a:spcBef>
+            <a:pPr algn="l" marL="342900" indent="-342900">
+              <a:lnSpc>
+                <a:spcPts val="1620"/>
+              </a:lnSpc>
+              <a:spcAft>
+                <a:spcPts val="300"/>
+              </a:spcAft>
+              <a:buSzPct val="100000"/>
+              <a:buChar char="•"/>
+            </a:pPr>
+            <a:r>
+              <a:rPr lang="en-US" sz="1200" b="1" dirty="0">
+                <a:solidFill>
+                  <a:srgbClr val="1C2833"/>
+                </a:solidFill>
+                <a:latin typeface="Arial" pitchFamily="34" charset="0"/>
+                <a:ea typeface="Arial" pitchFamily="34" charset="-122"/>
+                <a:cs typeface="Arial" pitchFamily="34" charset="-120"/>
+              </a:rPr>
+              <a:t>First 10 min</a:t>
+            </a:r>
+            <a:pPr algn="l" indent="0" marL="0">
+              <a:lnSpc>
+                <a:spcPts val="1620"/>
+              </a:lnSpc>
               <a:spcAft>
                 <a:spcPts val="300"/>
               </a:spcAft>
@@ -2696,15 +3137,100 @@
                 <a:ea typeface="Arial" pitchFamily="34" charset="-122"/>
                 <a:cs typeface="Arial" pitchFamily="34" charset="-120"/>
               </a:rPr>
-              <a:t>– Journal check at end of class. Two ticks = on track. One tick = check in tomorrow. No tick = sit with that student for 5 minutes. – Watch for students sketching what they think looks "impressive" rather than what's achievable. A simpler sketch they can actually finish is better than an ambitious one they can't. – The Project 9 (multiplication comparison) students may have nothing visible to sketch yet. Their "sketch" is the data-collection sheet design and the chosen problem set. That's fine — annotate it the same way. – Project 7 (sustainability) students must have nailed </a:t>
-            </a:r>
-            <a:pPr algn="l" indent="0" marL="0">
-              <a:lnSpc>
-                <a:spcPts val="1680"/>
-              </a:lnSpc>
-              <a:spcBef>
-                <a:spcPts val="300"/>
-              </a:spcBef>
+              <a:t>: research. Add at least one new source slip. If you already have three, deepen one.</a:t>
+            </a:r>
+            <a:endParaRPr lang="en-US" sz="1200" dirty="0"/>
+          </a:p>
+          <a:p>
+            <a:pPr algn="l" marL="342900" indent="-342900">
+              <a:lnSpc>
+                <a:spcPts val="1620"/>
+              </a:lnSpc>
+              <a:spcAft>
+                <a:spcPts val="300"/>
+              </a:spcAft>
+              <a:buSzPct val="100000"/>
+              <a:buChar char="•"/>
+            </a:pPr>
+            <a:r>
+              <a:rPr lang="en-US" sz="1200" b="1" dirty="0">
+                <a:solidFill>
+                  <a:srgbClr val="1C2833"/>
+                </a:solidFill>
+                <a:latin typeface="Arial" pitchFamily="34" charset="0"/>
+                <a:ea typeface="Arial" pitchFamily="34" charset="-122"/>
+                <a:cs typeface="Arial" pitchFamily="34" charset="-120"/>
+              </a:rPr>
+              <a:t>Next 13 min</a:t>
+            </a:r>
+            <a:pPr algn="l" indent="0" marL="0">
+              <a:lnSpc>
+                <a:spcPts val="1620"/>
+              </a:lnSpc>
+              <a:spcAft>
+                <a:spcPts val="300"/>
+              </a:spcAft>
+              <a:buNone/>
+            </a:pPr>
+            <a:r>
+              <a:rPr lang="en-US" sz="1200" dirty="0">
+                <a:solidFill>
+                  <a:srgbClr val="1C2833"/>
+                </a:solidFill>
+                <a:latin typeface="Arial" pitchFamily="34" charset="0"/>
+                <a:ea typeface="Arial" pitchFamily="34" charset="-122"/>
+                <a:cs typeface="Arial" pitchFamily="34" charset="-120"/>
+              </a:rPr>
+              <a:t>: sketch the first version of the final artefact.</a:t>
+            </a:r>
+            <a:endParaRPr lang="en-US" sz="1200" dirty="0"/>
+          </a:p>
+          <a:p>
+            <a:pPr algn="l" marL="342900" indent="-342900">
+              <a:lnSpc>
+                <a:spcPts val="1620"/>
+              </a:lnSpc>
+              <a:spcAft>
+                <a:spcPts val="300"/>
+              </a:spcAft>
+              <a:buSzPct val="100000"/>
+              <a:buChar char="•"/>
+            </a:pPr>
+            <a:r>
+              <a:rPr lang="en-US" sz="1200" b="1" dirty="0">
+                <a:solidFill>
+                  <a:srgbClr val="1C2833"/>
+                </a:solidFill>
+                <a:latin typeface="Arial" pitchFamily="34" charset="0"/>
+                <a:ea typeface="Arial" pitchFamily="34" charset="-122"/>
+                <a:cs typeface="Arial" pitchFamily="34" charset="-120"/>
+              </a:rPr>
+              <a:t>Last 2 min</a:t>
+            </a:r>
+            <a:pPr algn="l" indent="0" marL="0">
+              <a:lnSpc>
+                <a:spcPts val="1620"/>
+              </a:lnSpc>
+              <a:spcAft>
+                <a:spcPts val="300"/>
+              </a:spcAft>
+              <a:buNone/>
+            </a:pPr>
+            <a:r>
+              <a:rPr lang="en-US" sz="1200" dirty="0">
+                <a:solidFill>
+                  <a:srgbClr val="1C2833"/>
+                </a:solidFill>
+                <a:latin typeface="Arial" pitchFamily="34" charset="0"/>
+                <a:ea typeface="Arial" pitchFamily="34" charset="-122"/>
+                <a:cs typeface="Arial" pitchFamily="34" charset="-120"/>
+              </a:rPr>
+              <a:t>: pair-swap. Show your partner the sketch. They write </a:t>
+            </a:r>
+            <a:pPr algn="l" indent="0" marL="0">
+              <a:lnSpc>
+                <a:spcPts val="1620"/>
+              </a:lnSpc>
               <a:spcAft>
                 <a:spcPts val="300"/>
               </a:spcAft>
@@ -2719,15 +3245,12 @@
                 <a:ea typeface="Arial" pitchFamily="34" charset="-122"/>
                 <a:cs typeface="Arial" pitchFamily="34" charset="-120"/>
               </a:rPr>
-              <a:t>which station</a:t>
-            </a:r>
-            <a:pPr algn="l" indent="0" marL="0">
-              <a:lnSpc>
-                <a:spcPts val="1680"/>
-              </a:lnSpc>
-              <a:spcBef>
-                <a:spcPts val="300"/>
-              </a:spcBef>
+              <a:t>one question they have</a:t>
+            </a:r>
+            <a:pPr algn="l" indent="0" marL="0">
+              <a:lnSpc>
+                <a:spcPts val="1620"/>
+              </a:lnSpc>
               <a:spcAft>
                 <a:spcPts val="300"/>
               </a:spcAft>
@@ -2742,7 +3265,47 @@
                 <a:ea typeface="Arial" pitchFamily="34" charset="-122"/>
                 <a:cs typeface="Arial" pitchFamily="34" charset="-120"/>
               </a:rPr>
-              <a:t> they'll audit by end of today. Walk over and verify.</a:t>
+              <a:t> and </a:t>
+            </a:r>
+            <a:pPr algn="l" indent="0" marL="0">
+              <a:lnSpc>
+                <a:spcPts val="1620"/>
+              </a:lnSpc>
+              <a:spcAft>
+                <a:spcPts val="300"/>
+              </a:spcAft>
+              <a:buNone/>
+            </a:pPr>
+            <a:r>
+              <a:rPr lang="en-US" sz="1200" i="1" dirty="0">
+                <a:solidFill>
+                  <a:srgbClr val="1C2833"/>
+                </a:solidFill>
+                <a:latin typeface="Arial" pitchFamily="34" charset="0"/>
+                <a:ea typeface="Arial" pitchFamily="34" charset="-122"/>
+                <a:cs typeface="Arial" pitchFamily="34" charset="-120"/>
+              </a:rPr>
+              <a:t>one piece of praise</a:t>
+            </a:r>
+            <a:pPr algn="l" indent="0" marL="0">
+              <a:lnSpc>
+                <a:spcPts val="1620"/>
+              </a:lnSpc>
+              <a:spcAft>
+                <a:spcPts val="300"/>
+              </a:spcAft>
+              <a:buNone/>
+            </a:pPr>
+            <a:r>
+              <a:rPr lang="en-US" sz="1200" dirty="0">
+                <a:solidFill>
+                  <a:srgbClr val="1C2833"/>
+                </a:solidFill>
+                <a:latin typeface="Arial" pitchFamily="34" charset="0"/>
+                <a:ea typeface="Arial" pitchFamily="34" charset="-122"/>
+                <a:cs typeface="Arial" pitchFamily="34" charset="-120"/>
+              </a:rPr>
+              <a:t> on a sticky.</a:t>
             </a:r>
             <a:endParaRPr lang="en-US" sz="1200" dirty="0"/>
           </a:p>
@@ -2900,7 +3463,7 @@
                 <a:ea typeface="Georgia" pitchFamily="34" charset="-122"/>
                 <a:cs typeface="Georgia" pitchFamily="34" charset="-120"/>
               </a:rPr>
-              <a:t>Citation(s) used in this lesson</a:t>
+              <a:t>Wrap-up (5 min)</a:t>
             </a:r>
             <a:endParaRPr lang="en-US" sz="1800" dirty="0"/>
           </a:p>
@@ -2914,8 +3477,8 @@
         </p:nvSpPr>
         <p:spPr>
           <a:xfrm>
-            <a:off x="406301" y="870942"/>
-            <a:ext cx="8498026" cy="213271"/>
+            <a:off x="634901" y="883593"/>
+            <a:ext cx="8102798" cy="975122"/>
           </a:xfrm>
           <a:prstGeom prst="rect">
             <a:avLst/>
@@ -2927,6 +3490,120 @@
           <a:bodyPr wrap="square" lIns="0" tIns="0" rIns="0" bIns="0" rtlCol="0" anchor="t"/>
           <a:lstStyle/>
           <a:p>
+            <a:pPr algn="l" marL="342900" indent="-342900">
+              <a:lnSpc>
+                <a:spcPts val="1620"/>
+              </a:lnSpc>
+              <a:spcAft>
+                <a:spcPts val="300"/>
+              </a:spcAft>
+              <a:buSzPct val="100000"/>
+              <a:buChar char="•"/>
+            </a:pPr>
+            <a:r>
+              <a:rPr lang="en-US" sz="1200" dirty="0">
+                <a:solidFill>
+                  <a:srgbClr val="1C2833"/>
+                </a:solidFill>
+                <a:latin typeface="Arial" pitchFamily="34" charset="0"/>
+                <a:ea typeface="Arial" pitchFamily="34" charset="-122"/>
+                <a:cs typeface="Arial" pitchFamily="34" charset="-120"/>
+              </a:rPr>
+              <a:t>Hand sketches into the in-tray (or photograph them on a phone if students want to keep working at home).</a:t>
+            </a:r>
+            <a:endParaRPr lang="en-US" sz="1200" dirty="0"/>
+          </a:p>
+          <a:p>
+            <a:pPr algn="l" marL="342900" indent="-342900">
+              <a:lnSpc>
+                <a:spcPts val="1620"/>
+              </a:lnSpc>
+              <a:spcAft>
+                <a:spcPts val="300"/>
+              </a:spcAft>
+              <a:buSzPct val="100000"/>
+              <a:buChar char="•"/>
+            </a:pPr>
+            <a:r>
+              <a:rPr lang="en-US" sz="1200" dirty="0">
+                <a:solidFill>
+                  <a:srgbClr val="1C2833"/>
+                </a:solidFill>
+                <a:latin typeface="Arial" pitchFamily="34" charset="0"/>
+                <a:ea typeface="Arial" pitchFamily="34" charset="-122"/>
+                <a:cs typeface="Arial" pitchFamily="34" charset="-120"/>
+              </a:rPr>
+              <a:t>Journal entry: "My sketch is now ___ . Tomorrow's critique should help me with ___ ."</a:t>
+            </a:r>
+            <a:endParaRPr lang="en-US" sz="1200" dirty="0"/>
+          </a:p>
+          <a:p>
+            <a:pPr algn="l" marL="342900" indent="-342900">
+              <a:lnSpc>
+                <a:spcPts val="1620"/>
+              </a:lnSpc>
+              <a:spcAft>
+                <a:spcPts val="300"/>
+              </a:spcAft>
+              <a:buSzPct val="100000"/>
+              <a:buChar char="•"/>
+            </a:pPr>
+            <a:r>
+              <a:rPr lang="en-US" sz="1200" dirty="0">
+                <a:solidFill>
+                  <a:srgbClr val="1C2833"/>
+                </a:solidFill>
+                <a:latin typeface="Arial" pitchFamily="34" charset="0"/>
+                <a:ea typeface="Arial" pitchFamily="34" charset="-122"/>
+                <a:cs typeface="Arial" pitchFamily="34" charset="-120"/>
+              </a:rPr>
+              <a:t>Preview Day 5: </a:t>
+            </a:r>
+            <a:pPr algn="l" indent="0" marL="0">
+              <a:lnSpc>
+                <a:spcPts val="1620"/>
+              </a:lnSpc>
+              <a:spcAft>
+                <a:spcPts val="300"/>
+              </a:spcAft>
+              <a:buNone/>
+            </a:pPr>
+            <a:r>
+              <a:rPr lang="en-US" sz="1200" i="1" dirty="0">
+                <a:solidFill>
+                  <a:srgbClr val="1C2833"/>
+                </a:solidFill>
+                <a:latin typeface="Arial" pitchFamily="34" charset="0"/>
+                <a:ea typeface="Arial" pitchFamily="34" charset="-122"/>
+                <a:cs typeface="Arial" pitchFamily="34" charset="-120"/>
+              </a:rPr>
+              <a:t>"Tomorrow you'll get full peer critique. Bring a willingness to hear hard things. Tomorrow's critique is the most useful 45 minutes you'll spend in this module."</a:t>
+            </a:r>
+            <a:endParaRPr lang="en-US" sz="1200" dirty="0"/>
+          </a:p>
+        </p:txBody>
+      </p:sp>
+      <p:sp>
+        <p:nvSpPr>
+          <p:cNvPr id="5" name="Text 3"/>
+          <p:cNvSpPr/>
+          <p:nvPr/>
+        </p:nvSpPr>
+        <p:spPr>
+          <a:xfrm>
+            <a:off x="406301" y="4434929"/>
+            <a:ext cx="8498026" cy="213271"/>
+          </a:xfrm>
+          <a:prstGeom prst="rect">
+            <a:avLst/>
+          </a:prstGeom>
+          <a:noFill/>
+          <a:ln/>
+        </p:spPr>
+        <p:txBody>
+          <a:bodyPr wrap="square" lIns="0" tIns="0" rIns="0" bIns="0" rtlCol="0" anchor="t"/>
+          <a:lstStyle/>
+          <a:p>
             <a:pPr algn="l" indent="0" marL="0">
               <a:lnSpc>
                 <a:spcPts val="1680"/>
@@ -2948,7 +3625,1730 @@
                 <a:ea typeface="Arial" pitchFamily="34" charset="-122"/>
                 <a:cs typeface="Arial" pitchFamily="34" charset="-120"/>
               </a:rPr>
-              <a:t>– No new scripture citation needed today.</a:t>
+              <a:t>Middle ·  · IKS Curriculum</a:t>
+            </a:r>
+            <a:endParaRPr lang="en-US" sz="1200" dirty="0"/>
+          </a:p>
+        </p:txBody>
+      </p:sp>
+    </p:spTree>
+  </p:cSld>
+  <p:clrMapOvr>
+    <a:masterClrMapping/>
+  </p:clrMapOvr>
+</p:sld>
+</file>
+
+<file path=ppt/slides/slide13.xml><?xml version="1.0" encoding="utf-8"?>
+<p:sld xmlns:a="http://schemas.openxmlformats.org/drawingml/2006/main" xmlns:r="http://schemas.openxmlformats.org/officeDocument/2006/relationships" xmlns:p="http://schemas.openxmlformats.org/presentationml/2006/main">
+  <p:cSld name="Slide 13">
+    <p:bg>
+      <p:bgPr>
+        <a:solidFill>
+          <a:srgbClr val="FFFFFF"/>
+        </a:solidFill>
+      </p:bgPr>
+    </p:bg>
+    <p:spTree>
+      <p:nvGrpSpPr>
+        <p:cNvPr id="1" name=""/>
+        <p:cNvGrpSpPr/>
+        <p:nvPr/>
+      </p:nvGrpSpPr>
+      <p:grpSpPr>
+        <a:xfrm>
+          <a:off x="0" y="0"/>
+          <a:ext cx="0" cy="0"/>
+          <a:chOff x="0" y="0"/>
+          <a:chExt cx="0" cy="0"/>
+        </a:xfrm>
+      </p:grpSpPr>
+      <p:sp>
+        <p:nvSpPr>
+          <p:cNvPr id="2" name="Text 0"/>
+          <p:cNvSpPr/>
+          <p:nvPr/>
+        </p:nvSpPr>
+        <p:spPr>
+          <a:xfrm>
+            <a:off x="0" y="0"/>
+            <a:ext cx="9144000" cy="101501"/>
+          </a:xfrm>
+          <a:prstGeom prst="rect">
+            <a:avLst/>
+          </a:prstGeom>
+          <a:solidFill>
+            <a:srgbClr val="277884"/>
+          </a:solidFill>
+          <a:ln/>
+        </p:spPr>
+        <p:txBody>
+          <a:bodyPr wrap="square" rtlCol="0" anchor="ctr"/>
+          <a:lstStyle/>
+          <a:p>
+            <a:pPr indent="0" marL="0">
+              <a:buNone/>
+            </a:pPr>
+            <a:endParaRPr lang="en-US" dirty="0"/>
+          </a:p>
+        </p:txBody>
+      </p:sp>
+      <p:sp>
+        <p:nvSpPr>
+          <p:cNvPr id="3" name="Text 1"/>
+          <p:cNvSpPr/>
+          <p:nvPr/>
+        </p:nvSpPr>
+        <p:spPr>
+          <a:xfrm>
+            <a:off x="406301" y="457051"/>
+            <a:ext cx="8498026" cy="274290"/>
+          </a:xfrm>
+          <a:prstGeom prst="rect">
+            <a:avLst/>
+          </a:prstGeom>
+          <a:noFill/>
+          <a:ln/>
+        </p:spPr>
+        <p:txBody>
+          <a:bodyPr wrap="square" lIns="0" tIns="0" rIns="0" bIns="0" rtlCol="0" anchor="t"/>
+          <a:lstStyle/>
+          <a:p>
+            <a:pPr algn="l" indent="0" marL="0">
+              <a:lnSpc>
+                <a:spcPts val="2160"/>
+              </a:lnSpc>
+              <a:spcBef>
+                <a:spcPts val="600"/>
+              </a:spcBef>
+              <a:spcAft>
+                <a:spcPts val="800"/>
+              </a:spcAft>
+              <a:buNone/>
+            </a:pPr>
+            <a:r>
+              <a:rPr lang="en-US" sz="1800" b="1" dirty="0">
+                <a:solidFill>
+                  <a:srgbClr val="FE4447"/>
+                </a:solidFill>
+                <a:latin typeface="Georgia" pitchFamily="34" charset="0"/>
+                <a:ea typeface="Georgia" pitchFamily="34" charset="-122"/>
+                <a:cs typeface="Georgia" pitchFamily="34" charset="-120"/>
+              </a:rPr>
+              <a:t>Student-facing content</a:t>
+            </a:r>
+            <a:endParaRPr lang="en-US" sz="1800" dirty="0"/>
+          </a:p>
+        </p:txBody>
+      </p:sp>
+      <p:sp>
+        <p:nvSpPr>
+          <p:cNvPr id="4" name="Text 2"/>
+          <p:cNvSpPr/>
+          <p:nvPr/>
+        </p:nvSpPr>
+        <p:spPr>
+          <a:xfrm>
+            <a:off x="406301" y="883593"/>
+            <a:ext cx="8331398" cy="3033713"/>
+          </a:xfrm>
+          <a:prstGeom prst="rect">
+            <a:avLst/>
+          </a:prstGeom>
+          <a:solidFill>
+            <a:srgbClr val="F4F8F9"/>
+          </a:solidFill>
+          <a:ln/>
+        </p:spPr>
+        <p:txBody>
+          <a:bodyPr wrap="square" rtlCol="0" anchor="ctr"/>
+          <a:lstStyle/>
+          <a:p>
+            <a:pPr indent="0" marL="0">
+              <a:buNone/>
+            </a:pPr>
+            <a:endParaRPr lang="en-US" dirty="0"/>
+          </a:p>
+        </p:txBody>
+      </p:sp>
+      <p:sp>
+        <p:nvSpPr>
+          <p:cNvPr id="5" name="Shape 3"/>
+          <p:cNvSpPr/>
+          <p:nvPr/>
+        </p:nvSpPr>
+        <p:spPr>
+          <a:xfrm>
+            <a:off x="434876" y="883593"/>
+            <a:ext cx="0" cy="3033713"/>
+          </a:xfrm>
+          <a:prstGeom prst="line">
+            <a:avLst/>
+          </a:prstGeom>
+          <a:noFill/>
+          <a:ln w="57150">
+            <a:solidFill>
+              <a:srgbClr val="FE4447"/>
+            </a:solidFill>
+            <a:prstDash val="solid"/>
+          </a:ln>
+        </p:spPr>
+      </p:sp>
+      <p:sp>
+        <p:nvSpPr>
+          <p:cNvPr id="6" name="Text 4"/>
+          <p:cNvSpPr/>
+          <p:nvPr/>
+        </p:nvSpPr>
+        <p:spPr>
+          <a:xfrm>
+            <a:off x="692051" y="1074093"/>
+            <a:ext cx="7973389" cy="230981"/>
+          </a:xfrm>
+          <a:prstGeom prst="rect">
+            <a:avLst/>
+          </a:prstGeom>
+          <a:noFill/>
+          <a:ln/>
+        </p:spPr>
+        <p:txBody>
+          <a:bodyPr wrap="square" lIns="0" tIns="0" rIns="0" bIns="0" rtlCol="0" anchor="t"/>
+          <a:lstStyle/>
+          <a:p>
+            <a:pPr algn="l" indent="0" marL="0">
+              <a:lnSpc>
+                <a:spcPts val="1820"/>
+              </a:lnSpc>
+              <a:spcBef>
+                <a:spcPts val="300"/>
+              </a:spcBef>
+              <a:spcAft>
+                <a:spcPts val="300"/>
+              </a:spcAft>
+              <a:buNone/>
+            </a:pPr>
+            <a:r>
+              <a:rPr lang="en-US" sz="1300" b="1" i="1" dirty="0">
+                <a:solidFill>
+                  <a:srgbClr val="1C2833"/>
+                </a:solidFill>
+                <a:latin typeface="Georgia" pitchFamily="34" charset="0"/>
+                <a:ea typeface="Georgia" pitchFamily="34" charset="-122"/>
+                <a:cs typeface="Georgia" pitchFamily="34" charset="-120"/>
+              </a:rPr>
+              <a:t>A sketch is a thinking tool, not a final.</a:t>
+            </a:r>
+            <a:endParaRPr lang="en-US" sz="1300" dirty="0"/>
+          </a:p>
+        </p:txBody>
+      </p:sp>
+      <p:sp>
+        <p:nvSpPr>
+          <p:cNvPr id="7" name="Text 5"/>
+          <p:cNvSpPr/>
+          <p:nvPr/>
+        </p:nvSpPr>
+        <p:spPr>
+          <a:xfrm>
+            <a:off x="692051" y="1343174"/>
+            <a:ext cx="7973389" cy="230981"/>
+          </a:xfrm>
+          <a:prstGeom prst="rect">
+            <a:avLst/>
+          </a:prstGeom>
+          <a:noFill/>
+          <a:ln/>
+        </p:spPr>
+        <p:txBody>
+          <a:bodyPr wrap="square" lIns="0" tIns="0" rIns="0" bIns="0" rtlCol="0" anchor="t"/>
+          <a:lstStyle/>
+          <a:p>
+            <a:pPr algn="l" indent="0" marL="0">
+              <a:lnSpc>
+                <a:spcPts val="1820"/>
+              </a:lnSpc>
+              <a:spcBef>
+                <a:spcPts val="300"/>
+              </a:spcBef>
+              <a:spcAft>
+                <a:spcPts val="300"/>
+              </a:spcAft>
+              <a:buNone/>
+            </a:pPr>
+            <a:r>
+              <a:rPr lang="en-US" sz="1300" i="1" dirty="0">
+                <a:solidFill>
+                  <a:srgbClr val="1C2833"/>
+                </a:solidFill>
+                <a:latin typeface="Georgia" pitchFamily="34" charset="0"/>
+                <a:ea typeface="Georgia" pitchFamily="34" charset="-122"/>
+                <a:cs typeface="Georgia" pitchFamily="34" charset="-120"/>
+              </a:rPr>
+              <a:t>Today: more research, then your first sketch.</a:t>
+            </a:r>
+            <a:endParaRPr lang="en-US" sz="1300" dirty="0"/>
+          </a:p>
+        </p:txBody>
+      </p:sp>
+      <p:sp>
+        <p:nvSpPr>
+          <p:cNvPr id="8" name="Text 6"/>
+          <p:cNvSpPr/>
+          <p:nvPr/>
+        </p:nvSpPr>
+        <p:spPr>
+          <a:xfrm>
+            <a:off x="692051" y="1612255"/>
+            <a:ext cx="7973389" cy="230981"/>
+          </a:xfrm>
+          <a:prstGeom prst="rect">
+            <a:avLst/>
+          </a:prstGeom>
+          <a:noFill/>
+          <a:ln/>
+        </p:spPr>
+        <p:txBody>
+          <a:bodyPr wrap="square" lIns="0" tIns="0" rIns="0" bIns="0" rtlCol="0" anchor="t"/>
+          <a:lstStyle/>
+          <a:p>
+            <a:pPr algn="l" indent="0" marL="0">
+              <a:lnSpc>
+                <a:spcPts val="1820"/>
+              </a:lnSpc>
+              <a:spcBef>
+                <a:spcPts val="300"/>
+              </a:spcBef>
+              <a:spcAft>
+                <a:spcPts val="300"/>
+              </a:spcAft>
+              <a:buNone/>
+            </a:pPr>
+            <a:r>
+              <a:rPr lang="en-US" sz="1300" i="1" dirty="0">
+                <a:solidFill>
+                  <a:srgbClr val="1C2833"/>
+                </a:solidFill>
+                <a:latin typeface="Georgia" pitchFamily="34" charset="0"/>
+                <a:ea typeface="Georgia" pitchFamily="34" charset="-122"/>
+                <a:cs typeface="Georgia" pitchFamily="34" charset="-120"/>
+              </a:rPr>
+              <a:t>Rules of a sketch:</a:t>
+            </a:r>
+            <a:endParaRPr lang="en-US" sz="1300" dirty="0"/>
+          </a:p>
+        </p:txBody>
+      </p:sp>
+      <p:sp>
+        <p:nvSpPr>
+          <p:cNvPr id="9" name="Text 7"/>
+          <p:cNvSpPr/>
+          <p:nvPr/>
+        </p:nvSpPr>
+        <p:spPr>
+          <a:xfrm>
+            <a:off x="692051" y="1881336"/>
+            <a:ext cx="7973389" cy="230981"/>
+          </a:xfrm>
+          <a:prstGeom prst="rect">
+            <a:avLst/>
+          </a:prstGeom>
+          <a:noFill/>
+          <a:ln/>
+        </p:spPr>
+        <p:txBody>
+          <a:bodyPr wrap="square" lIns="0" tIns="0" rIns="0" bIns="0" rtlCol="0" anchor="t"/>
+          <a:lstStyle/>
+          <a:p>
+            <a:pPr algn="l" indent="0" marL="0">
+              <a:lnSpc>
+                <a:spcPts val="1820"/>
+              </a:lnSpc>
+              <a:spcBef>
+                <a:spcPts val="300"/>
+              </a:spcBef>
+              <a:spcAft>
+                <a:spcPts val="300"/>
+              </a:spcAft>
+              <a:buNone/>
+            </a:pPr>
+            <a:r>
+              <a:rPr lang="en-US" sz="1300" i="1" dirty="0">
+                <a:solidFill>
+                  <a:srgbClr val="1C2833"/>
+                </a:solidFill>
+                <a:latin typeface="Georgia" pitchFamily="34" charset="0"/>
+                <a:ea typeface="Georgia" pitchFamily="34" charset="-122"/>
+                <a:cs typeface="Georgia" pitchFamily="34" charset="-120"/>
+              </a:rPr>
+              <a:t>Pencil only.</a:t>
+            </a:r>
+            <a:endParaRPr lang="en-US" sz="1300" dirty="0"/>
+          </a:p>
+        </p:txBody>
+      </p:sp>
+      <p:sp>
+        <p:nvSpPr>
+          <p:cNvPr id="10" name="Text 8"/>
+          <p:cNvSpPr/>
+          <p:nvPr/>
+        </p:nvSpPr>
+        <p:spPr>
+          <a:xfrm>
+            <a:off x="692051" y="2150418"/>
+            <a:ext cx="7973389" cy="230981"/>
+          </a:xfrm>
+          <a:prstGeom prst="rect">
+            <a:avLst/>
+          </a:prstGeom>
+          <a:noFill/>
+          <a:ln/>
+        </p:spPr>
+        <p:txBody>
+          <a:bodyPr wrap="square" lIns="0" tIns="0" rIns="0" bIns="0" rtlCol="0" anchor="t"/>
+          <a:lstStyle/>
+          <a:p>
+            <a:pPr algn="l" indent="0" marL="0">
+              <a:lnSpc>
+                <a:spcPts val="1820"/>
+              </a:lnSpc>
+              <a:spcBef>
+                <a:spcPts val="300"/>
+              </a:spcBef>
+              <a:spcAft>
+                <a:spcPts val="300"/>
+              </a:spcAft>
+              <a:buNone/>
+            </a:pPr>
+            <a:r>
+              <a:rPr lang="en-US" sz="1300" i="1" dirty="0">
+                <a:solidFill>
+                  <a:srgbClr val="1C2833"/>
+                </a:solidFill>
+                <a:latin typeface="Georgia" pitchFamily="34" charset="0"/>
+                <a:ea typeface="Georgia" pitchFamily="34" charset="-122"/>
+                <a:cs typeface="Georgia" pitchFamily="34" charset="-120"/>
+              </a:rPr>
+              <a:t>Label everything.</a:t>
+            </a:r>
+            <a:endParaRPr lang="en-US" sz="1300" dirty="0"/>
+          </a:p>
+        </p:txBody>
+      </p:sp>
+      <p:sp>
+        <p:nvSpPr>
+          <p:cNvPr id="11" name="Text 9"/>
+          <p:cNvSpPr/>
+          <p:nvPr/>
+        </p:nvSpPr>
+        <p:spPr>
+          <a:xfrm>
+            <a:off x="692051" y="2419499"/>
+            <a:ext cx="7973389" cy="230981"/>
+          </a:xfrm>
+          <a:prstGeom prst="rect">
+            <a:avLst/>
+          </a:prstGeom>
+          <a:noFill/>
+          <a:ln/>
+        </p:spPr>
+        <p:txBody>
+          <a:bodyPr wrap="square" lIns="0" tIns="0" rIns="0" bIns="0" rtlCol="0" anchor="t"/>
+          <a:lstStyle/>
+          <a:p>
+            <a:pPr algn="l" indent="0" marL="0">
+              <a:lnSpc>
+                <a:spcPts val="1820"/>
+              </a:lnSpc>
+              <a:spcBef>
+                <a:spcPts val="300"/>
+              </a:spcBef>
+              <a:spcAft>
+                <a:spcPts val="300"/>
+              </a:spcAft>
+              <a:buNone/>
+            </a:pPr>
+            <a:r>
+              <a:rPr lang="en-US" sz="1300" i="1" dirty="0">
+                <a:solidFill>
+                  <a:srgbClr val="1C2833"/>
+                </a:solidFill>
+                <a:latin typeface="Georgia" pitchFamily="34" charset="0"/>
+                <a:ea typeface="Georgia" pitchFamily="34" charset="-122"/>
+                <a:cs typeface="Georgia" pitchFamily="34" charset="-120"/>
+              </a:rPr>
+              <a:t>Annotate dimensions.</a:t>
+            </a:r>
+            <a:endParaRPr lang="en-US" sz="1300" dirty="0"/>
+          </a:p>
+        </p:txBody>
+      </p:sp>
+      <p:sp>
+        <p:nvSpPr>
+          <p:cNvPr id="12" name="Text 10"/>
+          <p:cNvSpPr/>
+          <p:nvPr/>
+        </p:nvSpPr>
+        <p:spPr>
+          <a:xfrm>
+            <a:off x="692051" y="2688580"/>
+            <a:ext cx="7973389" cy="230981"/>
+          </a:xfrm>
+          <a:prstGeom prst="rect">
+            <a:avLst/>
+          </a:prstGeom>
+          <a:noFill/>
+          <a:ln/>
+        </p:spPr>
+        <p:txBody>
+          <a:bodyPr wrap="square" lIns="0" tIns="0" rIns="0" bIns="0" rtlCol="0" anchor="t"/>
+          <a:lstStyle/>
+          <a:p>
+            <a:pPr algn="l" indent="0" marL="0">
+              <a:lnSpc>
+                <a:spcPts val="1820"/>
+              </a:lnSpc>
+              <a:spcBef>
+                <a:spcPts val="300"/>
+              </a:spcBef>
+              <a:spcAft>
+                <a:spcPts val="300"/>
+              </a:spcAft>
+              <a:buNone/>
+            </a:pPr>
+            <a:r>
+              <a:rPr lang="en-US" sz="1300" i="1" dirty="0">
+                <a:solidFill>
+                  <a:srgbClr val="1C2833"/>
+                </a:solidFill>
+                <a:latin typeface="Georgia" pitchFamily="34" charset="0"/>
+                <a:ea typeface="Georgia" pitchFamily="34" charset="-122"/>
+                <a:cs typeface="Georgia" pitchFamily="34" charset="-120"/>
+              </a:rPr>
+              <a:t>Leave white space for what you haven't figured out — write "TBD" and move on.</a:t>
+            </a:r>
+            <a:endParaRPr lang="en-US" sz="1300" dirty="0"/>
+          </a:p>
+        </p:txBody>
+      </p:sp>
+      <p:sp>
+        <p:nvSpPr>
+          <p:cNvPr id="13" name="Text 11"/>
+          <p:cNvSpPr/>
+          <p:nvPr/>
+        </p:nvSpPr>
+        <p:spPr>
+          <a:xfrm>
+            <a:off x="692051" y="2957661"/>
+            <a:ext cx="7973389" cy="230981"/>
+          </a:xfrm>
+          <a:prstGeom prst="rect">
+            <a:avLst/>
+          </a:prstGeom>
+          <a:noFill/>
+          <a:ln/>
+        </p:spPr>
+        <p:txBody>
+          <a:bodyPr wrap="square" lIns="0" tIns="0" rIns="0" bIns="0" rtlCol="0" anchor="t"/>
+          <a:lstStyle/>
+          <a:p>
+            <a:pPr algn="l" indent="0" marL="0">
+              <a:lnSpc>
+                <a:spcPts val="1820"/>
+              </a:lnSpc>
+              <a:spcBef>
+                <a:spcPts val="300"/>
+              </a:spcBef>
+              <a:spcAft>
+                <a:spcPts val="300"/>
+              </a:spcAft>
+              <a:buNone/>
+            </a:pPr>
+            <a:r>
+              <a:rPr lang="en-US" sz="1300" i="1" dirty="0">
+                <a:solidFill>
+                  <a:srgbClr val="1C2833"/>
+                </a:solidFill>
+                <a:latin typeface="Georgia" pitchFamily="34" charset="0"/>
+                <a:ea typeface="Georgia" pitchFamily="34" charset="-122"/>
+                <a:cs typeface="Georgia" pitchFamily="34" charset="-120"/>
+              </a:rPr>
+              <a:t>By end of class:</a:t>
+            </a:r>
+            <a:endParaRPr lang="en-US" sz="1300" dirty="0"/>
+          </a:p>
+        </p:txBody>
+      </p:sp>
+      <p:sp>
+        <p:nvSpPr>
+          <p:cNvPr id="14" name="Text 12"/>
+          <p:cNvSpPr/>
+          <p:nvPr/>
+        </p:nvSpPr>
+        <p:spPr>
+          <a:xfrm>
+            <a:off x="692051" y="3226743"/>
+            <a:ext cx="7973389" cy="230981"/>
+          </a:xfrm>
+          <a:prstGeom prst="rect">
+            <a:avLst/>
+          </a:prstGeom>
+          <a:noFill/>
+          <a:ln/>
+        </p:spPr>
+        <p:txBody>
+          <a:bodyPr wrap="square" lIns="0" tIns="0" rIns="0" bIns="0" rtlCol="0" anchor="t"/>
+          <a:lstStyle/>
+          <a:p>
+            <a:pPr algn="l" indent="0" marL="0">
+              <a:lnSpc>
+                <a:spcPts val="1820"/>
+              </a:lnSpc>
+              <a:spcBef>
+                <a:spcPts val="300"/>
+              </a:spcBef>
+              <a:spcAft>
+                <a:spcPts val="300"/>
+              </a:spcAft>
+              <a:buNone/>
+            </a:pPr>
+            <a:r>
+              <a:rPr lang="en-US" sz="1300" i="1" dirty="0">
+                <a:solidFill>
+                  <a:srgbClr val="1C2833"/>
+                </a:solidFill>
+                <a:latin typeface="Georgia" pitchFamily="34" charset="0"/>
+                <a:ea typeface="Georgia" pitchFamily="34" charset="-122"/>
+                <a:cs typeface="Georgia" pitchFamily="34" charset="-120"/>
+              </a:rPr>
+              <a:t>At least 3 citation slips on file (2 from yesterday + 1 new).</a:t>
+            </a:r>
+            <a:endParaRPr lang="en-US" sz="1300" dirty="0"/>
+          </a:p>
+        </p:txBody>
+      </p:sp>
+      <p:sp>
+        <p:nvSpPr>
+          <p:cNvPr id="15" name="Text 13"/>
+          <p:cNvSpPr/>
+          <p:nvPr/>
+        </p:nvSpPr>
+        <p:spPr>
+          <a:xfrm>
+            <a:off x="692051" y="3495824"/>
+            <a:ext cx="7973389" cy="230981"/>
+          </a:xfrm>
+          <a:prstGeom prst="rect">
+            <a:avLst/>
+          </a:prstGeom>
+          <a:noFill/>
+          <a:ln/>
+        </p:spPr>
+        <p:txBody>
+          <a:bodyPr wrap="square" lIns="0" tIns="0" rIns="0" bIns="0" rtlCol="0" anchor="t"/>
+          <a:lstStyle/>
+          <a:p>
+            <a:pPr algn="l" indent="0" marL="0">
+              <a:lnSpc>
+                <a:spcPts val="1820"/>
+              </a:lnSpc>
+              <a:spcBef>
+                <a:spcPts val="300"/>
+              </a:spcBef>
+              <a:spcAft>
+                <a:spcPts val="300"/>
+              </a:spcAft>
+              <a:buNone/>
+            </a:pPr>
+            <a:r>
+              <a:rPr lang="en-US" sz="1300" i="1" dirty="0">
+                <a:solidFill>
+                  <a:srgbClr val="1C2833"/>
+                </a:solidFill>
+                <a:latin typeface="Georgia" pitchFamily="34" charset="0"/>
+                <a:ea typeface="Georgia" pitchFamily="34" charset="-122"/>
+                <a:cs typeface="Georgia" pitchFamily="34" charset="-120"/>
+              </a:rPr>
+              <a:t>One sketch of the artefact, with labels.</a:t>
+            </a:r>
+            <a:endParaRPr lang="en-US" sz="1300" dirty="0"/>
+          </a:p>
+        </p:txBody>
+      </p:sp>
+      <p:sp>
+        <p:nvSpPr>
+          <p:cNvPr id="16" name="Text 14"/>
+          <p:cNvSpPr/>
+          <p:nvPr/>
+        </p:nvSpPr>
+        <p:spPr>
+          <a:xfrm>
+            <a:off x="406301" y="4434929"/>
+            <a:ext cx="8498026" cy="213271"/>
+          </a:xfrm>
+          <a:prstGeom prst="rect">
+            <a:avLst/>
+          </a:prstGeom>
+          <a:noFill/>
+          <a:ln/>
+        </p:spPr>
+        <p:txBody>
+          <a:bodyPr wrap="square" lIns="0" tIns="0" rIns="0" bIns="0" rtlCol="0" anchor="t"/>
+          <a:lstStyle/>
+          <a:p>
+            <a:pPr algn="l" indent="0" marL="0">
+              <a:lnSpc>
+                <a:spcPts val="1680"/>
+              </a:lnSpc>
+              <a:spcBef>
+                <a:spcPts val="300"/>
+              </a:spcBef>
+              <a:spcAft>
+                <a:spcPts val="300"/>
+              </a:spcAft>
+              <a:buNone/>
+            </a:pPr>
+            <a:r>
+              <a:rPr lang="en-US" sz="1200" dirty="0">
+                <a:solidFill>
+                  <a:srgbClr val="1C2833"/>
+                </a:solidFill>
+                <a:latin typeface="Arial" pitchFamily="34" charset="0"/>
+                <a:ea typeface="Arial" pitchFamily="34" charset="-122"/>
+                <a:cs typeface="Arial" pitchFamily="34" charset="-120"/>
+              </a:rPr>
+              <a:t>Middle ·  · IKS Curriculum</a:t>
+            </a:r>
+            <a:endParaRPr lang="en-US" sz="1200" dirty="0"/>
+          </a:p>
+        </p:txBody>
+      </p:sp>
+    </p:spTree>
+  </p:cSld>
+  <p:clrMapOvr>
+    <a:masterClrMapping/>
+  </p:clrMapOvr>
+</p:sld>
+</file>
+
+<file path=ppt/slides/slide14.xml><?xml version="1.0" encoding="utf-8"?>
+<p:sld xmlns:a="http://schemas.openxmlformats.org/drawingml/2006/main" xmlns:r="http://schemas.openxmlformats.org/officeDocument/2006/relationships" xmlns:p="http://schemas.openxmlformats.org/presentationml/2006/main">
+  <p:cSld name="Slide 14">
+    <p:bg>
+      <p:bgPr>
+        <a:solidFill>
+          <a:srgbClr val="FFFFFF"/>
+        </a:solidFill>
+      </p:bgPr>
+    </p:bg>
+    <p:spTree>
+      <p:nvGrpSpPr>
+        <p:cNvPr id="1" name=""/>
+        <p:cNvGrpSpPr/>
+        <p:nvPr/>
+      </p:nvGrpSpPr>
+      <p:grpSpPr>
+        <a:xfrm>
+          <a:off x="0" y="0"/>
+          <a:ext cx="0" cy="0"/>
+          <a:chOff x="0" y="0"/>
+          <a:chExt cx="0" cy="0"/>
+        </a:xfrm>
+      </p:grpSpPr>
+      <p:sp>
+        <p:nvSpPr>
+          <p:cNvPr id="2" name="Text 0"/>
+          <p:cNvSpPr/>
+          <p:nvPr/>
+        </p:nvSpPr>
+        <p:spPr>
+          <a:xfrm>
+            <a:off x="0" y="0"/>
+            <a:ext cx="9144000" cy="101501"/>
+          </a:xfrm>
+          <a:prstGeom prst="rect">
+            <a:avLst/>
+          </a:prstGeom>
+          <a:solidFill>
+            <a:srgbClr val="277884"/>
+          </a:solidFill>
+          <a:ln/>
+        </p:spPr>
+        <p:txBody>
+          <a:bodyPr wrap="square" rtlCol="0" anchor="ctr"/>
+          <a:lstStyle/>
+          <a:p>
+            <a:pPr indent="0" marL="0">
+              <a:buNone/>
+            </a:pPr>
+            <a:endParaRPr lang="en-US" dirty="0"/>
+          </a:p>
+        </p:txBody>
+      </p:sp>
+      <p:sp>
+        <p:nvSpPr>
+          <p:cNvPr id="3" name="Text 1"/>
+          <p:cNvSpPr/>
+          <p:nvPr/>
+        </p:nvSpPr>
+        <p:spPr>
+          <a:xfrm>
+            <a:off x="406301" y="457051"/>
+            <a:ext cx="8498026" cy="274290"/>
+          </a:xfrm>
+          <a:prstGeom prst="rect">
+            <a:avLst/>
+          </a:prstGeom>
+          <a:noFill/>
+          <a:ln/>
+        </p:spPr>
+        <p:txBody>
+          <a:bodyPr wrap="square" lIns="0" tIns="0" rIns="0" bIns="0" rtlCol="0" anchor="t"/>
+          <a:lstStyle/>
+          <a:p>
+            <a:pPr algn="l" indent="0" marL="0">
+              <a:lnSpc>
+                <a:spcPts val="2160"/>
+              </a:lnSpc>
+              <a:spcBef>
+                <a:spcPts val="600"/>
+              </a:spcBef>
+              <a:spcAft>
+                <a:spcPts val="800"/>
+              </a:spcAft>
+              <a:buNone/>
+            </a:pPr>
+            <a:r>
+              <a:rPr lang="en-US" sz="1800" b="1" dirty="0">
+                <a:solidFill>
+                  <a:srgbClr val="FE4447"/>
+                </a:solidFill>
+                <a:latin typeface="Georgia" pitchFamily="34" charset="0"/>
+                <a:ea typeface="Georgia" pitchFamily="34" charset="-122"/>
+                <a:cs typeface="Georgia" pitchFamily="34" charset="-120"/>
+              </a:rPr>
+              <a:t>Homework</a:t>
+            </a:r>
+            <a:endParaRPr lang="en-US" sz="1800" dirty="0"/>
+          </a:p>
+        </p:txBody>
+      </p:sp>
+      <p:sp>
+        <p:nvSpPr>
+          <p:cNvPr id="4" name="Text 2"/>
+          <p:cNvSpPr/>
+          <p:nvPr/>
+        </p:nvSpPr>
+        <p:spPr>
+          <a:xfrm>
+            <a:off x="634901" y="883593"/>
+            <a:ext cx="8102798" cy="769441"/>
+          </a:xfrm>
+          <a:prstGeom prst="rect">
+            <a:avLst/>
+          </a:prstGeom>
+          <a:noFill/>
+          <a:ln/>
+        </p:spPr>
+        <p:txBody>
+          <a:bodyPr wrap="square" lIns="0" tIns="0" rIns="0" bIns="0" rtlCol="0" anchor="t"/>
+          <a:lstStyle/>
+          <a:p>
+            <a:pPr algn="l" marL="342900" indent="-342900">
+              <a:lnSpc>
+                <a:spcPts val="1620"/>
+              </a:lnSpc>
+              <a:spcAft>
+                <a:spcPts val="300"/>
+              </a:spcAft>
+              <a:buSzPct val="100000"/>
+              <a:buChar char="•"/>
+            </a:pPr>
+            <a:r>
+              <a:rPr lang="en-US" sz="1200" dirty="0">
+                <a:solidFill>
+                  <a:srgbClr val="1C2833"/>
+                </a:solidFill>
+                <a:latin typeface="Arial" pitchFamily="34" charset="0"/>
+                <a:ea typeface="Arial" pitchFamily="34" charset="-122"/>
+                <a:cs typeface="Arial" pitchFamily="34" charset="-120"/>
+              </a:rPr>
+              <a:t>Refine your sketch at home if you want. Don't start a second sketch — keep iterating on the first.</a:t>
+            </a:r>
+            <a:endParaRPr lang="en-US" sz="1200" dirty="0"/>
+          </a:p>
+          <a:p>
+            <a:pPr algn="l" marL="342900" indent="-342900">
+              <a:lnSpc>
+                <a:spcPts val="1620"/>
+              </a:lnSpc>
+              <a:spcAft>
+                <a:spcPts val="300"/>
+              </a:spcAft>
+              <a:buSzPct val="100000"/>
+              <a:buChar char="•"/>
+            </a:pPr>
+            <a:r>
+              <a:rPr lang="en-US" sz="1200" dirty="0">
+                <a:solidFill>
+                  <a:srgbClr val="1C2833"/>
+                </a:solidFill>
+                <a:latin typeface="Arial" pitchFamily="34" charset="0"/>
+                <a:ea typeface="Arial" pitchFamily="34" charset="-122"/>
+                <a:cs typeface="Arial" pitchFamily="34" charset="-120"/>
+              </a:rPr>
+              <a:t>Photograph your sketch and your three citation slips. Bring the photos or the originals to Day 5.</a:t>
+            </a:r>
+            <a:endParaRPr lang="en-US" sz="1200" dirty="0"/>
+          </a:p>
+          <a:p>
+            <a:pPr algn="l" marL="342900" indent="-342900">
+              <a:lnSpc>
+                <a:spcPts val="1620"/>
+              </a:lnSpc>
+              <a:spcAft>
+                <a:spcPts val="300"/>
+              </a:spcAft>
+              <a:buSzPct val="100000"/>
+              <a:buChar char="•"/>
+            </a:pPr>
+            <a:r>
+              <a:rPr lang="en-US" sz="1200" dirty="0">
+                <a:solidFill>
+                  <a:srgbClr val="1C2833"/>
+                </a:solidFill>
+                <a:latin typeface="Arial" pitchFamily="34" charset="0"/>
+                <a:ea typeface="Arial" pitchFamily="34" charset="-122"/>
+                <a:cs typeface="Arial" pitchFamily="34" charset="-120"/>
+              </a:rPr>
+              <a:t>Read your partner's sticky-note comment. Don't react yet — just hold it for tomorrow.</a:t>
+            </a:r>
+            <a:endParaRPr lang="en-US" sz="1200" dirty="0"/>
+          </a:p>
+        </p:txBody>
+      </p:sp>
+      <p:sp>
+        <p:nvSpPr>
+          <p:cNvPr id="5" name="Text 3"/>
+          <p:cNvSpPr/>
+          <p:nvPr/>
+        </p:nvSpPr>
+        <p:spPr>
+          <a:xfrm>
+            <a:off x="406301" y="4434929"/>
+            <a:ext cx="8498026" cy="213271"/>
+          </a:xfrm>
+          <a:prstGeom prst="rect">
+            <a:avLst/>
+          </a:prstGeom>
+          <a:noFill/>
+          <a:ln/>
+        </p:spPr>
+        <p:txBody>
+          <a:bodyPr wrap="square" lIns="0" tIns="0" rIns="0" bIns="0" rtlCol="0" anchor="t"/>
+          <a:lstStyle/>
+          <a:p>
+            <a:pPr algn="l" indent="0" marL="0">
+              <a:lnSpc>
+                <a:spcPts val="1680"/>
+              </a:lnSpc>
+              <a:spcBef>
+                <a:spcPts val="300"/>
+              </a:spcBef>
+              <a:spcAft>
+                <a:spcPts val="300"/>
+              </a:spcAft>
+              <a:buNone/>
+            </a:pPr>
+            <a:r>
+              <a:rPr lang="en-US" sz="1200" dirty="0">
+                <a:solidFill>
+                  <a:srgbClr val="1C2833"/>
+                </a:solidFill>
+                <a:latin typeface="Arial" pitchFamily="34" charset="0"/>
+                <a:ea typeface="Arial" pitchFamily="34" charset="-122"/>
+                <a:cs typeface="Arial" pitchFamily="34" charset="-120"/>
+              </a:rPr>
+              <a:t>Middle ·  · IKS Curriculum</a:t>
+            </a:r>
+            <a:endParaRPr lang="en-US" sz="1200" dirty="0"/>
+          </a:p>
+        </p:txBody>
+      </p:sp>
+    </p:spTree>
+  </p:cSld>
+  <p:clrMapOvr>
+    <a:masterClrMapping/>
+  </p:clrMapOvr>
+</p:sld>
+</file>
+
+<file path=ppt/slides/slide15.xml><?xml version="1.0" encoding="utf-8"?>
+<p:sld xmlns:a="http://schemas.openxmlformats.org/drawingml/2006/main" xmlns:r="http://schemas.openxmlformats.org/officeDocument/2006/relationships" xmlns:p="http://schemas.openxmlformats.org/presentationml/2006/main">
+  <p:cSld name="Slide 15">
+    <p:bg>
+      <p:bgPr>
+        <a:solidFill>
+          <a:srgbClr val="FFFFFF"/>
+        </a:solidFill>
+      </p:bgPr>
+    </p:bg>
+    <p:spTree>
+      <p:nvGrpSpPr>
+        <p:cNvPr id="1" name=""/>
+        <p:cNvGrpSpPr/>
+        <p:nvPr/>
+      </p:nvGrpSpPr>
+      <p:grpSpPr>
+        <a:xfrm>
+          <a:off x="0" y="0"/>
+          <a:ext cx="0" cy="0"/>
+          <a:chOff x="0" y="0"/>
+          <a:chExt cx="0" cy="0"/>
+        </a:xfrm>
+      </p:grpSpPr>
+      <p:sp>
+        <p:nvSpPr>
+          <p:cNvPr id="2" name="Text 0"/>
+          <p:cNvSpPr/>
+          <p:nvPr/>
+        </p:nvSpPr>
+        <p:spPr>
+          <a:xfrm>
+            <a:off x="0" y="0"/>
+            <a:ext cx="9144000" cy="101501"/>
+          </a:xfrm>
+          <a:prstGeom prst="rect">
+            <a:avLst/>
+          </a:prstGeom>
+          <a:solidFill>
+            <a:srgbClr val="277884"/>
+          </a:solidFill>
+          <a:ln/>
+        </p:spPr>
+        <p:txBody>
+          <a:bodyPr wrap="square" rtlCol="0" anchor="ctr"/>
+          <a:lstStyle/>
+          <a:p>
+            <a:pPr indent="0" marL="0">
+              <a:buNone/>
+            </a:pPr>
+            <a:endParaRPr lang="en-US" dirty="0"/>
+          </a:p>
+        </p:txBody>
+      </p:sp>
+      <p:sp>
+        <p:nvSpPr>
+          <p:cNvPr id="3" name="Text 1"/>
+          <p:cNvSpPr/>
+          <p:nvPr/>
+        </p:nvSpPr>
+        <p:spPr>
+          <a:xfrm>
+            <a:off x="406301" y="457051"/>
+            <a:ext cx="8498026" cy="274290"/>
+          </a:xfrm>
+          <a:prstGeom prst="rect">
+            <a:avLst/>
+          </a:prstGeom>
+          <a:noFill/>
+          <a:ln/>
+        </p:spPr>
+        <p:txBody>
+          <a:bodyPr wrap="square" lIns="0" tIns="0" rIns="0" bIns="0" rtlCol="0" anchor="t"/>
+          <a:lstStyle/>
+          <a:p>
+            <a:pPr algn="l" indent="0" marL="0">
+              <a:lnSpc>
+                <a:spcPts val="2160"/>
+              </a:lnSpc>
+              <a:spcBef>
+                <a:spcPts val="600"/>
+              </a:spcBef>
+              <a:spcAft>
+                <a:spcPts val="800"/>
+              </a:spcAft>
+              <a:buNone/>
+            </a:pPr>
+            <a:r>
+              <a:rPr lang="en-US" sz="1800" b="1" dirty="0">
+                <a:solidFill>
+                  <a:srgbClr val="FE4447"/>
+                </a:solidFill>
+                <a:latin typeface="Georgia" pitchFamily="34" charset="0"/>
+                <a:ea typeface="Georgia" pitchFamily="34" charset="-122"/>
+                <a:cs typeface="Georgia" pitchFamily="34" charset="-120"/>
+              </a:rPr>
+              <a:t>Differentiation</a:t>
+            </a:r>
+            <a:endParaRPr lang="en-US" sz="1800" dirty="0"/>
+          </a:p>
+        </p:txBody>
+      </p:sp>
+      <p:sp>
+        <p:nvSpPr>
+          <p:cNvPr id="4" name="Text 2"/>
+          <p:cNvSpPr/>
+          <p:nvPr/>
+        </p:nvSpPr>
+        <p:spPr>
+          <a:xfrm>
+            <a:off x="634901" y="883593"/>
+            <a:ext cx="8102798" cy="937022"/>
+          </a:xfrm>
+          <a:prstGeom prst="rect">
+            <a:avLst/>
+          </a:prstGeom>
+          <a:noFill/>
+          <a:ln/>
+        </p:spPr>
+        <p:txBody>
+          <a:bodyPr wrap="square" lIns="0" tIns="0" rIns="0" bIns="0" rtlCol="0" anchor="t"/>
+          <a:lstStyle/>
+          <a:p>
+            <a:pPr algn="l" marL="342900" indent="-342900">
+              <a:lnSpc>
+                <a:spcPts val="1620"/>
+              </a:lnSpc>
+              <a:spcAft>
+                <a:spcPts val="300"/>
+              </a:spcAft>
+              <a:buSzPct val="100000"/>
+              <a:buChar char="•"/>
+            </a:pPr>
+            <a:r>
+              <a:rPr lang="en-US" sz="1200" b="1" dirty="0">
+                <a:solidFill>
+                  <a:srgbClr val="1C2833"/>
+                </a:solidFill>
+                <a:latin typeface="Arial" pitchFamily="34" charset="0"/>
+                <a:ea typeface="Arial" pitchFamily="34" charset="-122"/>
+                <a:cs typeface="Arial" pitchFamily="34" charset="-120"/>
+              </a:rPr>
+              <a:t>One tier up:</a:t>
+            </a:r>
+            <a:pPr algn="l" indent="0" marL="0">
+              <a:lnSpc>
+                <a:spcPts val="1620"/>
+              </a:lnSpc>
+              <a:spcAft>
+                <a:spcPts val="300"/>
+              </a:spcAft>
+              <a:buNone/>
+            </a:pPr>
+            <a:r>
+              <a:rPr lang="en-US" sz="1200" dirty="0">
+                <a:solidFill>
+                  <a:srgbClr val="1C2833"/>
+                </a:solidFill>
+                <a:latin typeface="Arial" pitchFamily="34" charset="0"/>
+                <a:ea typeface="Arial" pitchFamily="34" charset="-122"/>
+                <a:cs typeface="Arial" pitchFamily="34" charset="-120"/>
+              </a:rPr>
+              <a:t> Make two sketches showing two different layout options. Tomorrow's critique will help you choose. Mark each clearly as "Option A" and "Option B."</a:t>
+            </a:r>
+            <a:endParaRPr lang="en-US" sz="1200" dirty="0"/>
+          </a:p>
+          <a:p>
+            <a:pPr algn="l" marL="342900" indent="-342900">
+              <a:lnSpc>
+                <a:spcPts val="1620"/>
+              </a:lnSpc>
+              <a:spcAft>
+                <a:spcPts val="300"/>
+              </a:spcAft>
+              <a:buSzPct val="100000"/>
+              <a:buChar char="•"/>
+            </a:pPr>
+            <a:r>
+              <a:rPr lang="en-US" sz="1200" b="1" dirty="0">
+                <a:solidFill>
+                  <a:srgbClr val="1C2833"/>
+                </a:solidFill>
+                <a:latin typeface="Arial" pitchFamily="34" charset="0"/>
+                <a:ea typeface="Arial" pitchFamily="34" charset="-122"/>
+                <a:cs typeface="Arial" pitchFamily="34" charset="-120"/>
+              </a:rPr>
+              <a:t>One tier down:</a:t>
+            </a:r>
+            <a:pPr algn="l" indent="0" marL="0">
+              <a:lnSpc>
+                <a:spcPts val="1620"/>
+              </a:lnSpc>
+              <a:spcAft>
+                <a:spcPts val="300"/>
+              </a:spcAft>
+              <a:buNone/>
+            </a:pPr>
+            <a:r>
+              <a:rPr lang="en-US" sz="1200" dirty="0">
+                <a:solidFill>
+                  <a:srgbClr val="1C2833"/>
+                </a:solidFill>
+                <a:latin typeface="Arial" pitchFamily="34" charset="0"/>
+                <a:ea typeface="Arial" pitchFamily="34" charset="-122"/>
+                <a:cs typeface="Arial" pitchFamily="34" charset="-120"/>
+              </a:rPr>
+              <a:t> If the sketch feels overwhelming, sketch </a:t>
+            </a:r>
+            <a:pPr algn="l" indent="0" marL="0">
+              <a:lnSpc>
+                <a:spcPts val="1620"/>
+              </a:lnSpc>
+              <a:spcAft>
+                <a:spcPts val="300"/>
+              </a:spcAft>
+              <a:buNone/>
+            </a:pPr>
+            <a:r>
+              <a:rPr lang="en-US" sz="1200" i="1" dirty="0">
+                <a:solidFill>
+                  <a:srgbClr val="1C2833"/>
+                </a:solidFill>
+                <a:latin typeface="Arial" pitchFamily="34" charset="0"/>
+                <a:ea typeface="Arial" pitchFamily="34" charset="-122"/>
+                <a:cs typeface="Arial" pitchFamily="34" charset="-120"/>
+              </a:rPr>
+              <a:t>just one part</a:t>
+            </a:r>
+            <a:pPr algn="l" indent="0" marL="0">
+              <a:lnSpc>
+                <a:spcPts val="1620"/>
+              </a:lnSpc>
+              <a:spcAft>
+                <a:spcPts val="300"/>
+              </a:spcAft>
+              <a:buNone/>
+            </a:pPr>
+            <a:r>
+              <a:rPr lang="en-US" sz="1200" dirty="0">
+                <a:solidFill>
+                  <a:srgbClr val="1C2833"/>
+                </a:solidFill>
+                <a:latin typeface="Arial" pitchFamily="34" charset="0"/>
+                <a:ea typeface="Arial" pitchFamily="34" charset="-122"/>
+                <a:cs typeface="Arial" pitchFamily="34" charset="-120"/>
+              </a:rPr>
+              <a:t> — e.g. just one card of your herb deck, just one week of your calendar. The rest can follow the same template.</a:t>
+            </a:r>
+            <a:endParaRPr lang="en-US" sz="1200" dirty="0"/>
+          </a:p>
+        </p:txBody>
+      </p:sp>
+      <p:sp>
+        <p:nvSpPr>
+          <p:cNvPr id="5" name="Text 3"/>
+          <p:cNvSpPr/>
+          <p:nvPr/>
+        </p:nvSpPr>
+        <p:spPr>
+          <a:xfrm>
+            <a:off x="406301" y="4434929"/>
+            <a:ext cx="8498026" cy="213271"/>
+          </a:xfrm>
+          <a:prstGeom prst="rect">
+            <a:avLst/>
+          </a:prstGeom>
+          <a:noFill/>
+          <a:ln/>
+        </p:spPr>
+        <p:txBody>
+          <a:bodyPr wrap="square" lIns="0" tIns="0" rIns="0" bIns="0" rtlCol="0" anchor="t"/>
+          <a:lstStyle/>
+          <a:p>
+            <a:pPr algn="l" indent="0" marL="0">
+              <a:lnSpc>
+                <a:spcPts val="1680"/>
+              </a:lnSpc>
+              <a:spcBef>
+                <a:spcPts val="300"/>
+              </a:spcBef>
+              <a:spcAft>
+                <a:spcPts val="300"/>
+              </a:spcAft>
+              <a:buNone/>
+            </a:pPr>
+            <a:r>
+              <a:rPr lang="en-US" sz="1200" dirty="0">
+                <a:solidFill>
+                  <a:srgbClr val="1C2833"/>
+                </a:solidFill>
+                <a:latin typeface="Arial" pitchFamily="34" charset="0"/>
+                <a:ea typeface="Arial" pitchFamily="34" charset="-122"/>
+                <a:cs typeface="Arial" pitchFamily="34" charset="-120"/>
+              </a:rPr>
+              <a:t>Middle ·  · IKS Curriculum</a:t>
+            </a:r>
+            <a:endParaRPr lang="en-US" sz="1200" dirty="0"/>
+          </a:p>
+        </p:txBody>
+      </p:sp>
+    </p:spTree>
+  </p:cSld>
+  <p:clrMapOvr>
+    <a:masterClrMapping/>
+  </p:clrMapOvr>
+</p:sld>
+</file>
+
+<file path=ppt/slides/slide16.xml><?xml version="1.0" encoding="utf-8"?>
+<p:sld xmlns:a="http://schemas.openxmlformats.org/drawingml/2006/main" xmlns:r="http://schemas.openxmlformats.org/officeDocument/2006/relationships" xmlns:p="http://schemas.openxmlformats.org/presentationml/2006/main">
+  <p:cSld name="Slide 16">
+    <p:bg>
+      <p:bgPr>
+        <a:solidFill>
+          <a:srgbClr val="FFFFFF"/>
+        </a:solidFill>
+      </p:bgPr>
+    </p:bg>
+    <p:spTree>
+      <p:nvGrpSpPr>
+        <p:cNvPr id="1" name=""/>
+        <p:cNvGrpSpPr/>
+        <p:nvPr/>
+      </p:nvGrpSpPr>
+      <p:grpSpPr>
+        <a:xfrm>
+          <a:off x="0" y="0"/>
+          <a:ext cx="0" cy="0"/>
+          <a:chOff x="0" y="0"/>
+          <a:chExt cx="0" cy="0"/>
+        </a:xfrm>
+      </p:grpSpPr>
+      <p:sp>
+        <p:nvSpPr>
+          <p:cNvPr id="2" name="Text 0"/>
+          <p:cNvSpPr/>
+          <p:nvPr/>
+        </p:nvSpPr>
+        <p:spPr>
+          <a:xfrm>
+            <a:off x="0" y="0"/>
+            <a:ext cx="9144000" cy="101501"/>
+          </a:xfrm>
+          <a:prstGeom prst="rect">
+            <a:avLst/>
+          </a:prstGeom>
+          <a:solidFill>
+            <a:srgbClr val="277884"/>
+          </a:solidFill>
+          <a:ln/>
+        </p:spPr>
+        <p:txBody>
+          <a:bodyPr wrap="square" rtlCol="0" anchor="ctr"/>
+          <a:lstStyle/>
+          <a:p>
+            <a:pPr indent="0" marL="0">
+              <a:buNone/>
+            </a:pPr>
+            <a:endParaRPr lang="en-US" dirty="0"/>
+          </a:p>
+        </p:txBody>
+      </p:sp>
+      <p:sp>
+        <p:nvSpPr>
+          <p:cNvPr id="3" name="Text 1"/>
+          <p:cNvSpPr/>
+          <p:nvPr/>
+        </p:nvSpPr>
+        <p:spPr>
+          <a:xfrm>
+            <a:off x="406301" y="457051"/>
+            <a:ext cx="8498026" cy="274290"/>
+          </a:xfrm>
+          <a:prstGeom prst="rect">
+            <a:avLst/>
+          </a:prstGeom>
+          <a:noFill/>
+          <a:ln/>
+        </p:spPr>
+        <p:txBody>
+          <a:bodyPr wrap="square" lIns="0" tIns="0" rIns="0" bIns="0" rtlCol="0" anchor="t"/>
+          <a:lstStyle/>
+          <a:p>
+            <a:pPr algn="l" indent="0" marL="0">
+              <a:lnSpc>
+                <a:spcPts val="2160"/>
+              </a:lnSpc>
+              <a:spcBef>
+                <a:spcPts val="600"/>
+              </a:spcBef>
+              <a:spcAft>
+                <a:spcPts val="800"/>
+              </a:spcAft>
+              <a:buNone/>
+            </a:pPr>
+            <a:r>
+              <a:rPr lang="en-US" sz="1800" b="1" dirty="0">
+                <a:solidFill>
+                  <a:srgbClr val="FE4447"/>
+                </a:solidFill>
+                <a:latin typeface="Georgia" pitchFamily="34" charset="0"/>
+                <a:ea typeface="Georgia" pitchFamily="34" charset="-122"/>
+                <a:cs typeface="Georgia" pitchFamily="34" charset="-120"/>
+              </a:rPr>
+              <a:t>Teacher notes</a:t>
+            </a:r>
+            <a:endParaRPr lang="en-US" sz="1800" dirty="0"/>
+          </a:p>
+        </p:txBody>
+      </p:sp>
+      <p:sp>
+        <p:nvSpPr>
+          <p:cNvPr id="4" name="Text 2"/>
+          <p:cNvSpPr/>
+          <p:nvPr/>
+        </p:nvSpPr>
+        <p:spPr>
+          <a:xfrm>
+            <a:off x="634901" y="883593"/>
+            <a:ext cx="8102798" cy="1630263"/>
+          </a:xfrm>
+          <a:prstGeom prst="rect">
+            <a:avLst/>
+          </a:prstGeom>
+          <a:noFill/>
+          <a:ln/>
+        </p:spPr>
+        <p:txBody>
+          <a:bodyPr wrap="square" lIns="0" tIns="0" rIns="0" bIns="0" rtlCol="0" anchor="t"/>
+          <a:lstStyle/>
+          <a:p>
+            <a:pPr algn="l" marL="342900" indent="-342900">
+              <a:lnSpc>
+                <a:spcPts val="1620"/>
+              </a:lnSpc>
+              <a:spcAft>
+                <a:spcPts val="300"/>
+              </a:spcAft>
+              <a:buSzPct val="100000"/>
+              <a:buChar char="•"/>
+            </a:pPr>
+            <a:r>
+              <a:rPr lang="en-US" sz="1200" dirty="0">
+                <a:solidFill>
+                  <a:srgbClr val="1C2833"/>
+                </a:solidFill>
+                <a:latin typeface="Arial" pitchFamily="34" charset="0"/>
+                <a:ea typeface="Arial" pitchFamily="34" charset="-122"/>
+                <a:cs typeface="Arial" pitchFamily="34" charset="-120"/>
+              </a:rPr>
+              <a:t>Journal check at end of class. Two ticks = on track. One tick = check in tomorrow. No tick = sit with that student for 5 minutes.</a:t>
+            </a:r>
+            <a:endParaRPr lang="en-US" sz="1200" dirty="0"/>
+          </a:p>
+          <a:p>
+            <a:pPr algn="l" marL="342900" indent="-342900">
+              <a:lnSpc>
+                <a:spcPts val="1620"/>
+              </a:lnSpc>
+              <a:spcAft>
+                <a:spcPts val="300"/>
+              </a:spcAft>
+              <a:buSzPct val="100000"/>
+              <a:buChar char="•"/>
+            </a:pPr>
+            <a:r>
+              <a:rPr lang="en-US" sz="1200" dirty="0">
+                <a:solidFill>
+                  <a:srgbClr val="1C2833"/>
+                </a:solidFill>
+                <a:latin typeface="Arial" pitchFamily="34" charset="0"/>
+                <a:ea typeface="Arial" pitchFamily="34" charset="-122"/>
+                <a:cs typeface="Arial" pitchFamily="34" charset="-120"/>
+              </a:rPr>
+              <a:t>Watch for students sketching what they think looks "impressive" rather than what's achievable. A simpler sketch they can actually finish is better than an ambitious one they can't.</a:t>
+            </a:r>
+            <a:endParaRPr lang="en-US" sz="1200" dirty="0"/>
+          </a:p>
+          <a:p>
+            <a:pPr algn="l" marL="342900" indent="-342900">
+              <a:lnSpc>
+                <a:spcPts val="1620"/>
+              </a:lnSpc>
+              <a:spcAft>
+                <a:spcPts val="300"/>
+              </a:spcAft>
+              <a:buSzPct val="100000"/>
+              <a:buChar char="•"/>
+            </a:pPr>
+            <a:r>
+              <a:rPr lang="en-US" sz="1200" dirty="0">
+                <a:solidFill>
+                  <a:srgbClr val="1C2833"/>
+                </a:solidFill>
+                <a:latin typeface="Arial" pitchFamily="34" charset="0"/>
+                <a:ea typeface="Arial" pitchFamily="34" charset="-122"/>
+                <a:cs typeface="Arial" pitchFamily="34" charset="-120"/>
+              </a:rPr>
+              <a:t>The Project 9 (multiplication comparison) students may have nothing visible to sketch yet. Their "sketch" is the data-collection sheet design and the chosen problem set. That's fine — annotate it the same way.</a:t>
+            </a:r>
+            <a:endParaRPr lang="en-US" sz="1200" dirty="0"/>
+          </a:p>
+          <a:p>
+            <a:pPr algn="l" marL="342900" indent="-342900">
+              <a:lnSpc>
+                <a:spcPts val="1620"/>
+              </a:lnSpc>
+              <a:spcAft>
+                <a:spcPts val="300"/>
+              </a:spcAft>
+              <a:buSzPct val="100000"/>
+              <a:buChar char="•"/>
+            </a:pPr>
+            <a:r>
+              <a:rPr lang="en-US" sz="1200" dirty="0">
+                <a:solidFill>
+                  <a:srgbClr val="1C2833"/>
+                </a:solidFill>
+                <a:latin typeface="Arial" pitchFamily="34" charset="0"/>
+                <a:ea typeface="Arial" pitchFamily="34" charset="-122"/>
+                <a:cs typeface="Arial" pitchFamily="34" charset="-120"/>
+              </a:rPr>
+              <a:t>Project 7 (sustainability) students must have nailed </a:t>
+            </a:r>
+            <a:pPr algn="l" indent="0" marL="0">
+              <a:lnSpc>
+                <a:spcPts val="1620"/>
+              </a:lnSpc>
+              <a:spcAft>
+                <a:spcPts val="300"/>
+              </a:spcAft>
+              <a:buNone/>
+            </a:pPr>
+            <a:r>
+              <a:rPr lang="en-US" sz="1200" i="1" dirty="0">
+                <a:solidFill>
+                  <a:srgbClr val="1C2833"/>
+                </a:solidFill>
+                <a:latin typeface="Arial" pitchFamily="34" charset="0"/>
+                <a:ea typeface="Arial" pitchFamily="34" charset="-122"/>
+                <a:cs typeface="Arial" pitchFamily="34" charset="-120"/>
+              </a:rPr>
+              <a:t>which station</a:t>
+            </a:r>
+            <a:pPr algn="l" indent="0" marL="0">
+              <a:lnSpc>
+                <a:spcPts val="1620"/>
+              </a:lnSpc>
+              <a:spcAft>
+                <a:spcPts val="300"/>
+              </a:spcAft>
+              <a:buNone/>
+            </a:pPr>
+            <a:r>
+              <a:rPr lang="en-US" sz="1200" dirty="0">
+                <a:solidFill>
+                  <a:srgbClr val="1C2833"/>
+                </a:solidFill>
+                <a:latin typeface="Arial" pitchFamily="34" charset="0"/>
+                <a:ea typeface="Arial" pitchFamily="34" charset="-122"/>
+                <a:cs typeface="Arial" pitchFamily="34" charset="-120"/>
+              </a:rPr>
+              <a:t> they'll audit by end of today. Walk over and verify.</a:t>
+            </a:r>
+            <a:endParaRPr lang="en-US" sz="1200" dirty="0"/>
+          </a:p>
+        </p:txBody>
+      </p:sp>
+      <p:sp>
+        <p:nvSpPr>
+          <p:cNvPr id="5" name="Text 3"/>
+          <p:cNvSpPr/>
+          <p:nvPr/>
+        </p:nvSpPr>
+        <p:spPr>
+          <a:xfrm>
+            <a:off x="406301" y="4434929"/>
+            <a:ext cx="8498026" cy="213271"/>
+          </a:xfrm>
+          <a:prstGeom prst="rect">
+            <a:avLst/>
+          </a:prstGeom>
+          <a:noFill/>
+          <a:ln/>
+        </p:spPr>
+        <p:txBody>
+          <a:bodyPr wrap="square" lIns="0" tIns="0" rIns="0" bIns="0" rtlCol="0" anchor="t"/>
+          <a:lstStyle/>
+          <a:p>
+            <a:pPr algn="l" indent="0" marL="0">
+              <a:lnSpc>
+                <a:spcPts val="1680"/>
+              </a:lnSpc>
+              <a:spcBef>
+                <a:spcPts val="300"/>
+              </a:spcBef>
+              <a:spcAft>
+                <a:spcPts val="300"/>
+              </a:spcAft>
+              <a:buNone/>
+            </a:pPr>
+            <a:r>
+              <a:rPr lang="en-US" sz="1200" dirty="0">
+                <a:solidFill>
+                  <a:srgbClr val="1C2833"/>
+                </a:solidFill>
+                <a:latin typeface="Arial" pitchFamily="34" charset="0"/>
+                <a:ea typeface="Arial" pitchFamily="34" charset="-122"/>
+                <a:cs typeface="Arial" pitchFamily="34" charset="-120"/>
+              </a:rPr>
+              <a:t>Middle ·  · IKS Curriculum</a:t>
+            </a:r>
+            <a:endParaRPr lang="en-US" sz="1200" dirty="0"/>
+          </a:p>
+        </p:txBody>
+      </p:sp>
+    </p:spTree>
+  </p:cSld>
+  <p:clrMapOvr>
+    <a:masterClrMapping/>
+  </p:clrMapOvr>
+</p:sld>
+</file>
+
+<file path=ppt/slides/slide17.xml><?xml version="1.0" encoding="utf-8"?>
+<p:sld xmlns:a="http://schemas.openxmlformats.org/drawingml/2006/main" xmlns:r="http://schemas.openxmlformats.org/officeDocument/2006/relationships" xmlns:p="http://schemas.openxmlformats.org/presentationml/2006/main">
+  <p:cSld name="Slide 17">
+    <p:bg>
+      <p:bgPr>
+        <a:solidFill>
+          <a:srgbClr val="FFFFFF"/>
+        </a:solidFill>
+      </p:bgPr>
+    </p:bg>
+    <p:spTree>
+      <p:nvGrpSpPr>
+        <p:cNvPr id="1" name=""/>
+        <p:cNvGrpSpPr/>
+        <p:nvPr/>
+      </p:nvGrpSpPr>
+      <p:grpSpPr>
+        <a:xfrm>
+          <a:off x="0" y="0"/>
+          <a:ext cx="0" cy="0"/>
+          <a:chOff x="0" y="0"/>
+          <a:chExt cx="0" cy="0"/>
+        </a:xfrm>
+      </p:grpSpPr>
+      <p:sp>
+        <p:nvSpPr>
+          <p:cNvPr id="2" name="Text 0"/>
+          <p:cNvSpPr/>
+          <p:nvPr/>
+        </p:nvSpPr>
+        <p:spPr>
+          <a:xfrm>
+            <a:off x="0" y="0"/>
+            <a:ext cx="9144000" cy="101501"/>
+          </a:xfrm>
+          <a:prstGeom prst="rect">
+            <a:avLst/>
+          </a:prstGeom>
+          <a:solidFill>
+            <a:srgbClr val="277884"/>
+          </a:solidFill>
+          <a:ln/>
+        </p:spPr>
+        <p:txBody>
+          <a:bodyPr wrap="square" rtlCol="0" anchor="ctr"/>
+          <a:lstStyle/>
+          <a:p>
+            <a:pPr indent="0" marL="0">
+              <a:buNone/>
+            </a:pPr>
+            <a:endParaRPr lang="en-US" dirty="0"/>
+          </a:p>
+        </p:txBody>
+      </p:sp>
+      <p:sp>
+        <p:nvSpPr>
+          <p:cNvPr id="3" name="Text 1"/>
+          <p:cNvSpPr/>
+          <p:nvPr/>
+        </p:nvSpPr>
+        <p:spPr>
+          <a:xfrm>
+            <a:off x="406301" y="457051"/>
+            <a:ext cx="8498026" cy="274290"/>
+          </a:xfrm>
+          <a:prstGeom prst="rect">
+            <a:avLst/>
+          </a:prstGeom>
+          <a:noFill/>
+          <a:ln/>
+        </p:spPr>
+        <p:txBody>
+          <a:bodyPr wrap="square" lIns="0" tIns="0" rIns="0" bIns="0" rtlCol="0" anchor="t"/>
+          <a:lstStyle/>
+          <a:p>
+            <a:pPr algn="l" indent="0" marL="0">
+              <a:lnSpc>
+                <a:spcPts val="2160"/>
+              </a:lnSpc>
+              <a:spcBef>
+                <a:spcPts val="600"/>
+              </a:spcBef>
+              <a:spcAft>
+                <a:spcPts val="800"/>
+              </a:spcAft>
+              <a:buNone/>
+            </a:pPr>
+            <a:r>
+              <a:rPr lang="en-US" sz="1800" b="1" dirty="0">
+                <a:solidFill>
+                  <a:srgbClr val="FE4447"/>
+                </a:solidFill>
+                <a:latin typeface="Georgia" pitchFamily="34" charset="0"/>
+                <a:ea typeface="Georgia" pitchFamily="34" charset="-122"/>
+                <a:cs typeface="Georgia" pitchFamily="34" charset="-120"/>
+              </a:rPr>
+              <a:t>Citation(s) used in this lesson</a:t>
+            </a:r>
+            <a:endParaRPr lang="en-US" sz="1800" dirty="0"/>
+          </a:p>
+        </p:txBody>
+      </p:sp>
+      <p:sp>
+        <p:nvSpPr>
+          <p:cNvPr id="4" name="Text 2"/>
+          <p:cNvSpPr/>
+          <p:nvPr/>
+        </p:nvSpPr>
+        <p:spPr>
+          <a:xfrm>
+            <a:off x="634901" y="883593"/>
+            <a:ext cx="8102798" cy="281880"/>
+          </a:xfrm>
+          <a:prstGeom prst="rect">
+            <a:avLst/>
+          </a:prstGeom>
+          <a:noFill/>
+          <a:ln/>
+        </p:spPr>
+        <p:txBody>
+          <a:bodyPr wrap="square" lIns="0" tIns="0" rIns="0" bIns="0" rtlCol="0" anchor="t"/>
+          <a:lstStyle/>
+          <a:p>
+            <a:pPr algn="l" marL="342900" indent="-342900">
+              <a:lnSpc>
+                <a:spcPts val="1620"/>
+              </a:lnSpc>
+              <a:spcAft>
+                <a:spcPts val="300"/>
+              </a:spcAft>
+              <a:buSzPct val="100000"/>
+              <a:buChar char="•"/>
+            </a:pPr>
+            <a:r>
+              <a:rPr lang="en-US" sz="1200" dirty="0">
+                <a:solidFill>
+                  <a:srgbClr val="1C2833"/>
+                </a:solidFill>
+                <a:latin typeface="Arial" pitchFamily="34" charset="0"/>
+                <a:ea typeface="Arial" pitchFamily="34" charset="-122"/>
+                <a:cs typeface="Arial" pitchFamily="34" charset="-120"/>
+              </a:rPr>
+              <a:t>No new scripture citation needed today.</a:t>
             </a:r>
             <a:endParaRPr lang="en-US" sz="1200" dirty="0"/>
           </a:p>
@@ -3106,7 +5506,7 @@
                 <a:ea typeface="Georgia" pitchFamily="34" charset="-122"/>
                 <a:cs typeface="Georgia" pitchFamily="34" charset="-120"/>
               </a:rPr>
-              <a:t>Materials</a:t>
+              <a:t>Learning objective</a:t>
             </a:r>
             <a:endParaRPr lang="en-US" sz="1800" dirty="0"/>
           </a:p>
@@ -3121,7 +5521,7 @@
         <p:spPr>
           <a:xfrm>
             <a:off x="406301" y="870942"/>
-            <a:ext cx="8498026" cy="436066"/>
+            <a:ext cx="8498026" cy="426541"/>
           </a:xfrm>
           <a:prstGeom prst="rect">
             <a:avLst/>
@@ -3154,99 +5554,7 @@
                 <a:ea typeface="Arial" pitchFamily="34" charset="-122"/>
                 <a:cs typeface="Arial" pitchFamily="34" charset="-120"/>
               </a:rPr>
-              <a:t>– Anchor module's </a:t>
-            </a:r>
-            <a:pPr algn="l" indent="0" marL="0">
-              <a:lnSpc>
-                <a:spcPts val="1680"/>
-              </a:lnSpc>
-              <a:spcBef>
-                <a:spcPts val="300"/>
-              </a:spcBef>
-              <a:spcAft>
-                <a:spcPts val="300"/>
-              </a:spcAft>
-              <a:buNone/>
-            </a:pPr>
-            <a:r>
-              <a:rPr lang="en-US" sz="1200" dirty="0">
-                <a:solidFill>
-                  <a:srgbClr val="1C2833"/>
-                </a:solidFill>
-                <a:latin typeface="Arial" pitchFamily="34" charset="0"/>
-                <a:ea typeface="Arial" pitchFamily="34" charset="-122"/>
-                <a:cs typeface="Arial" pitchFamily="34" charset="-120"/>
-              </a:rPr>
-              <a:t>sources.md</a:t>
-            </a:r>
-            <a:pPr algn="l" indent="0" marL="0">
-              <a:lnSpc>
-                <a:spcPts val="1680"/>
-              </a:lnSpc>
-              <a:spcBef>
-                <a:spcPts val="300"/>
-              </a:spcBef>
-              <a:spcAft>
-                <a:spcPts val="300"/>
-              </a:spcAft>
-              <a:buNone/>
-            </a:pPr>
-            <a:r>
-              <a:rPr lang="en-US" sz="1200" dirty="0">
-                <a:solidFill>
-                  <a:srgbClr val="1C2833"/>
-                </a:solidFill>
-                <a:latin typeface="Arial" pitchFamily="34" charset="0"/>
-                <a:ea typeface="Arial" pitchFamily="34" charset="-122"/>
-                <a:cs typeface="Arial" pitchFamily="34" charset="-120"/>
-              </a:rPr>
-              <a:t> and </a:t>
-            </a:r>
-            <a:pPr algn="l" indent="0" marL="0">
-              <a:lnSpc>
-                <a:spcPts val="1680"/>
-              </a:lnSpc>
-              <a:spcBef>
-                <a:spcPts val="300"/>
-              </a:spcBef>
-              <a:spcAft>
-                <a:spcPts val="300"/>
-              </a:spcAft>
-              <a:buNone/>
-            </a:pPr>
-            <a:r>
-              <a:rPr lang="en-US" sz="1200" dirty="0">
-                <a:solidFill>
-                  <a:srgbClr val="1C2833"/>
-                </a:solidFill>
-                <a:latin typeface="Arial" pitchFamily="34" charset="0"/>
-                <a:ea typeface="Arial" pitchFamily="34" charset="-122"/>
-                <a:cs typeface="Arial" pitchFamily="34" charset="-120"/>
-              </a:rPr>
-              <a:t>.rag-cache/</a:t>
-            </a:r>
-            <a:pPr algn="l" indent="0" marL="0">
-              <a:lnSpc>
-                <a:spcPts val="1680"/>
-              </a:lnSpc>
-              <a:spcBef>
-                <a:spcPts val="300"/>
-              </a:spcBef>
-              <a:spcAft>
-                <a:spcPts val="300"/>
-              </a:spcAft>
-              <a:buNone/>
-            </a:pPr>
-            <a:r>
-              <a:rPr lang="en-US" sz="1200" dirty="0">
-                <a:solidFill>
-                  <a:srgbClr val="1C2833"/>
-                </a:solidFill>
-                <a:latin typeface="Arial" pitchFamily="34" charset="0"/>
-                <a:ea typeface="Arial" pitchFamily="34" charset="-122"/>
-                <a:cs typeface="Arial" pitchFamily="34" charset="-120"/>
-              </a:rPr>
-              <a:t> (continue from Day 3) – Notebook / project journal – Plain paper or sketchbook (A4 minimum) – Pencils, erasers, ruler, compass (for geometric projects)</a:t>
+              <a:t>By the end of this lesson, students will have at least three citation slips on file (two minimum from Day 3 + at least one new today) and will have produced a first design sketch of the final artefact.</a:t>
             </a:r>
             <a:endParaRPr lang="en-US" sz="1200" dirty="0"/>
           </a:p>
@@ -3404,7 +5712,7 @@
                 <a:ea typeface="Georgia" pitchFamily="34" charset="-122"/>
                 <a:cs typeface="Georgia" pitchFamily="34" charset="-120"/>
               </a:rPr>
-              <a:t>Lesson flow</a:t>
+              <a:t>Materials</a:t>
             </a:r>
             <a:endParaRPr lang="en-US" sz="1800" dirty="0"/>
           </a:p>
@@ -3413,6 +5721,204 @@
       <p:sp>
         <p:nvSpPr>
           <p:cNvPr id="4" name="Text 2"/>
+          <p:cNvSpPr/>
+          <p:nvPr/>
+        </p:nvSpPr>
+        <p:spPr>
+          <a:xfrm>
+            <a:off x="634901" y="883593"/>
+            <a:ext cx="8102798" cy="1032272"/>
+          </a:xfrm>
+          <a:prstGeom prst="rect">
+            <a:avLst/>
+          </a:prstGeom>
+          <a:noFill/>
+          <a:ln/>
+        </p:spPr>
+        <p:txBody>
+          <a:bodyPr wrap="square" lIns="0" tIns="0" rIns="0" bIns="0" rtlCol="0" anchor="t"/>
+          <a:lstStyle/>
+          <a:p>
+            <a:pPr algn="l" marL="342900" indent="-342900">
+              <a:lnSpc>
+                <a:spcPts val="1620"/>
+              </a:lnSpc>
+              <a:spcAft>
+                <a:spcPts val="300"/>
+              </a:spcAft>
+              <a:buSzPct val="100000"/>
+              <a:buChar char="•"/>
+            </a:pPr>
+            <a:r>
+              <a:rPr lang="en-US" sz="1200" dirty="0">
+                <a:solidFill>
+                  <a:srgbClr val="1C2833"/>
+                </a:solidFill>
+                <a:latin typeface="Arial" pitchFamily="34" charset="0"/>
+                <a:ea typeface="Arial" pitchFamily="34" charset="-122"/>
+                <a:cs typeface="Arial" pitchFamily="34" charset="-120"/>
+              </a:rPr>
+              <a:t>Anchor module's </a:t>
+            </a:r>
+            <a:pPr algn="l" indent="0" marL="0">
+              <a:lnSpc>
+                <a:spcPts val="1620"/>
+              </a:lnSpc>
+              <a:spcAft>
+                <a:spcPts val="300"/>
+              </a:spcAft>
+              <a:buNone/>
+            </a:pPr>
+            <a:r>
+              <a:rPr lang="en-US" sz="1200" dirty="0">
+                <a:solidFill>
+                  <a:srgbClr val="1C2833"/>
+                </a:solidFill>
+                <a:latin typeface="Arial" pitchFamily="34" charset="0"/>
+                <a:ea typeface="Arial" pitchFamily="34" charset="-122"/>
+                <a:cs typeface="Arial" pitchFamily="34" charset="-120"/>
+              </a:rPr>
+              <a:t>sources.md</a:t>
+            </a:r>
+            <a:pPr algn="l" indent="0" marL="0">
+              <a:lnSpc>
+                <a:spcPts val="1620"/>
+              </a:lnSpc>
+              <a:spcAft>
+                <a:spcPts val="300"/>
+              </a:spcAft>
+              <a:buNone/>
+            </a:pPr>
+            <a:r>
+              <a:rPr lang="en-US" sz="1200" dirty="0">
+                <a:solidFill>
+                  <a:srgbClr val="1C2833"/>
+                </a:solidFill>
+                <a:latin typeface="Arial" pitchFamily="34" charset="0"/>
+                <a:ea typeface="Arial" pitchFamily="34" charset="-122"/>
+                <a:cs typeface="Arial" pitchFamily="34" charset="-120"/>
+              </a:rPr>
+              <a:t> and </a:t>
+            </a:r>
+            <a:pPr algn="l" indent="0" marL="0">
+              <a:lnSpc>
+                <a:spcPts val="1620"/>
+              </a:lnSpc>
+              <a:spcAft>
+                <a:spcPts val="300"/>
+              </a:spcAft>
+              <a:buNone/>
+            </a:pPr>
+            <a:r>
+              <a:rPr lang="en-US" sz="1200" dirty="0">
+                <a:solidFill>
+                  <a:srgbClr val="1C2833"/>
+                </a:solidFill>
+                <a:latin typeface="Arial" pitchFamily="34" charset="0"/>
+                <a:ea typeface="Arial" pitchFamily="34" charset="-122"/>
+                <a:cs typeface="Arial" pitchFamily="34" charset="-120"/>
+              </a:rPr>
+              <a:t>.rag-cache/</a:t>
+            </a:r>
+            <a:pPr algn="l" indent="0" marL="0">
+              <a:lnSpc>
+                <a:spcPts val="1620"/>
+              </a:lnSpc>
+              <a:spcAft>
+                <a:spcPts val="300"/>
+              </a:spcAft>
+              <a:buNone/>
+            </a:pPr>
+            <a:r>
+              <a:rPr lang="en-US" sz="1200" dirty="0">
+                <a:solidFill>
+                  <a:srgbClr val="1C2833"/>
+                </a:solidFill>
+                <a:latin typeface="Arial" pitchFamily="34" charset="0"/>
+                <a:ea typeface="Arial" pitchFamily="34" charset="-122"/>
+                <a:cs typeface="Arial" pitchFamily="34" charset="-120"/>
+              </a:rPr>
+              <a:t> (continue from Day 3)</a:t>
+            </a:r>
+            <a:endParaRPr lang="en-US" sz="1200" dirty="0"/>
+          </a:p>
+          <a:p>
+            <a:pPr algn="l" marL="342900" indent="-342900">
+              <a:lnSpc>
+                <a:spcPts val="1620"/>
+              </a:lnSpc>
+              <a:spcAft>
+                <a:spcPts val="300"/>
+              </a:spcAft>
+              <a:buSzPct val="100000"/>
+              <a:buChar char="•"/>
+            </a:pPr>
+            <a:r>
+              <a:rPr lang="en-US" sz="1200" dirty="0">
+                <a:solidFill>
+                  <a:srgbClr val="1C2833"/>
+                </a:solidFill>
+                <a:latin typeface="Arial" pitchFamily="34" charset="0"/>
+                <a:ea typeface="Arial" pitchFamily="34" charset="-122"/>
+                <a:cs typeface="Arial" pitchFamily="34" charset="-120"/>
+              </a:rPr>
+              <a:t>Notebook / project journal</a:t>
+            </a:r>
+            <a:endParaRPr lang="en-US" sz="1200" dirty="0"/>
+          </a:p>
+          <a:p>
+            <a:pPr algn="l" marL="342900" indent="-342900">
+              <a:lnSpc>
+                <a:spcPts val="1620"/>
+              </a:lnSpc>
+              <a:spcAft>
+                <a:spcPts val="300"/>
+              </a:spcAft>
+              <a:buSzPct val="100000"/>
+              <a:buChar char="•"/>
+            </a:pPr>
+            <a:r>
+              <a:rPr lang="en-US" sz="1200" dirty="0">
+                <a:solidFill>
+                  <a:srgbClr val="1C2833"/>
+                </a:solidFill>
+                <a:latin typeface="Arial" pitchFamily="34" charset="0"/>
+                <a:ea typeface="Arial" pitchFamily="34" charset="-122"/>
+                <a:cs typeface="Arial" pitchFamily="34" charset="-120"/>
+              </a:rPr>
+              <a:t>Plain paper or sketchbook (A4 minimum)</a:t>
+            </a:r>
+            <a:endParaRPr lang="en-US" sz="1200" dirty="0"/>
+          </a:p>
+          <a:p>
+            <a:pPr algn="l" marL="342900" indent="-342900">
+              <a:lnSpc>
+                <a:spcPts val="1620"/>
+              </a:lnSpc>
+              <a:spcAft>
+                <a:spcPts val="300"/>
+              </a:spcAft>
+              <a:buSzPct val="100000"/>
+              <a:buChar char="•"/>
+            </a:pPr>
+            <a:r>
+              <a:rPr lang="en-US" sz="1200" dirty="0">
+                <a:solidFill>
+                  <a:srgbClr val="1C2833"/>
+                </a:solidFill>
+                <a:latin typeface="Arial" pitchFamily="34" charset="0"/>
+                <a:ea typeface="Arial" pitchFamily="34" charset="-122"/>
+                <a:cs typeface="Arial" pitchFamily="34" charset="-120"/>
+              </a:rPr>
+              <a:t>Pencils, erasers, ruler, compass (for geometric projects)</a:t>
+            </a:r>
+            <a:endParaRPr lang="en-US" sz="1200" dirty="0"/>
+          </a:p>
+        </p:txBody>
+      </p:sp>
+      <p:sp>
+        <p:nvSpPr>
+          <p:cNvPr id="5" name="Text 3"/>
           <p:cNvSpPr/>
           <p:nvPr/>
         </p:nvSpPr>
@@ -3562,7 +6068,7 @@
                 <a:ea typeface="Georgia" pitchFamily="34" charset="-122"/>
                 <a:cs typeface="Georgia" pitchFamily="34" charset="-120"/>
               </a:rPr>
-              <a:t>Warm-up (5 min)</a:t>
+              <a:t>Lesson flow</a:t>
             </a:r>
             <a:endParaRPr lang="en-US" sz="1800" dirty="0"/>
           </a:p>
@@ -3571,100 +6077,6 @@
       <p:sp>
         <p:nvSpPr>
           <p:cNvPr id="4" name="Text 2"/>
-          <p:cNvSpPr/>
-          <p:nvPr/>
-        </p:nvSpPr>
-        <p:spPr>
-          <a:xfrm>
-            <a:off x="406301" y="870942"/>
-            <a:ext cx="8498026" cy="639812"/>
-          </a:xfrm>
-          <a:prstGeom prst="rect">
-            <a:avLst/>
-          </a:prstGeom>
-          <a:noFill/>
-          <a:ln/>
-        </p:spPr>
-        <p:txBody>
-          <a:bodyPr wrap="square" lIns="0" tIns="0" rIns="0" bIns="0" rtlCol="0" anchor="t"/>
-          <a:lstStyle/>
-          <a:p>
-            <a:pPr algn="l" indent="0" marL="0">
-              <a:lnSpc>
-                <a:spcPts val="1680"/>
-              </a:lnSpc>
-              <a:spcBef>
-                <a:spcPts val="300"/>
-              </a:spcBef>
-              <a:spcAft>
-                <a:spcPts val="300"/>
-              </a:spcAft>
-              <a:buNone/>
-            </a:pPr>
-            <a:r>
-              <a:rPr lang="en-US" sz="1200" dirty="0">
-                <a:solidFill>
-                  <a:srgbClr val="1C2833"/>
-                </a:solidFill>
-                <a:latin typeface="Arial" pitchFamily="34" charset="0"/>
-                <a:ea typeface="Arial" pitchFamily="34" charset="-122"/>
-                <a:cs typeface="Arial" pitchFamily="34" charset="-120"/>
-              </a:rPr>
-              <a:t>– Daily prompt: </a:t>
-            </a:r>
-            <a:pPr algn="l" indent="0" marL="0">
-              <a:lnSpc>
-                <a:spcPts val="1680"/>
-              </a:lnSpc>
-              <a:spcBef>
-                <a:spcPts val="300"/>
-              </a:spcBef>
-              <a:spcAft>
-                <a:spcPts val="300"/>
-              </a:spcAft>
-              <a:buNone/>
-            </a:pPr>
-            <a:r>
-              <a:rPr lang="en-US" sz="1200" i="1" dirty="0">
-                <a:solidFill>
-                  <a:srgbClr val="1C2833"/>
-                </a:solidFill>
-                <a:latin typeface="Arial" pitchFamily="34" charset="0"/>
-                <a:ea typeface="Arial" pitchFamily="34" charset="-122"/>
-                <a:cs typeface="Arial" pitchFamily="34" charset="-120"/>
-              </a:rPr>
-              <a:t>"Which source you found yesterday surprised you the most?"</a:t>
-            </a:r>
-            <a:pPr algn="l" indent="0" marL="0">
-              <a:lnSpc>
-                <a:spcPts val="1680"/>
-              </a:lnSpc>
-              <a:spcBef>
-                <a:spcPts val="300"/>
-              </a:spcBef>
-              <a:spcAft>
-                <a:spcPts val="300"/>
-              </a:spcAft>
-              <a:buNone/>
-            </a:pPr>
-            <a:r>
-              <a:rPr lang="en-US" sz="1200" dirty="0">
-                <a:solidFill>
-                  <a:srgbClr val="1C2833"/>
-                </a:solidFill>
-                <a:latin typeface="Arial" pitchFamily="34" charset="0"/>
-                <a:ea typeface="Arial" pitchFamily="34" charset="-122"/>
-                <a:cs typeface="Arial" pitchFamily="34" charset="-120"/>
-              </a:rPr>
-              <a:t> — 3 students share. – Teacher returns marked citation slips with one comment each. Address common patterns ("six of you cited X without a chunk reference — please add it").</a:t>
-            </a:r>
-            <a:endParaRPr lang="en-US" sz="1200" dirty="0"/>
-          </a:p>
-        </p:txBody>
-      </p:sp>
-      <p:sp>
-        <p:nvSpPr>
-          <p:cNvPr id="5" name="Text 3"/>
           <p:cNvSpPr/>
           <p:nvPr/>
         </p:nvSpPr>
@@ -3814,7 +6226,7 @@
                 <a:ea typeface="Georgia" pitchFamily="34" charset="-122"/>
                 <a:cs typeface="Georgia" pitchFamily="34" charset="-120"/>
               </a:rPr>
-              <a:t>Core (10 min)</a:t>
+              <a:t>Warm-up (5 min)</a:t>
             </a:r>
             <a:endParaRPr lang="en-US" sz="1800" dirty="0"/>
           </a:p>
@@ -3829,7 +6241,7 @@
         <p:spPr>
           <a:xfrm>
             <a:off x="634901" y="883593"/>
-            <a:ext cx="8102798" cy="487561"/>
+            <a:ext cx="8102798" cy="731341"/>
           </a:xfrm>
           <a:prstGeom prst="rect">
             <a:avLst/>
@@ -3852,15 +6264,15 @@
               <a:buChar char="•"/>
             </a:pPr>
             <a:r>
-              <a:rPr lang="en-US" sz="1200" b="1" dirty="0">
-                <a:solidFill>
-                  <a:srgbClr val="1C2833"/>
-                </a:solidFill>
-                <a:latin typeface="Arial" pitchFamily="34" charset="0"/>
-                <a:ea typeface="Arial" pitchFamily="34" charset="-122"/>
-                <a:cs typeface="Arial" pitchFamily="34" charset="-120"/>
-              </a:rPr>
-              <a:t>Round out the sources</a:t>
+              <a:rPr lang="en-US" sz="1200" dirty="0">
+                <a:solidFill>
+                  <a:srgbClr val="1C2833"/>
+                </a:solidFill>
+                <a:latin typeface="Arial" pitchFamily="34" charset="0"/>
+                <a:ea typeface="Arial" pitchFamily="34" charset="-122"/>
+                <a:cs typeface="Arial" pitchFamily="34" charset="-120"/>
+              </a:rPr>
+              <a:t>Daily prompt: </a:t>
             </a:r>
             <a:pPr algn="l" indent="0" marL="0">
               <a:lnSpc>
@@ -3872,6 +6284,26 @@
               <a:buNone/>
             </a:pPr>
             <a:r>
+              <a:rPr lang="en-US" sz="1200" i="1" dirty="0">
+                <a:solidFill>
+                  <a:srgbClr val="1C2833"/>
+                </a:solidFill>
+                <a:latin typeface="Arial" pitchFamily="34" charset="0"/>
+                <a:ea typeface="Arial" pitchFamily="34" charset="-122"/>
+                <a:cs typeface="Arial" pitchFamily="34" charset="-120"/>
+              </a:rPr>
+              <a:t>"Which source you found yesterday surprised you the most?"</a:t>
+            </a:r>
+            <a:pPr algn="l" indent="0" marL="0">
+              <a:lnSpc>
+                <a:spcPts val="1620"/>
+              </a:lnSpc>
+              <a:spcAft>
+                <a:spcPts val="300"/>
+              </a:spcAft>
+              <a:buNone/>
+            </a:pPr>
+            <a:r>
               <a:rPr lang="en-US" sz="1200" dirty="0">
                 <a:solidFill>
                   <a:srgbClr val="1C2833"/>
@@ -3880,7 +6312,31 @@
                 <a:ea typeface="Arial" pitchFamily="34" charset="-122"/>
                 <a:cs typeface="Arial" pitchFamily="34" charset="-120"/>
               </a:rPr>
-              <a:t> (3 min). If you have two, add one more today. If you have three, deepen one — read the surrounding chunks, not just the one verse.</a:t>
+              <a:t> — 3 students share.</a:t>
+            </a:r>
+            <a:endParaRPr lang="en-US" sz="1200" dirty="0"/>
+          </a:p>
+          <a:p>
+            <a:pPr algn="l" marL="342900" indent="-342900">
+              <a:lnSpc>
+                <a:spcPts val="1620"/>
+              </a:lnSpc>
+              <a:spcAft>
+                <a:spcPts val="300"/>
+              </a:spcAft>
+              <a:buSzPct val="100000"/>
+              <a:buChar char="•"/>
+            </a:pPr>
+            <a:r>
+              <a:rPr lang="en-US" sz="1200" dirty="0">
+                <a:solidFill>
+                  <a:srgbClr val="1C2833"/>
+                </a:solidFill>
+                <a:latin typeface="Arial" pitchFamily="34" charset="0"/>
+                <a:ea typeface="Arial" pitchFamily="34" charset="-122"/>
+                <a:cs typeface="Arial" pitchFamily="34" charset="-120"/>
+              </a:rPr>
+              <a:t>Teacher returns marked citation slips with one comment each. Address common patterns ("six of you cited X without a chunk reference — please add it").</a:t>
             </a:r>
             <a:endParaRPr lang="en-US" sz="1200" dirty="0"/>
           </a:p>
@@ -3894,791 +6350,7 @@
         </p:nvSpPr>
         <p:spPr>
           <a:xfrm>
-            <a:off x="634901" y="1472654"/>
-            <a:ext cx="8102798" cy="487561"/>
-          </a:xfrm>
-          <a:prstGeom prst="rect">
-            <a:avLst/>
-          </a:prstGeom>
-          <a:noFill/>
-          <a:ln/>
-        </p:spPr>
-        <p:txBody>
-          <a:bodyPr wrap="square" lIns="0" tIns="0" rIns="0" bIns="0" rtlCol="0" anchor="t"/>
-          <a:lstStyle/>
-          <a:p>
-            <a:pPr algn="l" marL="342900" indent="-342900">
-              <a:lnSpc>
-                <a:spcPts val="1620"/>
-              </a:lnSpc>
-              <a:spcAft>
-                <a:spcPts val="300"/>
-              </a:spcAft>
-              <a:buSzPct val="100000"/>
-              <a:buChar char="•"/>
-            </a:pPr>
-            <a:r>
-              <a:rPr lang="en-US" sz="1200" b="1" dirty="0">
-                <a:solidFill>
-                  <a:srgbClr val="1C2833"/>
-                </a:solidFill>
-                <a:latin typeface="Arial" pitchFamily="34" charset="0"/>
-                <a:ea typeface="Arial" pitchFamily="34" charset="-122"/>
-                <a:cs typeface="Arial" pitchFamily="34" charset="-120"/>
-              </a:rPr>
-              <a:t>What's a design sketch?</a:t>
-            </a:r>
-            <a:pPr algn="l" indent="0" marL="0">
-              <a:lnSpc>
-                <a:spcPts val="1620"/>
-              </a:lnSpc>
-              <a:spcAft>
-                <a:spcPts val="300"/>
-              </a:spcAft>
-              <a:buNone/>
-            </a:pPr>
-            <a:r>
-              <a:rPr lang="en-US" sz="1200" dirty="0">
-                <a:solidFill>
-                  <a:srgbClr val="1C2833"/>
-                </a:solidFill>
-                <a:latin typeface="Arial" pitchFamily="34" charset="0"/>
-                <a:ea typeface="Arial" pitchFamily="34" charset="-122"/>
-                <a:cs typeface="Arial" pitchFamily="34" charset="-120"/>
-              </a:rPr>
-              <a:t> (5 min) A sketch is a rough drawing of what the final artefact will look like. It is NOT the final. It's a thinking tool.</a:t>
-            </a:r>
-            <a:endParaRPr lang="en-US" sz="1200" dirty="0"/>
-          </a:p>
-        </p:txBody>
-      </p:sp>
-      <p:sp>
-        <p:nvSpPr>
-          <p:cNvPr id="6" name="Text 4"/>
-          <p:cNvSpPr/>
-          <p:nvPr/>
-        </p:nvSpPr>
-        <p:spPr>
-          <a:xfrm>
-            <a:off x="406301" y="2049066"/>
-            <a:ext cx="8498026" cy="213271"/>
-          </a:xfrm>
-          <a:prstGeom prst="rect">
-            <a:avLst/>
-          </a:prstGeom>
-          <a:noFill/>
-          <a:ln/>
-        </p:spPr>
-        <p:txBody>
-          <a:bodyPr wrap="square" lIns="0" tIns="0" rIns="0" bIns="0" rtlCol="0" anchor="t"/>
-          <a:lstStyle/>
-          <a:p>
-            <a:pPr algn="l" indent="0" marL="0">
-              <a:lnSpc>
-                <a:spcPts val="1680"/>
-              </a:lnSpc>
-              <a:spcBef>
-                <a:spcPts val="300"/>
-              </a:spcBef>
-              <a:spcAft>
-                <a:spcPts val="300"/>
-              </a:spcAft>
-              <a:buNone/>
-            </a:pPr>
-            <a:r>
-              <a:rPr lang="en-US" sz="1200" dirty="0">
-                <a:solidFill>
-                  <a:srgbClr val="1C2833"/>
-                </a:solidFill>
-                <a:latin typeface="Arial" pitchFamily="34" charset="0"/>
-                <a:ea typeface="Arial" pitchFamily="34" charset="-122"/>
-                <a:cs typeface="Arial" pitchFamily="34" charset="-120"/>
-              </a:rPr>
-              <a:t>For each project type, a sketch looks different:</a:t>
-            </a:r>
-            <a:endParaRPr lang="en-US" sz="1200" dirty="0"/>
-          </a:p>
-        </p:txBody>
-      </p:sp>
-      <p:sp>
-        <p:nvSpPr>
-          <p:cNvPr id="7" name="Text 5"/>
-          <p:cNvSpPr/>
-          <p:nvPr/>
-        </p:nvSpPr>
-        <p:spPr>
-          <a:xfrm>
-            <a:off x="406301" y="2338536"/>
-            <a:ext cx="8498026" cy="213271"/>
-          </a:xfrm>
-          <a:prstGeom prst="rect">
-            <a:avLst/>
-          </a:prstGeom>
-          <a:noFill/>
-          <a:ln/>
-        </p:spPr>
-        <p:txBody>
-          <a:bodyPr wrap="square" lIns="0" tIns="0" rIns="0" bIns="0" rtlCol="0" anchor="t"/>
-          <a:lstStyle/>
-          <a:p>
-            <a:pPr algn="l" indent="0" marL="0">
-              <a:lnSpc>
-                <a:spcPts val="1680"/>
-              </a:lnSpc>
-              <a:spcBef>
-                <a:spcPts val="300"/>
-              </a:spcBef>
-              <a:spcAft>
-                <a:spcPts val="300"/>
-              </a:spcAft>
-              <a:buNone/>
-            </a:pPr>
-            <a:r>
-              <a:rPr lang="en-US" sz="1200" i="1" dirty="0">
-                <a:solidFill>
-                  <a:srgbClr val="1C2833"/>
-                </a:solidFill>
-                <a:latin typeface="Arial" pitchFamily="34" charset="0"/>
-                <a:ea typeface="Arial" pitchFamily="34" charset="-122"/>
-                <a:cs typeface="Arial" pitchFamily="34" charset="-120"/>
-              </a:rPr>
-              <a:t>Each row: Project · Sketch looks like.</a:t>
-            </a:r>
-            <a:endParaRPr lang="en-US" sz="1200" dirty="0"/>
-          </a:p>
-        </p:txBody>
-      </p:sp>
-      <p:sp>
-        <p:nvSpPr>
-          <p:cNvPr id="8" name="Text 6"/>
-          <p:cNvSpPr/>
-          <p:nvPr/>
-        </p:nvSpPr>
-        <p:spPr>
-          <a:xfrm>
-            <a:off x="634901" y="2640657"/>
-            <a:ext cx="8102798" cy="2475905"/>
-          </a:xfrm>
-          <a:prstGeom prst="rect">
-            <a:avLst/>
-          </a:prstGeom>
-          <a:noFill/>
-          <a:ln/>
-        </p:spPr>
-        <p:txBody>
-          <a:bodyPr wrap="square" lIns="0" tIns="0" rIns="0" bIns="0" rtlCol="0" anchor="t"/>
-          <a:lstStyle/>
-          <a:p>
-            <a:pPr algn="l" marL="342900" indent="-342900">
-              <a:lnSpc>
-                <a:spcPts val="1620"/>
-              </a:lnSpc>
-              <a:spcAft>
-                <a:spcPts val="300"/>
-              </a:spcAft>
-              <a:buSzPct val="100000"/>
-              <a:buChar char="•"/>
-            </a:pPr>
-            <a:r>
-              <a:rPr lang="en-US" sz="1200" b="1" dirty="0">
-                <a:solidFill>
-                  <a:srgbClr val="1C2833"/>
-                </a:solidFill>
-                <a:latin typeface="Arial" pitchFamily="34" charset="0"/>
-                <a:ea typeface="Arial" pitchFamily="34" charset="-122"/>
-                <a:cs typeface="Arial" pitchFamily="34" charset="-120"/>
-              </a:rPr>
-              <a:t>Fermented-foods study</a:t>
-            </a:r>
-            <a:pPr algn="l" indent="0" marL="0">
-              <a:lnSpc>
-                <a:spcPts val="1620"/>
-              </a:lnSpc>
-              <a:spcAft>
-                <a:spcPts val="300"/>
-              </a:spcAft>
-              <a:buNone/>
-            </a:pPr>
-            <a:r>
-              <a:rPr lang="en-US" sz="1200" dirty="0">
-                <a:solidFill>
-                  <a:srgbClr val="1C2833"/>
-                </a:solidFill>
-                <a:latin typeface="Arial" pitchFamily="34" charset="0"/>
-                <a:ea typeface="Arial" pitchFamily="34" charset="-122"/>
-                <a:cs typeface="Arial" pitchFamily="34" charset="-120"/>
-              </a:rPr>
-              <a:t> — Layout of the poster: experimental setup, photo positions, observation table</a:t>
-            </a:r>
-            <a:endParaRPr lang="en-US" sz="1200" dirty="0"/>
-          </a:p>
-          <a:p>
-            <a:pPr algn="l" marL="342900" indent="-342900">
-              <a:lnSpc>
-                <a:spcPts val="1620"/>
-              </a:lnSpc>
-              <a:spcAft>
-                <a:spcPts val="300"/>
-              </a:spcAft>
-              <a:buSzPct val="100000"/>
-              <a:buChar char="•"/>
-            </a:pPr>
-            <a:r>
-              <a:rPr lang="en-US" sz="1200" b="1" dirty="0">
-                <a:solidFill>
-                  <a:srgbClr val="1C2833"/>
-                </a:solidFill>
-                <a:latin typeface="Arial" pitchFamily="34" charset="0"/>
-                <a:ea typeface="Arial" pitchFamily="34" charset="-122"/>
-                <a:cs typeface="Arial" pitchFamily="34" charset="-120"/>
-              </a:rPr>
-              <a:t>Mandala / geometry</a:t>
-            </a:r>
-            <a:pPr algn="l" indent="0" marL="0">
-              <a:lnSpc>
-                <a:spcPts val="1620"/>
-              </a:lnSpc>
-              <a:spcAft>
-                <a:spcPts val="300"/>
-              </a:spcAft>
-              <a:buNone/>
-            </a:pPr>
-            <a:r>
-              <a:rPr lang="en-US" sz="1200" dirty="0">
-                <a:solidFill>
-                  <a:srgbClr val="1C2833"/>
-                </a:solidFill>
-                <a:latin typeface="Arial" pitchFamily="34" charset="0"/>
-                <a:ea typeface="Arial" pitchFamily="34" charset="-122"/>
-                <a:cs typeface="Arial" pitchFamily="34" charset="-120"/>
-              </a:rPr>
-              <a:t> — Pencil construction lines + petal layout + colour key</a:t>
-            </a:r>
-            <a:endParaRPr lang="en-US" sz="1200" dirty="0"/>
-          </a:p>
-          <a:p>
-            <a:pPr algn="l" marL="342900" indent="-342900">
-              <a:lnSpc>
-                <a:spcPts val="1620"/>
-              </a:lnSpc>
-              <a:spcAft>
-                <a:spcPts val="300"/>
-              </a:spcAft>
-              <a:buSzPct val="100000"/>
-              <a:buChar char="•"/>
-            </a:pPr>
-            <a:r>
-              <a:rPr lang="en-US" sz="1200" b="1" dirty="0">
-                <a:solidFill>
-                  <a:srgbClr val="1C2833"/>
-                </a:solidFill>
-                <a:latin typeface="Arial" pitchFamily="34" charset="0"/>
-                <a:ea typeface="Arial" pitchFamily="34" charset="-122"/>
-                <a:cs typeface="Arial" pitchFamily="34" charset="-120"/>
-              </a:rPr>
-              <a:t>Calendar</a:t>
-            </a:r>
-            <a:pPr algn="l" indent="0" marL="0">
-              <a:lnSpc>
-                <a:spcPts val="1620"/>
-              </a:lnSpc>
-              <a:spcAft>
-                <a:spcPts val="300"/>
-              </a:spcAft>
-              <a:buNone/>
-            </a:pPr>
-            <a:r>
-              <a:rPr lang="en-US" sz="1200" dirty="0">
-                <a:solidFill>
-                  <a:srgbClr val="1C2833"/>
-                </a:solidFill>
-                <a:latin typeface="Arial" pitchFamily="34" charset="0"/>
-                <a:ea typeface="Arial" pitchFamily="34" charset="-122"/>
-                <a:cs typeface="Arial" pitchFamily="34" charset="-120"/>
-              </a:rPr>
-              <a:t> — One-week template showing all the columns (date, tithi, paksa, festival)</a:t>
-            </a:r>
-            <a:endParaRPr lang="en-US" sz="1200" dirty="0"/>
-          </a:p>
-          <a:p>
-            <a:pPr algn="l" marL="342900" indent="-342900">
-              <a:lnSpc>
-                <a:spcPts val="1620"/>
-              </a:lnSpc>
-              <a:spcAft>
-                <a:spcPts val="300"/>
-              </a:spcAft>
-              <a:buSzPct val="100000"/>
-              <a:buChar char="•"/>
-            </a:pPr>
-            <a:r>
-              <a:rPr lang="en-US" sz="1200" b="1" dirty="0">
-                <a:solidFill>
-                  <a:srgbClr val="1C2833"/>
-                </a:solidFill>
-                <a:latin typeface="Arial" pitchFamily="34" charset="0"/>
-                <a:ea typeface="Arial" pitchFamily="34" charset="-122"/>
-                <a:cs typeface="Arial" pitchFamily="34" charset="-120"/>
-              </a:rPr>
-              <a:t>Herb deck</a:t>
-            </a:r>
-            <a:pPr algn="l" indent="0" marL="0">
-              <a:lnSpc>
-                <a:spcPts val="1620"/>
-              </a:lnSpc>
-              <a:spcAft>
-                <a:spcPts val="300"/>
-              </a:spcAft>
-              <a:buNone/>
-            </a:pPr>
-            <a:r>
-              <a:rPr lang="en-US" sz="1200" dirty="0">
-                <a:solidFill>
-                  <a:srgbClr val="1C2833"/>
-                </a:solidFill>
-                <a:latin typeface="Arial" pitchFamily="34" charset="0"/>
-                <a:ea typeface="Arial" pitchFamily="34" charset="-122"/>
-                <a:cs typeface="Arial" pitchFamily="34" charset="-120"/>
-              </a:rPr>
-              <a:t> — One card mock-up at actual size, with positions for photo, sketch, name, use</a:t>
-            </a:r>
-            <a:endParaRPr lang="en-US" sz="1200" dirty="0"/>
-          </a:p>
-          <a:p>
-            <a:pPr algn="l" marL="342900" indent="-342900">
-              <a:lnSpc>
-                <a:spcPts val="1620"/>
-              </a:lnSpc>
-              <a:spcAft>
-                <a:spcPts val="300"/>
-              </a:spcAft>
-              <a:buSzPct val="100000"/>
-              <a:buChar char="•"/>
-            </a:pPr>
-            <a:r>
-              <a:rPr lang="en-US" sz="1200" b="1" dirty="0">
-                <a:solidFill>
-                  <a:srgbClr val="1C2833"/>
-                </a:solidFill>
-                <a:latin typeface="Arial" pitchFamily="34" charset="0"/>
-                <a:ea typeface="Arial" pitchFamily="34" charset="-122"/>
-                <a:cs typeface="Arial" pitchFamily="34" charset="-120"/>
-              </a:rPr>
-              <a:t>Magic-square art</a:t>
-            </a:r>
-            <a:pPr algn="l" indent="0" marL="0">
-              <a:lnSpc>
-                <a:spcPts val="1620"/>
-              </a:lnSpc>
-              <a:spcAft>
-                <a:spcPts val="300"/>
-              </a:spcAft>
-              <a:buNone/>
-            </a:pPr>
-            <a:r>
-              <a:rPr lang="en-US" sz="1200" dirty="0">
-                <a:solidFill>
-                  <a:srgbClr val="1C2833"/>
-                </a:solidFill>
-                <a:latin typeface="Arial" pitchFamily="34" charset="0"/>
-                <a:ea typeface="Arial" pitchFamily="34" charset="-122"/>
-                <a:cs typeface="Arial" pitchFamily="34" charset="-120"/>
-              </a:rPr>
-              <a:t> — The verified grid + the colour/pattern overlay plan</a:t>
-            </a:r>
-            <a:endParaRPr lang="en-US" sz="1200" dirty="0"/>
-          </a:p>
-          <a:p>
-            <a:pPr algn="l" marL="342900" indent="-342900">
-              <a:lnSpc>
-                <a:spcPts val="1620"/>
-              </a:lnSpc>
-              <a:spcAft>
-                <a:spcPts val="300"/>
-              </a:spcAft>
-              <a:buSzPct val="100000"/>
-              <a:buChar char="•"/>
-            </a:pPr>
-            <a:r>
-              <a:rPr lang="en-US" sz="1200" b="1" dirty="0">
-                <a:solidFill>
-                  <a:srgbClr val="1C2833"/>
-                </a:solidFill>
-                <a:latin typeface="Arial" pitchFamily="34" charset="0"/>
-                <a:ea typeface="Arial" pitchFamily="34" charset="-122"/>
-                <a:cs typeface="Arial" pitchFamily="34" charset="-120"/>
-              </a:rPr>
-              <a:t>Yoga sequence</a:t>
-            </a:r>
-            <a:pPr algn="l" indent="0" marL="0">
-              <a:lnSpc>
-                <a:spcPts val="1620"/>
-              </a:lnSpc>
-              <a:spcAft>
-                <a:spcPts val="300"/>
-              </a:spcAft>
-              <a:buNone/>
-            </a:pPr>
-            <a:r>
-              <a:rPr lang="en-US" sz="1200" dirty="0">
-                <a:solidFill>
-                  <a:srgbClr val="1C2833"/>
-                </a:solidFill>
-                <a:latin typeface="Arial" pitchFamily="34" charset="0"/>
-                <a:ea typeface="Arial" pitchFamily="34" charset="-122"/>
-                <a:cs typeface="Arial" pitchFamily="34" charset="-120"/>
-              </a:rPr>
-              <a:t> — A storyboard: 8 boxes, one stick-figure pose per box, time + transition arrows</a:t>
-            </a:r>
-            <a:endParaRPr lang="en-US" sz="1200" dirty="0"/>
-          </a:p>
-          <a:p>
-            <a:pPr algn="l" marL="342900" indent="-342900">
-              <a:lnSpc>
-                <a:spcPts val="1620"/>
-              </a:lnSpc>
-              <a:spcAft>
-                <a:spcPts val="300"/>
-              </a:spcAft>
-              <a:buSzPct val="100000"/>
-              <a:buChar char="•"/>
-            </a:pPr>
-            <a:r>
-              <a:rPr lang="en-US" sz="1200" b="1" dirty="0">
-                <a:solidFill>
-                  <a:srgbClr val="1C2833"/>
-                </a:solidFill>
-                <a:latin typeface="Arial" pitchFamily="34" charset="0"/>
-                <a:ea typeface="Arial" pitchFamily="34" charset="-122"/>
-                <a:cs typeface="Arial" pitchFamily="34" charset="-120"/>
-              </a:rPr>
-              <a:t>Sustainability audit</a:t>
-            </a:r>
-            <a:pPr algn="l" indent="0" marL="0">
-              <a:lnSpc>
-                <a:spcPts val="1620"/>
-              </a:lnSpc>
-              <a:spcAft>
-                <a:spcPts val="300"/>
-              </a:spcAft>
-              <a:buNone/>
-            </a:pPr>
-            <a:r>
-              <a:rPr lang="en-US" sz="1200" dirty="0">
-                <a:solidFill>
-                  <a:srgbClr val="1C2833"/>
-                </a:solidFill>
-                <a:latin typeface="Arial" pitchFamily="34" charset="0"/>
-                <a:ea typeface="Arial" pitchFamily="34" charset="-122"/>
-                <a:cs typeface="Arial" pitchFamily="34" charset="-120"/>
-              </a:rPr>
-              <a:t> — The data collection sheet + the proposed-changes table</a:t>
-            </a:r>
-            <a:endParaRPr lang="en-US" sz="1200" dirty="0"/>
-          </a:p>
-          <a:p>
-            <a:pPr algn="l" marL="342900" indent="-342900">
-              <a:lnSpc>
-                <a:spcPts val="1620"/>
-              </a:lnSpc>
-              <a:spcAft>
-                <a:spcPts val="300"/>
-              </a:spcAft>
-              <a:buSzPct val="100000"/>
-              <a:buChar char="•"/>
-            </a:pPr>
-            <a:r>
-              <a:rPr lang="en-US" sz="1200" b="1" dirty="0">
-                <a:solidFill>
-                  <a:srgbClr val="1C2833"/>
-                </a:solidFill>
-                <a:latin typeface="Arial" pitchFamily="34" charset="0"/>
-                <a:ea typeface="Arial" pitchFamily="34" charset="-122"/>
-                <a:cs typeface="Arial" pitchFamily="34" charset="-120"/>
-              </a:rPr>
-              <a:t>Doṣa self-study</a:t>
-            </a:r>
-            <a:pPr algn="l" indent="0" marL="0">
-              <a:lnSpc>
-                <a:spcPts val="1620"/>
-              </a:lnSpc>
-              <a:spcAft>
-                <a:spcPts val="300"/>
-              </a:spcAft>
-              <a:buNone/>
-            </a:pPr>
-            <a:r>
-              <a:rPr lang="en-US" sz="1200" dirty="0">
-                <a:solidFill>
-                  <a:srgbClr val="1C2833"/>
-                </a:solidFill>
-                <a:latin typeface="Arial" pitchFamily="34" charset="0"/>
-                <a:ea typeface="Arial" pitchFamily="34" charset="-122"/>
-                <a:cs typeface="Arial" pitchFamily="34" charset="-120"/>
-              </a:rPr>
-              <a:t> — The 7-day journal table with the columns named</a:t>
-            </a:r>
-            <a:endParaRPr lang="en-US" sz="1200" dirty="0"/>
-          </a:p>
-          <a:p>
-            <a:pPr algn="l" marL="342900" indent="-342900">
-              <a:lnSpc>
-                <a:spcPts val="1620"/>
-              </a:lnSpc>
-              <a:spcAft>
-                <a:spcPts val="300"/>
-              </a:spcAft>
-              <a:buSzPct val="100000"/>
-              <a:buChar char="•"/>
-            </a:pPr>
-            <a:r>
-              <a:rPr lang="en-US" sz="1200" b="1" dirty="0">
-                <a:solidFill>
-                  <a:srgbClr val="1C2833"/>
-                </a:solidFill>
-                <a:latin typeface="Arial" pitchFamily="34" charset="0"/>
-                <a:ea typeface="Arial" pitchFamily="34" charset="-122"/>
-                <a:cs typeface="Arial" pitchFamily="34" charset="-120"/>
-              </a:rPr>
-              <a:t>Multiplication comparison</a:t>
-            </a:r>
-            <a:pPr algn="l" indent="0" marL="0">
-              <a:lnSpc>
-                <a:spcPts val="1620"/>
-              </a:lnSpc>
-              <a:spcAft>
-                <a:spcPts val="300"/>
-              </a:spcAft>
-              <a:buNone/>
-            </a:pPr>
-            <a:r>
-              <a:rPr lang="en-US" sz="1200" dirty="0">
-                <a:solidFill>
-                  <a:srgbClr val="1C2833"/>
-                </a:solidFill>
-                <a:latin typeface="Arial" pitchFamily="34" charset="0"/>
-                <a:ea typeface="Arial" pitchFamily="34" charset="-122"/>
-                <a:cs typeface="Arial" pitchFamily="34" charset="-120"/>
-              </a:rPr>
-              <a:t> — The problem-set page + the timing-sheet design</a:t>
-            </a:r>
-            <a:endParaRPr lang="en-US" sz="1200" dirty="0"/>
-          </a:p>
-          <a:p>
-            <a:pPr algn="l" marL="342900" indent="-342900">
-              <a:lnSpc>
-                <a:spcPts val="1620"/>
-              </a:lnSpc>
-              <a:spcAft>
-                <a:spcPts val="300"/>
-              </a:spcAft>
-              <a:buSzPct val="100000"/>
-              <a:buChar char="•"/>
-            </a:pPr>
-            <a:r>
-              <a:rPr lang="en-US" sz="1200" b="1" dirty="0">
-                <a:solidFill>
-                  <a:srgbClr val="1C2833"/>
-                </a:solidFill>
-                <a:latin typeface="Arial" pitchFamily="34" charset="0"/>
-                <a:ea typeface="Arial" pitchFamily="34" charset="-122"/>
-                <a:cs typeface="Arial" pitchFamily="34" charset="-120"/>
-              </a:rPr>
-              <a:t>Open design</a:t>
-            </a:r>
-            <a:pPr algn="l" indent="0" marL="0">
-              <a:lnSpc>
-                <a:spcPts val="1620"/>
-              </a:lnSpc>
-              <a:spcAft>
-                <a:spcPts val="300"/>
-              </a:spcAft>
-              <a:buNone/>
-            </a:pPr>
-            <a:r>
-              <a:rPr lang="en-US" sz="1200" dirty="0">
-                <a:solidFill>
-                  <a:srgbClr val="1C2833"/>
-                </a:solidFill>
-                <a:latin typeface="Arial" pitchFamily="34" charset="0"/>
-                <a:ea typeface="Arial" pitchFamily="34" charset="-122"/>
-                <a:cs typeface="Arial" pitchFamily="34" charset="-120"/>
-              </a:rPr>
-              <a:t> — Whatever fits</a:t>
-            </a:r>
-            <a:endParaRPr lang="en-US" sz="1200" dirty="0"/>
-          </a:p>
-        </p:txBody>
-      </p:sp>
-      <p:sp>
-        <p:nvSpPr>
-          <p:cNvPr id="9" name="Text 7"/>
-          <p:cNvSpPr/>
-          <p:nvPr/>
-        </p:nvSpPr>
-        <p:spPr>
-          <a:xfrm>
-            <a:off x="634901" y="5218063"/>
-            <a:ext cx="8102798" cy="281880"/>
-          </a:xfrm>
-          <a:prstGeom prst="rect">
-            <a:avLst/>
-          </a:prstGeom>
-          <a:noFill/>
-          <a:ln/>
-        </p:spPr>
-        <p:txBody>
-          <a:bodyPr wrap="square" lIns="0" tIns="0" rIns="0" bIns="0" rtlCol="0" anchor="t"/>
-          <a:lstStyle/>
-          <a:p>
-            <a:pPr algn="l" marL="342900" indent="-342900">
-              <a:lnSpc>
-                <a:spcPts val="1620"/>
-              </a:lnSpc>
-              <a:spcAft>
-                <a:spcPts val="300"/>
-              </a:spcAft>
-              <a:buSzPct val="100000"/>
-              <a:buChar char="•"/>
-            </a:pPr>
-            <a:r>
-              <a:rPr lang="en-US" sz="1200" b="1" dirty="0">
-                <a:solidFill>
-                  <a:srgbClr val="1C2833"/>
-                </a:solidFill>
-                <a:latin typeface="Arial" pitchFamily="34" charset="0"/>
-                <a:ea typeface="Arial" pitchFamily="34" charset="-122"/>
-                <a:cs typeface="Arial" pitchFamily="34" charset="-120"/>
-              </a:rPr>
-              <a:t>Sketch rules</a:t>
-            </a:r>
-            <a:pPr algn="l" indent="0" marL="0">
-              <a:lnSpc>
-                <a:spcPts val="1620"/>
-              </a:lnSpc>
-              <a:spcAft>
-                <a:spcPts val="300"/>
-              </a:spcAft>
-              <a:buNone/>
-            </a:pPr>
-            <a:r>
-              <a:rPr lang="en-US" sz="1200" dirty="0">
-                <a:solidFill>
-                  <a:srgbClr val="1C2833"/>
-                </a:solidFill>
-                <a:latin typeface="Arial" pitchFamily="34" charset="0"/>
-                <a:ea typeface="Arial" pitchFamily="34" charset="-122"/>
-                <a:cs typeface="Arial" pitchFamily="34" charset="-120"/>
-              </a:rPr>
-              <a:t> (2 min):</a:t>
-            </a:r>
-            <a:endParaRPr lang="en-US" sz="1200" dirty="0"/>
-          </a:p>
-        </p:txBody>
-      </p:sp>
-      <p:sp>
-        <p:nvSpPr>
-          <p:cNvPr id="10" name="Text 8"/>
-          <p:cNvSpPr/>
-          <p:nvPr/>
-        </p:nvSpPr>
-        <p:spPr>
-          <a:xfrm>
-            <a:off x="406301" y="5588794"/>
-            <a:ext cx="8498026" cy="426541"/>
-          </a:xfrm>
-          <a:prstGeom prst="rect">
-            <a:avLst/>
-          </a:prstGeom>
-          <a:noFill/>
-          <a:ln/>
-        </p:spPr>
-        <p:txBody>
-          <a:bodyPr wrap="square" lIns="0" tIns="0" rIns="0" bIns="0" rtlCol="0" anchor="t"/>
-          <a:lstStyle/>
-          <a:p>
-            <a:pPr algn="l" indent="0" marL="0">
-              <a:lnSpc>
-                <a:spcPts val="1680"/>
-              </a:lnSpc>
-              <a:spcBef>
-                <a:spcPts val="300"/>
-              </a:spcBef>
-              <a:spcAft>
-                <a:spcPts val="300"/>
-              </a:spcAft>
-              <a:buNone/>
-            </a:pPr>
-            <a:r>
-              <a:rPr lang="en-US" sz="1200" dirty="0">
-                <a:solidFill>
-                  <a:srgbClr val="1C2833"/>
-                </a:solidFill>
-                <a:latin typeface="Arial" pitchFamily="34" charset="0"/>
-                <a:ea typeface="Arial" pitchFamily="34" charset="-122"/>
-                <a:cs typeface="Arial" pitchFamily="34" charset="-120"/>
-              </a:rPr>
-              <a:t>– Pencil only. You'll change it. – Label everything — even if you "know" what it is. – Annotate dimensions ("this card will be 4" × 6"", "the poster is A2"). – Leave white space for things you haven't figured out yet — write </a:t>
-            </a:r>
-            <a:pPr algn="l" indent="0" marL="0">
-              <a:lnSpc>
-                <a:spcPts val="1680"/>
-              </a:lnSpc>
-              <a:spcBef>
-                <a:spcPts val="300"/>
-              </a:spcBef>
-              <a:spcAft>
-                <a:spcPts val="300"/>
-              </a:spcAft>
-              <a:buNone/>
-            </a:pPr>
-            <a:r>
-              <a:rPr lang="en-US" sz="1200" i="1" dirty="0">
-                <a:solidFill>
-                  <a:srgbClr val="1C2833"/>
-                </a:solidFill>
-                <a:latin typeface="Arial" pitchFamily="34" charset="0"/>
-                <a:ea typeface="Arial" pitchFamily="34" charset="-122"/>
-                <a:cs typeface="Arial" pitchFamily="34" charset="-120"/>
-              </a:rPr>
-              <a:t>"TBD"</a:t>
-            </a:r>
-            <a:pPr algn="l" indent="0" marL="0">
-              <a:lnSpc>
-                <a:spcPts val="1680"/>
-              </a:lnSpc>
-              <a:spcBef>
-                <a:spcPts val="300"/>
-              </a:spcBef>
-              <a:spcAft>
-                <a:spcPts val="300"/>
-              </a:spcAft>
-              <a:buNone/>
-            </a:pPr>
-            <a:r>
-              <a:rPr lang="en-US" sz="1200" dirty="0">
-                <a:solidFill>
-                  <a:srgbClr val="1C2833"/>
-                </a:solidFill>
-                <a:latin typeface="Arial" pitchFamily="34" charset="0"/>
-                <a:ea typeface="Arial" pitchFamily="34" charset="-122"/>
-                <a:cs typeface="Arial" pitchFamily="34" charset="-120"/>
-              </a:rPr>
-              <a:t> and move on.</a:t>
-            </a:r>
-            <a:endParaRPr lang="en-US" sz="1200" dirty="0"/>
-          </a:p>
-        </p:txBody>
-      </p:sp>
-      <p:sp>
-        <p:nvSpPr>
-          <p:cNvPr id="11" name="Text 9"/>
-          <p:cNvSpPr/>
-          <p:nvPr/>
-        </p:nvSpPr>
-        <p:spPr>
-          <a:xfrm>
-            <a:off x="406301" y="6167735"/>
+            <a:off x="406301" y="4434929"/>
             <a:ext cx="8498026" cy="213271"/>
           </a:xfrm>
           <a:prstGeom prst="rect">
@@ -4822,7 +6494,7 @@
                 <a:ea typeface="Georgia" pitchFamily="34" charset="-122"/>
                 <a:cs typeface="Georgia" pitchFamily="34" charset="-120"/>
               </a:rPr>
-              <a:t>Activity (25 min) — Research + sketch</a:t>
+              <a:t>Core (10 min)</a:t>
             </a:r>
             <a:endParaRPr lang="en-US" sz="1800" dirty="0"/>
           </a:p>
@@ -4837,7 +6509,7 @@
         <p:spPr>
           <a:xfrm>
             <a:off x="634901" y="883593"/>
-            <a:ext cx="8102798" cy="975122"/>
+            <a:ext cx="8102798" cy="487561"/>
           </a:xfrm>
           <a:prstGeom prst="rect">
             <a:avLst/>
@@ -4868,7 +6540,7 @@
                 <a:ea typeface="Arial" pitchFamily="34" charset="-122"/>
                 <a:cs typeface="Arial" pitchFamily="34" charset="-120"/>
               </a:rPr>
-              <a:t>First 10 min</a:t>
+              <a:t>Round out the sources</a:t>
             </a:r>
             <a:pPr algn="l" indent="0" marL="0">
               <a:lnSpc>
@@ -4888,10 +6560,32 @@
                 <a:ea typeface="Arial" pitchFamily="34" charset="-122"/>
                 <a:cs typeface="Arial" pitchFamily="34" charset="-120"/>
               </a:rPr>
-              <a:t>: research. Add at least one new source slip. If you already have three, deepen one.</a:t>
+              <a:t> (3 min). If you have two, add one more today. If you have three, deepen one — read the surrounding chunks, not just the one verse.</a:t>
             </a:r>
             <a:endParaRPr lang="en-US" sz="1200" dirty="0"/>
           </a:p>
+        </p:txBody>
+      </p:sp>
+      <p:sp>
+        <p:nvSpPr>
+          <p:cNvPr id="5" name="Text 3"/>
+          <p:cNvSpPr/>
+          <p:nvPr/>
+        </p:nvSpPr>
+        <p:spPr>
+          <a:xfrm>
+            <a:off x="634901" y="1472654"/>
+            <a:ext cx="8102798" cy="487561"/>
+          </a:xfrm>
+          <a:prstGeom prst="rect">
+            <a:avLst/>
+          </a:prstGeom>
+          <a:noFill/>
+          <a:ln/>
+        </p:spPr>
+        <p:txBody>
+          <a:bodyPr wrap="square" lIns="0" tIns="0" rIns="0" bIns="0" rtlCol="0" anchor="t"/>
+          <a:lstStyle/>
           <a:p>
             <a:pPr algn="l" marL="342900" indent="-342900">
               <a:lnSpc>
@@ -4912,7 +6606,7 @@
                 <a:ea typeface="Arial" pitchFamily="34" charset="-122"/>
                 <a:cs typeface="Arial" pitchFamily="34" charset="-120"/>
               </a:rPr>
-              <a:t>Next 13 min</a:t>
+              <a:t>What's a design sketch?</a:t>
             </a:r>
             <a:pPr algn="l" indent="0" marL="0">
               <a:lnSpc>
@@ -4932,36 +6626,40 @@
                 <a:ea typeface="Arial" pitchFamily="34" charset="-122"/>
                 <a:cs typeface="Arial" pitchFamily="34" charset="-120"/>
               </a:rPr>
-              <a:t>: sketch the first version of the final artefact.</a:t>
+              <a:t> (5 min) A sketch is a rough drawing of what the final artefact will look like. It is NOT the final. It's a thinking tool.</a:t>
             </a:r>
             <a:endParaRPr lang="en-US" sz="1200" dirty="0"/>
           </a:p>
-          <a:p>
-            <a:pPr algn="l" marL="342900" indent="-342900">
-              <a:lnSpc>
-                <a:spcPts val="1620"/>
-              </a:lnSpc>
-              <a:spcAft>
-                <a:spcPts val="300"/>
-              </a:spcAft>
-              <a:buSzPct val="100000"/>
-              <a:buChar char="•"/>
-            </a:pPr>
-            <a:r>
-              <a:rPr lang="en-US" sz="1200" b="1" dirty="0">
-                <a:solidFill>
-                  <a:srgbClr val="1C2833"/>
-                </a:solidFill>
-                <a:latin typeface="Arial" pitchFamily="34" charset="0"/>
-                <a:ea typeface="Arial" pitchFamily="34" charset="-122"/>
-                <a:cs typeface="Arial" pitchFamily="34" charset="-120"/>
-              </a:rPr>
-              <a:t>Last 2 min</a:t>
-            </a:r>
-            <a:pPr algn="l" indent="0" marL="0">
-              <a:lnSpc>
-                <a:spcPts val="1620"/>
-              </a:lnSpc>
+        </p:txBody>
+      </p:sp>
+      <p:sp>
+        <p:nvSpPr>
+          <p:cNvPr id="6" name="Text 4"/>
+          <p:cNvSpPr/>
+          <p:nvPr/>
+        </p:nvSpPr>
+        <p:spPr>
+          <a:xfrm>
+            <a:off x="406301" y="2049066"/>
+            <a:ext cx="8498026" cy="213271"/>
+          </a:xfrm>
+          <a:prstGeom prst="rect">
+            <a:avLst/>
+          </a:prstGeom>
+          <a:noFill/>
+          <a:ln/>
+        </p:spPr>
+        <p:txBody>
+          <a:bodyPr wrap="square" lIns="0" tIns="0" rIns="0" bIns="0" rtlCol="0" anchor="t"/>
+          <a:lstStyle/>
+          <a:p>
+            <a:pPr algn="l" indent="0" marL="0">
+              <a:lnSpc>
+                <a:spcPts val="1680"/>
+              </a:lnSpc>
+              <a:spcBef>
+                <a:spcPts val="300"/>
+              </a:spcBef>
               <a:spcAft>
                 <a:spcPts val="300"/>
               </a:spcAft>
@@ -4976,87 +6674,7 @@
                 <a:ea typeface="Arial" pitchFamily="34" charset="-122"/>
                 <a:cs typeface="Arial" pitchFamily="34" charset="-120"/>
               </a:rPr>
-              <a:t>: pair-swap. Show your partner the sketch. They write </a:t>
-            </a:r>
-            <a:pPr algn="l" indent="0" marL="0">
-              <a:lnSpc>
-                <a:spcPts val="1620"/>
-              </a:lnSpc>
-              <a:spcAft>
-                <a:spcPts val="300"/>
-              </a:spcAft>
-              <a:buNone/>
-            </a:pPr>
-            <a:r>
-              <a:rPr lang="en-US" sz="1200" i="1" dirty="0">
-                <a:solidFill>
-                  <a:srgbClr val="1C2833"/>
-                </a:solidFill>
-                <a:latin typeface="Arial" pitchFamily="34" charset="0"/>
-                <a:ea typeface="Arial" pitchFamily="34" charset="-122"/>
-                <a:cs typeface="Arial" pitchFamily="34" charset="-120"/>
-              </a:rPr>
-              <a:t>one question they have</a:t>
-            </a:r>
-            <a:pPr algn="l" indent="0" marL="0">
-              <a:lnSpc>
-                <a:spcPts val="1620"/>
-              </a:lnSpc>
-              <a:spcAft>
-                <a:spcPts val="300"/>
-              </a:spcAft>
-              <a:buNone/>
-            </a:pPr>
-            <a:r>
-              <a:rPr lang="en-US" sz="1200" dirty="0">
-                <a:solidFill>
-                  <a:srgbClr val="1C2833"/>
-                </a:solidFill>
-                <a:latin typeface="Arial" pitchFamily="34" charset="0"/>
-                <a:ea typeface="Arial" pitchFamily="34" charset="-122"/>
-                <a:cs typeface="Arial" pitchFamily="34" charset="-120"/>
-              </a:rPr>
-              <a:t> and </a:t>
-            </a:r>
-            <a:pPr algn="l" indent="0" marL="0">
-              <a:lnSpc>
-                <a:spcPts val="1620"/>
-              </a:lnSpc>
-              <a:spcAft>
-                <a:spcPts val="300"/>
-              </a:spcAft>
-              <a:buNone/>
-            </a:pPr>
-            <a:r>
-              <a:rPr lang="en-US" sz="1200" i="1" dirty="0">
-                <a:solidFill>
-                  <a:srgbClr val="1C2833"/>
-                </a:solidFill>
-                <a:latin typeface="Arial" pitchFamily="34" charset="0"/>
-                <a:ea typeface="Arial" pitchFamily="34" charset="-122"/>
-                <a:cs typeface="Arial" pitchFamily="34" charset="-120"/>
-              </a:rPr>
-              <a:t>one piece of praise</a:t>
-            </a:r>
-            <a:pPr algn="l" indent="0" marL="0">
-              <a:lnSpc>
-                <a:spcPts val="1620"/>
-              </a:lnSpc>
-              <a:spcAft>
-                <a:spcPts val="300"/>
-              </a:spcAft>
-              <a:buNone/>
-            </a:pPr>
-            <a:r>
-              <a:rPr lang="en-US" sz="1200" dirty="0">
-                <a:solidFill>
-                  <a:srgbClr val="1C2833"/>
-                </a:solidFill>
-                <a:latin typeface="Arial" pitchFamily="34" charset="0"/>
-                <a:ea typeface="Arial" pitchFamily="34" charset="-122"/>
-                <a:cs typeface="Arial" pitchFamily="34" charset="-120"/>
-              </a:rPr>
-              <a:t> on a sticky.</a:t>
+              <a:t>For each project type, a sketch looks different:</a:t>
             </a:r>
             <a:endParaRPr lang="en-US" sz="1200" dirty="0"/>
           </a:p>
@@ -5064,7 +6682,7 @@
       </p:sp>
       <p:sp>
         <p:nvSpPr>
-          <p:cNvPr id="5" name="Text 3"/>
+          <p:cNvPr id="7" name="Text 5"/>
           <p:cNvSpPr/>
           <p:nvPr/>
         </p:nvSpPr>
@@ -5214,7 +6832,7 @@
                 <a:ea typeface="Georgia" pitchFamily="34" charset="-122"/>
                 <a:cs typeface="Georgia" pitchFamily="34" charset="-120"/>
               </a:rPr>
-              <a:t>Wrap-up (5 min)</a:t>
+              <a:t>Core (10 min) (cont.)</a:t>
             </a:r>
             <a:endParaRPr lang="en-US" sz="1800" dirty="0"/>
           </a:p>
@@ -5229,7 +6847,7 @@
         <p:spPr>
           <a:xfrm>
             <a:off x="406301" y="870942"/>
-            <a:ext cx="8498026" cy="853083"/>
+            <a:ext cx="8498026" cy="213271"/>
           </a:xfrm>
           <a:prstGeom prst="rect">
             <a:avLst/>
@@ -5254,29 +6872,6 @@
               <a:buNone/>
             </a:pPr>
             <a:r>
-              <a:rPr lang="en-US" sz="1200" dirty="0">
-                <a:solidFill>
-                  <a:srgbClr val="1C2833"/>
-                </a:solidFill>
-                <a:latin typeface="Arial" pitchFamily="34" charset="0"/>
-                <a:ea typeface="Arial" pitchFamily="34" charset="-122"/>
-                <a:cs typeface="Arial" pitchFamily="34" charset="-120"/>
-              </a:rPr>
-              <a:t>– Hand sketches into the in-tray (or photograph them on a phone if students want to keep working at home). – Journal entry: "My sketch is now ___ . Tomorrow's critique should help me with ___ ." – Preview Day 5: </a:t>
-            </a:r>
-            <a:pPr algn="l" indent="0" marL="0">
-              <a:lnSpc>
-                <a:spcPts val="1680"/>
-              </a:lnSpc>
-              <a:spcBef>
-                <a:spcPts val="300"/>
-              </a:spcBef>
-              <a:spcAft>
-                <a:spcPts val="300"/>
-              </a:spcAft>
-              <a:buNone/>
-            </a:pPr>
-            <a:r>
               <a:rPr lang="en-US" sz="1200" i="1" dirty="0">
                 <a:solidFill>
                   <a:srgbClr val="1C2833"/>
@@ -5285,7 +6880,7 @@
                 <a:ea typeface="Arial" pitchFamily="34" charset="-122"/>
                 <a:cs typeface="Arial" pitchFamily="34" charset="-120"/>
               </a:rPr>
-              <a:t>"Tomorrow you'll get full peer critique. Bring a willingness to hear hard things. Tomorrow's critique is the most useful 45 minutes you'll spend in this module."</a:t>
+              <a:t>Each row: Project · Sketch looks like.</a:t>
             </a:r>
             <a:endParaRPr lang="en-US" sz="1200" dirty="0"/>
           </a:p>
@@ -5443,7 +7038,7 @@
                 <a:ea typeface="Georgia" pitchFamily="34" charset="-122"/>
                 <a:cs typeface="Georgia" pitchFamily="34" charset="-120"/>
               </a:rPr>
-              <a:t>Student-facing content</a:t>
+              <a:t>Core (10 min) (cont.)</a:t>
             </a:r>
             <a:endParaRPr lang="en-US" sz="1800" dirty="0"/>
           </a:p>
@@ -5457,61 +7052,8 @@
         </p:nvSpPr>
         <p:spPr>
           <a:xfrm>
-            <a:off x="406301" y="883593"/>
-            <a:ext cx="8331398" cy="1881187"/>
-          </a:xfrm>
-          <a:prstGeom prst="rect">
-            <a:avLst/>
-          </a:prstGeom>
-          <a:solidFill>
-            <a:srgbClr val="F4F8F9"/>
-          </a:solidFill>
-          <a:ln/>
-        </p:spPr>
-        <p:txBody>
-          <a:bodyPr wrap="square" rtlCol="0" anchor="ctr"/>
-          <a:lstStyle/>
-          <a:p>
-            <a:pPr indent="0" marL="0">
-              <a:buNone/>
-            </a:pPr>
-            <a:endParaRPr lang="en-US" dirty="0"/>
-          </a:p>
-        </p:txBody>
-      </p:sp>
-      <p:sp>
-        <p:nvSpPr>
-          <p:cNvPr id="5" name="Shape 3"/>
-          <p:cNvSpPr/>
-          <p:nvPr/>
-        </p:nvSpPr>
-        <p:spPr>
-          <a:xfrm>
-            <a:off x="434876" y="883593"/>
-            <a:ext cx="0" cy="1881187"/>
-          </a:xfrm>
-          <a:prstGeom prst="line">
-            <a:avLst/>
-          </a:prstGeom>
-          <a:noFill/>
-          <a:ln w="57150">
-            <a:solidFill>
-              <a:srgbClr val="FE4447"/>
-            </a:solidFill>
-            <a:prstDash val="solid"/>
-          </a:ln>
-        </p:spPr>
-      </p:sp>
-      <p:sp>
-        <p:nvSpPr>
-          <p:cNvPr id="6" name="Text 4"/>
-          <p:cNvSpPr/>
-          <p:nvPr/>
-        </p:nvSpPr>
-        <p:spPr>
-          <a:xfrm>
-            <a:off x="692051" y="1074093"/>
-            <a:ext cx="7973389" cy="230981"/>
+            <a:off x="634901" y="883593"/>
+            <a:ext cx="8102798" cy="1500783"/>
           </a:xfrm>
           <a:prstGeom prst="rect">
             <a:avLst/>
@@ -5523,180 +7065,274 @@
           <a:bodyPr wrap="square" lIns="0" tIns="0" rIns="0" bIns="0" rtlCol="0" anchor="t"/>
           <a:lstStyle/>
           <a:p>
-            <a:pPr algn="l" indent="0" marL="0">
-              <a:lnSpc>
-                <a:spcPts val="1820"/>
-              </a:lnSpc>
-              <a:spcBef>
-                <a:spcPts val="300"/>
-              </a:spcBef>
-              <a:spcAft>
-                <a:spcPts val="300"/>
-              </a:spcAft>
-              <a:buNone/>
-            </a:pPr>
-            <a:r>
-              <a:rPr lang="en-US" sz="1300" b="1" i="1" dirty="0">
-                <a:solidFill>
-                  <a:srgbClr val="1C2833"/>
-                </a:solidFill>
-                <a:latin typeface="Georgia" pitchFamily="34" charset="0"/>
-                <a:ea typeface="Georgia" pitchFamily="34" charset="-122"/>
-                <a:cs typeface="Georgia" pitchFamily="34" charset="-120"/>
-              </a:rPr>
-              <a:t>A sketch is a thinking tool, not a final.</a:t>
-            </a:r>
-            <a:endParaRPr lang="en-US" sz="1300" dirty="0"/>
-          </a:p>
-        </p:txBody>
-      </p:sp>
-      <p:sp>
-        <p:nvSpPr>
-          <p:cNvPr id="7" name="Text 5"/>
-          <p:cNvSpPr/>
-          <p:nvPr/>
-        </p:nvSpPr>
-        <p:spPr>
-          <a:xfrm>
-            <a:off x="692051" y="1343174"/>
-            <a:ext cx="7973389" cy="230981"/>
-          </a:xfrm>
-          <a:prstGeom prst="rect">
-            <a:avLst/>
-          </a:prstGeom>
-          <a:noFill/>
-          <a:ln/>
-        </p:spPr>
-        <p:txBody>
-          <a:bodyPr wrap="square" lIns="0" tIns="0" rIns="0" bIns="0" rtlCol="0" anchor="t"/>
-          <a:lstStyle/>
-          <a:p>
-            <a:pPr algn="l" indent="0" marL="0">
-              <a:lnSpc>
-                <a:spcPts val="1820"/>
-              </a:lnSpc>
-              <a:spcBef>
-                <a:spcPts val="300"/>
-              </a:spcBef>
-              <a:spcAft>
-                <a:spcPts val="300"/>
-              </a:spcAft>
-              <a:buNone/>
-            </a:pPr>
-            <a:r>
-              <a:rPr lang="en-US" sz="1300" i="1" dirty="0">
-                <a:solidFill>
-                  <a:srgbClr val="1C2833"/>
-                </a:solidFill>
-                <a:latin typeface="Georgia" pitchFamily="34" charset="0"/>
-                <a:ea typeface="Georgia" pitchFamily="34" charset="-122"/>
-                <a:cs typeface="Georgia" pitchFamily="34" charset="-120"/>
-              </a:rPr>
-              <a:t>Today: more research, then your first sketch.</a:t>
-            </a:r>
-            <a:endParaRPr lang="en-US" sz="1300" dirty="0"/>
-          </a:p>
-        </p:txBody>
-      </p:sp>
-      <p:sp>
-        <p:nvSpPr>
-          <p:cNvPr id="8" name="Text 6"/>
-          <p:cNvSpPr/>
-          <p:nvPr/>
-        </p:nvSpPr>
-        <p:spPr>
-          <a:xfrm>
-            <a:off x="692051" y="1612255"/>
-            <a:ext cx="7973389" cy="461963"/>
-          </a:xfrm>
-          <a:prstGeom prst="rect">
-            <a:avLst/>
-          </a:prstGeom>
-          <a:noFill/>
-          <a:ln/>
-        </p:spPr>
-        <p:txBody>
-          <a:bodyPr wrap="square" lIns="0" tIns="0" rIns="0" bIns="0" rtlCol="0" anchor="t"/>
-          <a:lstStyle/>
-          <a:p>
-            <a:pPr algn="l" indent="0" marL="0">
-              <a:lnSpc>
-                <a:spcPts val="1820"/>
-              </a:lnSpc>
-              <a:spcBef>
-                <a:spcPts val="300"/>
-              </a:spcBef>
-              <a:spcAft>
-                <a:spcPts val="300"/>
-              </a:spcAft>
-              <a:buNone/>
-            </a:pPr>
-            <a:r>
-              <a:rPr lang="en-US" sz="1300" i="1" dirty="0">
-                <a:solidFill>
-                  <a:srgbClr val="1C2833"/>
-                </a:solidFill>
-                <a:latin typeface="Georgia" pitchFamily="34" charset="0"/>
-                <a:ea typeface="Georgia" pitchFamily="34" charset="-122"/>
-                <a:cs typeface="Georgia" pitchFamily="34" charset="-120"/>
-              </a:rPr>
-              <a:t>Rules of a sketch: - Pencil only. - Label everything. - Annotate dimensions. - Leave white space for what you haven't figured out — write "TBD" and move on.</a:t>
-            </a:r>
-            <a:endParaRPr lang="en-US" sz="1300" dirty="0"/>
-          </a:p>
-        </p:txBody>
-      </p:sp>
-      <p:sp>
-        <p:nvSpPr>
-          <p:cNvPr id="9" name="Text 7"/>
-          <p:cNvSpPr/>
-          <p:nvPr/>
-        </p:nvSpPr>
-        <p:spPr>
-          <a:xfrm>
-            <a:off x="692051" y="2112318"/>
-            <a:ext cx="7973389" cy="461963"/>
-          </a:xfrm>
-          <a:prstGeom prst="rect">
-            <a:avLst/>
-          </a:prstGeom>
-          <a:noFill/>
-          <a:ln/>
-        </p:spPr>
-        <p:txBody>
-          <a:bodyPr wrap="square" lIns="0" tIns="0" rIns="0" bIns="0" rtlCol="0" anchor="t"/>
-          <a:lstStyle/>
-          <a:p>
-            <a:pPr algn="l" indent="0" marL="0">
-              <a:lnSpc>
-                <a:spcPts val="1820"/>
-              </a:lnSpc>
-              <a:spcBef>
-                <a:spcPts val="300"/>
-              </a:spcBef>
-              <a:spcAft>
-                <a:spcPts val="300"/>
-              </a:spcAft>
-              <a:buNone/>
-            </a:pPr>
-            <a:r>
-              <a:rPr lang="en-US" sz="1300" i="1" dirty="0">
-                <a:solidFill>
-                  <a:srgbClr val="1C2833"/>
-                </a:solidFill>
-                <a:latin typeface="Georgia" pitchFamily="34" charset="0"/>
-                <a:ea typeface="Georgia" pitchFamily="34" charset="-122"/>
-                <a:cs typeface="Georgia" pitchFamily="34" charset="-120"/>
-              </a:rPr>
-              <a:t>By end of class: - At least 3 citation slips on file (2 from yesterday + 1 new). - One sketch of the artefact, with labels.</a:t>
-            </a:r>
-            <a:endParaRPr lang="en-US" sz="1300" dirty="0"/>
-          </a:p>
-        </p:txBody>
-      </p:sp>
-      <p:sp>
-        <p:nvSpPr>
-          <p:cNvPr id="10" name="Text 8"/>
+            <a:pPr algn="l" marL="342900" indent="-342900">
+              <a:lnSpc>
+                <a:spcPts val="1620"/>
+              </a:lnSpc>
+              <a:spcAft>
+                <a:spcPts val="300"/>
+              </a:spcAft>
+              <a:buSzPct val="100000"/>
+              <a:buChar char="•"/>
+            </a:pPr>
+            <a:r>
+              <a:rPr lang="en-US" sz="1200" b="1" dirty="0">
+                <a:solidFill>
+                  <a:srgbClr val="1C2833"/>
+                </a:solidFill>
+                <a:latin typeface="Arial" pitchFamily="34" charset="0"/>
+                <a:ea typeface="Arial" pitchFamily="34" charset="-122"/>
+                <a:cs typeface="Arial" pitchFamily="34" charset="-120"/>
+              </a:rPr>
+              <a:t>Fermented-foods study</a:t>
+            </a:r>
+            <a:pPr algn="l" indent="0" marL="0">
+              <a:lnSpc>
+                <a:spcPts val="1620"/>
+              </a:lnSpc>
+              <a:spcAft>
+                <a:spcPts val="300"/>
+              </a:spcAft>
+              <a:buNone/>
+            </a:pPr>
+            <a:r>
+              <a:rPr lang="en-US" sz="1200" dirty="0">
+                <a:solidFill>
+                  <a:srgbClr val="1C2833"/>
+                </a:solidFill>
+                <a:latin typeface="Arial" pitchFamily="34" charset="0"/>
+                <a:ea typeface="Arial" pitchFamily="34" charset="-122"/>
+                <a:cs typeface="Arial" pitchFamily="34" charset="-120"/>
+              </a:rPr>
+              <a:t> — Layout of the poster: experimental setup, photo positions, observation table</a:t>
+            </a:r>
+            <a:endParaRPr lang="en-US" sz="1200" dirty="0"/>
+          </a:p>
+          <a:p>
+            <a:pPr algn="l" marL="342900" indent="-342900">
+              <a:lnSpc>
+                <a:spcPts val="1620"/>
+              </a:lnSpc>
+              <a:spcAft>
+                <a:spcPts val="300"/>
+              </a:spcAft>
+              <a:buSzPct val="100000"/>
+              <a:buChar char="•"/>
+            </a:pPr>
+            <a:r>
+              <a:rPr lang="en-US" sz="1200" b="1" dirty="0">
+                <a:solidFill>
+                  <a:srgbClr val="1C2833"/>
+                </a:solidFill>
+                <a:latin typeface="Arial" pitchFamily="34" charset="0"/>
+                <a:ea typeface="Arial" pitchFamily="34" charset="-122"/>
+                <a:cs typeface="Arial" pitchFamily="34" charset="-120"/>
+              </a:rPr>
+              <a:t>Mandala / geometry</a:t>
+            </a:r>
+            <a:pPr algn="l" indent="0" marL="0">
+              <a:lnSpc>
+                <a:spcPts val="1620"/>
+              </a:lnSpc>
+              <a:spcAft>
+                <a:spcPts val="300"/>
+              </a:spcAft>
+              <a:buNone/>
+            </a:pPr>
+            <a:r>
+              <a:rPr lang="en-US" sz="1200" dirty="0">
+                <a:solidFill>
+                  <a:srgbClr val="1C2833"/>
+                </a:solidFill>
+                <a:latin typeface="Arial" pitchFamily="34" charset="0"/>
+                <a:ea typeface="Arial" pitchFamily="34" charset="-122"/>
+                <a:cs typeface="Arial" pitchFamily="34" charset="-120"/>
+              </a:rPr>
+              <a:t> — Pencil construction lines + petal layout + colour key</a:t>
+            </a:r>
+            <a:endParaRPr lang="en-US" sz="1200" dirty="0"/>
+          </a:p>
+          <a:p>
+            <a:pPr algn="l" marL="342900" indent="-342900">
+              <a:lnSpc>
+                <a:spcPts val="1620"/>
+              </a:lnSpc>
+              <a:spcAft>
+                <a:spcPts val="300"/>
+              </a:spcAft>
+              <a:buSzPct val="100000"/>
+              <a:buChar char="•"/>
+            </a:pPr>
+            <a:r>
+              <a:rPr lang="en-US" sz="1200" b="1" dirty="0">
+                <a:solidFill>
+                  <a:srgbClr val="1C2833"/>
+                </a:solidFill>
+                <a:latin typeface="Arial" pitchFamily="34" charset="0"/>
+                <a:ea typeface="Arial" pitchFamily="34" charset="-122"/>
+                <a:cs typeface="Arial" pitchFamily="34" charset="-120"/>
+              </a:rPr>
+              <a:t>Calendar</a:t>
+            </a:r>
+            <a:pPr algn="l" indent="0" marL="0">
+              <a:lnSpc>
+                <a:spcPts val="1620"/>
+              </a:lnSpc>
+              <a:spcAft>
+                <a:spcPts val="300"/>
+              </a:spcAft>
+              <a:buNone/>
+            </a:pPr>
+            <a:r>
+              <a:rPr lang="en-US" sz="1200" dirty="0">
+                <a:solidFill>
+                  <a:srgbClr val="1C2833"/>
+                </a:solidFill>
+                <a:latin typeface="Arial" pitchFamily="34" charset="0"/>
+                <a:ea typeface="Arial" pitchFamily="34" charset="-122"/>
+                <a:cs typeface="Arial" pitchFamily="34" charset="-120"/>
+              </a:rPr>
+              <a:t> — One-week template showing all the columns (date, tithi, paksa, festival)</a:t>
+            </a:r>
+            <a:endParaRPr lang="en-US" sz="1200" dirty="0"/>
+          </a:p>
+          <a:p>
+            <a:pPr algn="l" marL="342900" indent="-342900">
+              <a:lnSpc>
+                <a:spcPts val="1620"/>
+              </a:lnSpc>
+              <a:spcAft>
+                <a:spcPts val="300"/>
+              </a:spcAft>
+              <a:buSzPct val="100000"/>
+              <a:buChar char="•"/>
+            </a:pPr>
+            <a:r>
+              <a:rPr lang="en-US" sz="1200" b="1" dirty="0">
+                <a:solidFill>
+                  <a:srgbClr val="1C2833"/>
+                </a:solidFill>
+                <a:latin typeface="Arial" pitchFamily="34" charset="0"/>
+                <a:ea typeface="Arial" pitchFamily="34" charset="-122"/>
+                <a:cs typeface="Arial" pitchFamily="34" charset="-120"/>
+              </a:rPr>
+              <a:t>Herb deck</a:t>
+            </a:r>
+            <a:pPr algn="l" indent="0" marL="0">
+              <a:lnSpc>
+                <a:spcPts val="1620"/>
+              </a:lnSpc>
+              <a:spcAft>
+                <a:spcPts val="300"/>
+              </a:spcAft>
+              <a:buNone/>
+            </a:pPr>
+            <a:r>
+              <a:rPr lang="en-US" sz="1200" dirty="0">
+                <a:solidFill>
+                  <a:srgbClr val="1C2833"/>
+                </a:solidFill>
+                <a:latin typeface="Arial" pitchFamily="34" charset="0"/>
+                <a:ea typeface="Arial" pitchFamily="34" charset="-122"/>
+                <a:cs typeface="Arial" pitchFamily="34" charset="-120"/>
+              </a:rPr>
+              <a:t> — One card mock-up at actual size, with positions for photo, sketch, name, use</a:t>
+            </a:r>
+            <a:endParaRPr lang="en-US" sz="1200" dirty="0"/>
+          </a:p>
+          <a:p>
+            <a:pPr algn="l" marL="342900" indent="-342900">
+              <a:lnSpc>
+                <a:spcPts val="1620"/>
+              </a:lnSpc>
+              <a:spcAft>
+                <a:spcPts val="300"/>
+              </a:spcAft>
+              <a:buSzPct val="100000"/>
+              <a:buChar char="•"/>
+            </a:pPr>
+            <a:r>
+              <a:rPr lang="en-US" sz="1200" b="1" dirty="0">
+                <a:solidFill>
+                  <a:srgbClr val="1C2833"/>
+                </a:solidFill>
+                <a:latin typeface="Arial" pitchFamily="34" charset="0"/>
+                <a:ea typeface="Arial" pitchFamily="34" charset="-122"/>
+                <a:cs typeface="Arial" pitchFamily="34" charset="-120"/>
+              </a:rPr>
+              <a:t>Magic-square art</a:t>
+            </a:r>
+            <a:pPr algn="l" indent="0" marL="0">
+              <a:lnSpc>
+                <a:spcPts val="1620"/>
+              </a:lnSpc>
+              <a:spcAft>
+                <a:spcPts val="300"/>
+              </a:spcAft>
+              <a:buNone/>
+            </a:pPr>
+            <a:r>
+              <a:rPr lang="en-US" sz="1200" dirty="0">
+                <a:solidFill>
+                  <a:srgbClr val="1C2833"/>
+                </a:solidFill>
+                <a:latin typeface="Arial" pitchFamily="34" charset="0"/>
+                <a:ea typeface="Arial" pitchFamily="34" charset="-122"/>
+                <a:cs typeface="Arial" pitchFamily="34" charset="-120"/>
+              </a:rPr>
+              <a:t> — The verified grid + the colour/pattern overlay plan</a:t>
+            </a:r>
+            <a:endParaRPr lang="en-US" sz="1200" dirty="0"/>
+          </a:p>
+          <a:p>
+            <a:pPr algn="l" marL="342900" indent="-342900">
+              <a:lnSpc>
+                <a:spcPts val="1620"/>
+              </a:lnSpc>
+              <a:spcAft>
+                <a:spcPts val="300"/>
+              </a:spcAft>
+              <a:buSzPct val="100000"/>
+              <a:buChar char="•"/>
+            </a:pPr>
+            <a:r>
+              <a:rPr lang="en-US" sz="1200" b="1" dirty="0">
+                <a:solidFill>
+                  <a:srgbClr val="1C2833"/>
+                </a:solidFill>
+                <a:latin typeface="Arial" pitchFamily="34" charset="0"/>
+                <a:ea typeface="Arial" pitchFamily="34" charset="-122"/>
+                <a:cs typeface="Arial" pitchFamily="34" charset="-120"/>
+              </a:rPr>
+              <a:t>Yoga sequence</a:t>
+            </a:r>
+            <a:pPr algn="l" indent="0" marL="0">
+              <a:lnSpc>
+                <a:spcPts val="1620"/>
+              </a:lnSpc>
+              <a:spcAft>
+                <a:spcPts val="300"/>
+              </a:spcAft>
+              <a:buNone/>
+            </a:pPr>
+            <a:r>
+              <a:rPr lang="en-US" sz="1200" dirty="0">
+                <a:solidFill>
+                  <a:srgbClr val="1C2833"/>
+                </a:solidFill>
+                <a:latin typeface="Arial" pitchFamily="34" charset="0"/>
+                <a:ea typeface="Arial" pitchFamily="34" charset="-122"/>
+                <a:cs typeface="Arial" pitchFamily="34" charset="-120"/>
+              </a:rPr>
+              <a:t> — A storyboard: 8 boxes, one stick-figure pose per box, time + transition arrows</a:t>
+            </a:r>
+            <a:endParaRPr lang="en-US" sz="1200" dirty="0"/>
+          </a:p>
+        </p:txBody>
+      </p:sp>
+      <p:sp>
+        <p:nvSpPr>
+          <p:cNvPr id="5" name="Text 3"/>
           <p:cNvSpPr/>
           <p:nvPr/>
         </p:nvSpPr>
@@ -5846,7 +7482,7 @@
                 <a:ea typeface="Georgia" pitchFamily="34" charset="-122"/>
                 <a:cs typeface="Georgia" pitchFamily="34" charset="-120"/>
               </a:rPr>
-              <a:t>Homework</a:t>
+              <a:t>Core (10 min) (cont.)</a:t>
             </a:r>
             <a:endParaRPr lang="en-US" sz="1800" dirty="0"/>
           </a:p>
@@ -5860,8 +7496,8 @@
         </p:nvSpPr>
         <p:spPr>
           <a:xfrm>
-            <a:off x="406301" y="870942"/>
-            <a:ext cx="8498026" cy="639812"/>
+            <a:off x="634901" y="883593"/>
+            <a:ext cx="8102798" cy="1013222"/>
           </a:xfrm>
           <a:prstGeom prst="rect">
             <a:avLst/>
@@ -5873,13 +7509,31 @@
           <a:bodyPr wrap="square" lIns="0" tIns="0" rIns="0" bIns="0" rtlCol="0" anchor="t"/>
           <a:lstStyle/>
           <a:p>
-            <a:pPr algn="l" indent="0" marL="0">
-              <a:lnSpc>
-                <a:spcPts val="1680"/>
-              </a:lnSpc>
-              <a:spcBef>
-                <a:spcPts val="300"/>
-              </a:spcBef>
+            <a:pPr algn="l" marL="342900" indent="-342900">
+              <a:lnSpc>
+                <a:spcPts val="1620"/>
+              </a:lnSpc>
+              <a:spcAft>
+                <a:spcPts val="300"/>
+              </a:spcAft>
+              <a:buSzPct val="100000"/>
+              <a:buChar char="•"/>
+            </a:pPr>
+            <a:r>
+              <a:rPr lang="en-US" sz="1200" b="1" dirty="0">
+                <a:solidFill>
+                  <a:srgbClr val="1C2833"/>
+                </a:solidFill>
+                <a:latin typeface="Arial" pitchFamily="34" charset="0"/>
+                <a:ea typeface="Arial" pitchFamily="34" charset="-122"/>
+                <a:cs typeface="Arial" pitchFamily="34" charset="-120"/>
+              </a:rPr>
+              <a:t>Sustainability audit</a:t>
+            </a:r>
+            <a:pPr algn="l" indent="0" marL="0">
+              <a:lnSpc>
+                <a:spcPts val="1620"/>
+              </a:lnSpc>
               <a:spcAft>
                 <a:spcPts val="300"/>
               </a:spcAft>
@@ -5894,7 +7548,139 @@
                 <a:ea typeface="Arial" pitchFamily="34" charset="-122"/>
                 <a:cs typeface="Arial" pitchFamily="34" charset="-120"/>
               </a:rPr>
-              <a:t>– Refine your sketch at home if you want. Don't start a second sketch — keep iterating on the first. – Photograph your sketch and your three citation slips. Bring the photos or the originals to Day 5. – Read your partner's sticky-note comment. Don't react yet — just hold it for tomorrow.</a:t>
+              <a:t> — The data collection sheet + the proposed-changes table</a:t>
+            </a:r>
+            <a:endParaRPr lang="en-US" sz="1200" dirty="0"/>
+          </a:p>
+          <a:p>
+            <a:pPr algn="l" marL="342900" indent="-342900">
+              <a:lnSpc>
+                <a:spcPts val="1620"/>
+              </a:lnSpc>
+              <a:spcAft>
+                <a:spcPts val="300"/>
+              </a:spcAft>
+              <a:buSzPct val="100000"/>
+              <a:buChar char="•"/>
+            </a:pPr>
+            <a:r>
+              <a:rPr lang="en-US" sz="1200" b="1" dirty="0">
+                <a:solidFill>
+                  <a:srgbClr val="1C2833"/>
+                </a:solidFill>
+                <a:latin typeface="Arial" pitchFamily="34" charset="0"/>
+                <a:ea typeface="Arial" pitchFamily="34" charset="-122"/>
+                <a:cs typeface="Arial" pitchFamily="34" charset="-120"/>
+              </a:rPr>
+              <a:t>Doṣa self-study</a:t>
+            </a:r>
+            <a:pPr algn="l" indent="0" marL="0">
+              <a:lnSpc>
+                <a:spcPts val="1620"/>
+              </a:lnSpc>
+              <a:spcAft>
+                <a:spcPts val="300"/>
+              </a:spcAft>
+              <a:buNone/>
+            </a:pPr>
+            <a:r>
+              <a:rPr lang="en-US" sz="1200" dirty="0">
+                <a:solidFill>
+                  <a:srgbClr val="1C2833"/>
+                </a:solidFill>
+                <a:latin typeface="Arial" pitchFamily="34" charset="0"/>
+                <a:ea typeface="Arial" pitchFamily="34" charset="-122"/>
+                <a:cs typeface="Arial" pitchFamily="34" charset="-120"/>
+              </a:rPr>
+              <a:t> — The 7-day journal table with the columns named</a:t>
+            </a:r>
+            <a:endParaRPr lang="en-US" sz="1200" dirty="0"/>
+          </a:p>
+          <a:p>
+            <a:pPr algn="l" marL="342900" indent="-342900">
+              <a:lnSpc>
+                <a:spcPts val="1620"/>
+              </a:lnSpc>
+              <a:spcAft>
+                <a:spcPts val="300"/>
+              </a:spcAft>
+              <a:buSzPct val="100000"/>
+              <a:buChar char="•"/>
+            </a:pPr>
+            <a:r>
+              <a:rPr lang="en-US" sz="1200" b="1" dirty="0">
+                <a:solidFill>
+                  <a:srgbClr val="1C2833"/>
+                </a:solidFill>
+                <a:latin typeface="Arial" pitchFamily="34" charset="0"/>
+                <a:ea typeface="Arial" pitchFamily="34" charset="-122"/>
+                <a:cs typeface="Arial" pitchFamily="34" charset="-120"/>
+              </a:rPr>
+              <a:t>Multiplication comparison</a:t>
+            </a:r>
+            <a:pPr algn="l" indent="0" marL="0">
+              <a:lnSpc>
+                <a:spcPts val="1620"/>
+              </a:lnSpc>
+              <a:spcAft>
+                <a:spcPts val="300"/>
+              </a:spcAft>
+              <a:buNone/>
+            </a:pPr>
+            <a:r>
+              <a:rPr lang="en-US" sz="1200" dirty="0">
+                <a:solidFill>
+                  <a:srgbClr val="1C2833"/>
+                </a:solidFill>
+                <a:latin typeface="Arial" pitchFamily="34" charset="0"/>
+                <a:ea typeface="Arial" pitchFamily="34" charset="-122"/>
+                <a:cs typeface="Arial" pitchFamily="34" charset="-120"/>
+              </a:rPr>
+              <a:t> — The problem-set page + the timing-sheet design</a:t>
+            </a:r>
+            <a:endParaRPr lang="en-US" sz="1200" dirty="0"/>
+          </a:p>
+          <a:p>
+            <a:pPr algn="l" marL="342900" indent="-342900">
+              <a:lnSpc>
+                <a:spcPts val="1620"/>
+              </a:lnSpc>
+              <a:spcAft>
+                <a:spcPts val="300"/>
+              </a:spcAft>
+              <a:buSzPct val="100000"/>
+              <a:buChar char="•"/>
+            </a:pPr>
+            <a:r>
+              <a:rPr lang="en-US" sz="1200" b="1" dirty="0">
+                <a:solidFill>
+                  <a:srgbClr val="1C2833"/>
+                </a:solidFill>
+                <a:latin typeface="Arial" pitchFamily="34" charset="0"/>
+                <a:ea typeface="Arial" pitchFamily="34" charset="-122"/>
+                <a:cs typeface="Arial" pitchFamily="34" charset="-120"/>
+              </a:rPr>
+              <a:t>Open design</a:t>
+            </a:r>
+            <a:pPr algn="l" indent="0" marL="0">
+              <a:lnSpc>
+                <a:spcPts val="1620"/>
+              </a:lnSpc>
+              <a:spcAft>
+                <a:spcPts val="300"/>
+              </a:spcAft>
+              <a:buNone/>
+            </a:pPr>
+            <a:r>
+              <a:rPr lang="en-US" sz="1200" dirty="0">
+                <a:solidFill>
+                  <a:srgbClr val="1C2833"/>
+                </a:solidFill>
+                <a:latin typeface="Arial" pitchFamily="34" charset="0"/>
+                <a:ea typeface="Arial" pitchFamily="34" charset="-122"/>
+                <a:cs typeface="Arial" pitchFamily="34" charset="-120"/>
+              </a:rPr>
+              <a:t> — Whatever fits</a:t>
             </a:r>
             <a:endParaRPr lang="en-US" sz="1200" dirty="0"/>
           </a:p>
